--- a/v03/pitch-deck.pptx
+++ b/v03/pitch-deck.pptx
@@ -3296,8 +3296,8 @@
         </p:nvSpPr>
         <p:spPr>
           <a:xfrm>
-            <a:off x="7711135" y="365760"/>
-            <a:ext cx="3840480" cy="329184"/>
+            <a:off x="8808415" y="365760"/>
+            <a:ext cx="2743200" cy="329184"/>
           </a:xfrm>
           <a:prstGeom prst="roundRect">
             <a:avLst>
@@ -3344,8 +3344,8 @@
         </p:nvSpPr>
         <p:spPr>
           <a:xfrm>
-            <a:off x="7711135" y="429768"/>
-            <a:ext cx="3840480" cy="274320"/>
+            <a:off x="8808415" y="429768"/>
+            <a:ext cx="2743200" cy="274320"/>
           </a:xfrm>
           <a:prstGeom prst="rect">
             <a:avLst/>
@@ -3370,7 +3370,7 @@
                 </a:solidFill>
                 <a:latin typeface="JetBrains Mono"/>
               </a:rPr>
-              <a:t>PRE-SEED · EWOR IDEATION APPLICATION</a:t>
+              <a:t>PRE-SEED THESIS · MAY 2026</a:t>
             </a:r>
           </a:p>
         </p:txBody>
@@ -3480,7 +3480,7 @@
         <p:spPr>
           <a:xfrm>
             <a:off x="640080" y="4160520"/>
-            <a:ext cx="9601200" cy="1097280"/>
+            <a:ext cx="9601200" cy="1280160"/>
           </a:xfrm>
           <a:prstGeom prst="rect">
             <a:avLst/>
@@ -3499,31 +3499,22 @@
               </a:lnSpc>
             </a:pPr>
             <a:r>
+              <a:rPr sz="1400" b="1" i="0">
+                <a:solidFill>
+                  <a:srgbClr val="0A0A0A"/>
+                </a:solidFill>
+                <a:latin typeface="Inter"/>
+              </a:rPr>
+              <a:t>Code becomes a dark factory. Humans operate one level up.</a:t>
+            </a:r>
+            <a:r>
               <a:rPr sz="1400" b="0" i="0">
                 <a:solidFill>
                   <a:srgbClr val="3A3A3A"/>
                 </a:solidFill>
                 <a:latin typeface="Inter"/>
               </a:rPr>
-              <a:t>We build a </a:t>
-            </a:r>
-            <a:r>
-              <a:rPr sz="1400" b="1" i="0">
-                <a:solidFill>
-                  <a:srgbClr val="0A0A0A"/>
-                </a:solidFill>
-                <a:latin typeface="Inter"/>
-              </a:rPr>
-              <a:t>contract substrate</a:t>
-            </a:r>
-            <a:r>
-              <a:rPr sz="1400" b="0" i="0">
-                <a:solidFill>
-                  <a:srgbClr val="3A3A3A"/>
-                </a:solidFill>
-                <a:latin typeface="Inter"/>
-              </a:rPr>
-              <a:t> so AI-generated code stays coherent across cycles. Engineering teams approve intent and architecture; agents regenerate code from approved contract; drift is detected before it ships.</a:t>
+              <a:t> We build the contract substrate that keeps AI-generated code coherent across cycles — engineering teams approve intent and architecture; agents regenerate code from approved contract; drift is detected before it ships.</a:t>
             </a:r>
           </a:p>
         </p:txBody>
@@ -3821,7 +3812,7 @@
         <p:spPr>
           <a:xfrm>
             <a:off x="640080" y="868680"/>
-            <a:ext cx="11155680" cy="1280160"/>
+            <a:ext cx="9601200" cy="914400"/>
           </a:xfrm>
           <a:prstGeom prst="rect">
             <a:avLst/>
@@ -3846,7 +3837,7 @@
                 </a:solidFill>
                 <a:latin typeface="Inter"/>
               </a:rPr>
-              <a:t>EWOR </a:t>
+              <a:t>Pre-seed: </a:t>
             </a:r>
             <a:r>
               <a:rPr sz="3000" b="0" i="1">
@@ -3855,7 +3846,7 @@
                 </a:solidFill>
                 <a:latin typeface="Fraunces"/>
               </a:rPr>
-              <a:t>Ideation Fellowship.</a:t>
+              <a:t>$XXX</a:t>
             </a:r>
             <a:r>
               <a:rPr sz="3000" b="1" i="0">
@@ -3864,60 +3855,21 @@
                 </a:solidFill>
                 <a:latin typeface="Inter"/>
               </a:rPr>
-              <a:t> Build the contract layer for the agentic era.</a:t>
-            </a:r>
-          </a:p>
-        </p:txBody>
-      </p:sp>
-      <p:sp>
-        <p:nvSpPr>
-          <p:cNvPr id="8" name="TextBox 7"/>
-          <p:cNvSpPr txBox="1"/>
-          <p:nvPr/>
-        </p:nvSpPr>
-        <p:spPr>
-          <a:xfrm>
-            <a:off x="640080" y="2194560"/>
-            <a:ext cx="10515600" cy="640080"/>
-          </a:xfrm>
-          <a:prstGeom prst="rect">
-            <a:avLst/>
-          </a:prstGeom>
-          <a:noFill/>
-        </p:spPr>
-        <p:txBody>
-          <a:bodyPr wrap="square" lIns="0" rIns="0" tIns="0" bIns="0" anchor="t">
-            <a:spAutoFit/>
-          </a:bodyPr>
-          <a:lstStyle/>
-          <a:p>
-            <a:pPr algn="l">
-              <a:lnSpc>
-                <a:spcPct val="140000"/>
-              </a:lnSpc>
-            </a:pPr>
-            <a:r>
-              <a:rPr sz="1400" b="0" i="0">
-                <a:solidFill>
-                  <a:srgbClr val="3A3A3A"/>
-                </a:solidFill>
-                <a:latin typeface="Inter"/>
-              </a:rPr>
-              <a:t>No equity tuition, four-week intensive, mentor pairing. The right vehicle for the right stage. Parallel to YC W26 application and select-VC outreach (a16z, Project Europe, AI grants).</a:t>
-            </a:r>
-          </a:p>
-        </p:txBody>
-      </p:sp>
-      <p:sp>
-        <p:nvSpPr>
-          <p:cNvPr id="9" name="Rounded Rectangle 8"/>
+              <a:t> for 18 months of runway.</a:t>
+            </a:r>
+          </a:p>
+        </p:txBody>
+      </p:sp>
+      <p:sp>
+        <p:nvSpPr>
+          <p:cNvPr id="8" name="Rounded Rectangle 7"/>
           <p:cNvSpPr/>
           <p:nvPr/>
         </p:nvSpPr>
         <p:spPr>
           <a:xfrm>
-            <a:off x="640080" y="3108960"/>
-            <a:ext cx="5318607" cy="2011680"/>
+            <a:off x="10332720" y="960120"/>
+            <a:ext cx="1828800" cy="292608"/>
           </a:xfrm>
           <a:prstGeom prst="roundRect">
             <a:avLst>
@@ -3958,14 +3910,140 @@
       </p:sp>
       <p:sp>
         <p:nvSpPr>
-          <p:cNvPr id="10" name="Rectangle 9"/>
+          <p:cNvPr id="9" name="TextBox 8"/>
+          <p:cNvSpPr txBox="1"/>
+          <p:nvPr/>
+        </p:nvSpPr>
+        <p:spPr>
+          <a:xfrm>
+            <a:off x="10332720" y="1005840"/>
+            <a:ext cx="1828800" cy="274320"/>
+          </a:xfrm>
+          <a:prstGeom prst="rect">
+            <a:avLst/>
+          </a:prstGeom>
+          <a:noFill/>
+        </p:spPr>
+        <p:txBody>
+          <a:bodyPr wrap="square" lIns="0" rIns="0" tIns="0" bIns="0" anchor="t">
+            <a:spAutoFit/>
+          </a:bodyPr>
+          <a:lstStyle/>
+          <a:p>
+            <a:pPr algn="ctr">
+              <a:lnSpc>
+                <a:spcPct val="100000"/>
+              </a:lnSpc>
+            </a:pPr>
+            <a:r>
+              <a:rPr sz="800" b="1" i="0">
+                <a:solidFill>
+                  <a:srgbClr val="C43A50"/>
+                </a:solidFill>
+                <a:latin typeface="JetBrains Mono"/>
+              </a:rPr>
+              <a:t>TODO · ILYA: TARGET $</a:t>
+            </a:r>
+          </a:p>
+        </p:txBody>
+      </p:sp>
+      <p:sp>
+        <p:nvSpPr>
+          <p:cNvPr id="10" name="TextBox 9"/>
+          <p:cNvSpPr txBox="1"/>
+          <p:nvPr/>
+        </p:nvSpPr>
+        <p:spPr>
+          <a:xfrm>
+            <a:off x="640080" y="1920240"/>
+            <a:ext cx="10515600" cy="777240"/>
+          </a:xfrm>
+          <a:prstGeom prst="rect">
+            <a:avLst/>
+          </a:prstGeom>
+          <a:noFill/>
+        </p:spPr>
+        <p:txBody>
+          <a:bodyPr wrap="square" lIns="0" rIns="0" tIns="0" bIns="0" anchor="t">
+            <a:spAutoFit/>
+          </a:bodyPr>
+          <a:lstStyle/>
+          <a:p>
+            <a:pPr algn="l">
+              <a:lnSpc>
+                <a:spcPct val="140000"/>
+              </a:lnSpc>
+            </a:pPr>
+            <a:r>
+              <a:rPr sz="1400" b="0" i="0">
+                <a:solidFill>
+                  <a:srgbClr val="3A3A3A"/>
+                </a:solidFill>
+                <a:latin typeface="Inter"/>
+              </a:rPr>
+              <a:t>Build the contract layer for the agentic era. Engine v0.4 → first 10 design partners → drift telemetry → Series A traction. Solo today; team-of-2 by month six.</a:t>
+            </a:r>
+          </a:p>
+        </p:txBody>
+      </p:sp>
+      <p:sp>
+        <p:nvSpPr>
+          <p:cNvPr id="11" name="Rounded Rectangle 10"/>
           <p:cNvSpPr/>
           <p:nvPr/>
         </p:nvSpPr>
         <p:spPr>
           <a:xfrm>
-            <a:off x="640080" y="3108960"/>
-            <a:ext cx="31750" cy="2011680"/>
+            <a:off x="640080" y="3063240"/>
+            <a:ext cx="5318607" cy="2194560"/>
+          </a:xfrm>
+          <a:prstGeom prst="roundRect">
+            <a:avLst>
+              <a:gd name="adj" fmla="val 6000"/>
+            </a:avLst>
+          </a:prstGeom>
+          <a:solidFill>
+            <a:srgbClr val="FBE6EA"/>
+          </a:solidFill>
+          <a:ln w="7620">
+            <a:solidFill>
+              <a:srgbClr val="E84057"/>
+            </a:solidFill>
+          </a:ln>
+          <a:effectLst/>
+        </p:spPr>
+        <p:style>
+          <a:lnRef idx="1">
+            <a:schemeClr val="accent1"/>
+          </a:lnRef>
+          <a:fillRef idx="3">
+            <a:schemeClr val="accent1"/>
+          </a:fillRef>
+          <a:effectRef idx="2">
+            <a:schemeClr val="accent1"/>
+          </a:effectRef>
+          <a:fontRef idx="minor">
+            <a:schemeClr val="lt1"/>
+          </a:fontRef>
+        </p:style>
+        <p:txBody>
+          <a:bodyPr rtlCol="0" anchor="ctr"/>
+          <a:lstStyle/>
+          <a:p>
+            <a:pPr algn="ctr"/>
+          </a:p>
+        </p:txBody>
+      </p:sp>
+      <p:sp>
+        <p:nvSpPr>
+          <p:cNvPr id="12" name="Rectangle 11"/>
+          <p:cNvSpPr/>
+          <p:nvPr/>
+        </p:nvSpPr>
+        <p:spPr>
+          <a:xfrm>
+            <a:off x="640080" y="3063240"/>
+            <a:ext cx="31750" cy="2194560"/>
           </a:xfrm>
           <a:prstGeom prst="rect">
             <a:avLst/>
@@ -4002,13 +4080,13 @@
       </p:sp>
       <p:sp>
         <p:nvSpPr>
-          <p:cNvPr id="11" name="TextBox 10"/>
-          <p:cNvSpPr txBox="1"/>
-          <p:nvPr/>
-        </p:nvSpPr>
-        <p:spPr>
-          <a:xfrm>
-            <a:off x="914400" y="3291840"/>
+          <p:cNvPr id="13" name="TextBox 12"/>
+          <p:cNvSpPr txBox="1"/>
+          <p:nvPr/>
+        </p:nvSpPr>
+        <p:spPr>
+          <a:xfrm>
+            <a:off x="914400" y="3246120"/>
             <a:ext cx="4861407" cy="274320"/>
           </a:xfrm>
           <a:prstGeom prst="rect">
@@ -4034,20 +4112,20 @@
                 </a:solidFill>
                 <a:latin typeface="JetBrains Mono"/>
               </a:rPr>
-              <a:t>ASKING FROM EWOR</a:t>
-            </a:r>
-          </a:p>
-        </p:txBody>
-      </p:sp>
-      <p:sp>
-        <p:nvSpPr>
-          <p:cNvPr id="12" name="TextBox 11"/>
-          <p:cNvSpPr txBox="1"/>
-          <p:nvPr/>
-        </p:nvSpPr>
-        <p:spPr>
-          <a:xfrm>
-            <a:off x="914400" y="3703320"/>
+              <a:t>USE OF FUNDS — 18 MONTHS</a:t>
+            </a:r>
+          </a:p>
+        </p:txBody>
+      </p:sp>
+      <p:sp>
+        <p:nvSpPr>
+          <p:cNvPr id="14" name="TextBox 13"/>
+          <p:cNvSpPr txBox="1"/>
+          <p:nvPr/>
+        </p:nvSpPr>
+        <p:spPr>
+          <a:xfrm>
+            <a:off x="914400" y="3657600"/>
             <a:ext cx="182880" cy="274320"/>
           </a:xfrm>
           <a:prstGeom prst="rect">
@@ -4080,61 +4158,148 @@
       </p:sp>
       <p:sp>
         <p:nvSpPr>
-          <p:cNvPr id="13" name="TextBox 12"/>
-          <p:cNvSpPr txBox="1"/>
-          <p:nvPr/>
-        </p:nvSpPr>
-        <p:spPr>
-          <a:xfrm>
-            <a:off x="1143000" y="3703320"/>
-            <a:ext cx="4541367" cy="274320"/>
-          </a:xfrm>
-          <a:prstGeom prst="rect">
-            <a:avLst/>
-          </a:prstGeom>
-          <a:noFill/>
-        </p:spPr>
-        <p:txBody>
-          <a:bodyPr wrap="square" lIns="0" rIns="0" tIns="0" bIns="0" anchor="t">
-            <a:spAutoFit/>
-          </a:bodyPr>
-          <a:lstStyle/>
-          <a:p>
-            <a:pPr algn="l">
-              <a:lnSpc>
-                <a:spcPct val="130000"/>
+          <p:cNvPr id="15" name="TextBox 14"/>
+          <p:cNvSpPr txBox="1"/>
+          <p:nvPr/>
+        </p:nvSpPr>
+        <p:spPr>
+          <a:xfrm>
+            <a:off x="1143000" y="3657600"/>
+            <a:ext cx="4541367" cy="365760"/>
+          </a:xfrm>
+          <a:prstGeom prst="rect">
+            <a:avLst/>
+          </a:prstGeom>
+          <a:noFill/>
+        </p:spPr>
+        <p:txBody>
+          <a:bodyPr wrap="square" lIns="0" rIns="0" tIns="0" bIns="0" anchor="t">
+            <a:spAutoFit/>
+          </a:bodyPr>
+          <a:lstStyle/>
+          <a:p>
+            <a:pPr algn="l">
+              <a:lnSpc>
+                <a:spcPct val="135000"/>
+              </a:lnSpc>
+            </a:pPr>
+            <a:r>
+              <a:rPr sz="1000" b="1" i="0">
+                <a:solidFill>
+                  <a:srgbClr val="0A0A0A"/>
+                </a:solidFill>
+                <a:latin typeface="Inter"/>
+              </a:rPr>
+              <a:t>Engineering — 55%</a:t>
+            </a:r>
+            <a:r>
+              <a:rPr sz="1000" b="0" i="0">
+                <a:solidFill>
+                  <a:srgbClr val="1A1A1A"/>
+                </a:solidFill>
+                <a:latin typeface="Inter"/>
+              </a:rPr>
+              <a:t> · technical co-founder + 2 senior engineers (engine, infra)</a:t>
+            </a:r>
+          </a:p>
+        </p:txBody>
+      </p:sp>
+      <p:sp>
+        <p:nvSpPr>
+          <p:cNvPr id="16" name="TextBox 15"/>
+          <p:cNvSpPr txBox="1"/>
+          <p:nvPr/>
+        </p:nvSpPr>
+        <p:spPr>
+          <a:xfrm>
+            <a:off x="914400" y="4041648"/>
+            <a:ext cx="182880" cy="274320"/>
+          </a:xfrm>
+          <a:prstGeom prst="rect">
+            <a:avLst/>
+          </a:prstGeom>
+          <a:noFill/>
+        </p:spPr>
+        <p:txBody>
+          <a:bodyPr wrap="square" lIns="0" rIns="0" tIns="0" bIns="0" anchor="t">
+            <a:spAutoFit/>
+          </a:bodyPr>
+          <a:lstStyle/>
+          <a:p>
+            <a:pPr algn="l">
+              <a:lnSpc>
+                <a:spcPct val="100000"/>
               </a:lnSpc>
             </a:pPr>
             <a:r>
               <a:rPr sz="1100" b="1" i="0">
                 <a:solidFill>
+                  <a:srgbClr val="E84057"/>
+                </a:solidFill>
+                <a:latin typeface="JetBrains Mono"/>
+              </a:rPr>
+              <a:t>→</a:t>
+            </a:r>
+          </a:p>
+        </p:txBody>
+      </p:sp>
+      <p:sp>
+        <p:nvSpPr>
+          <p:cNvPr id="17" name="TextBox 16"/>
+          <p:cNvSpPr txBox="1"/>
+          <p:nvPr/>
+        </p:nvSpPr>
+        <p:spPr>
+          <a:xfrm>
+            <a:off x="1143000" y="4041648"/>
+            <a:ext cx="4541367" cy="365760"/>
+          </a:xfrm>
+          <a:prstGeom prst="rect">
+            <a:avLst/>
+          </a:prstGeom>
+          <a:noFill/>
+        </p:spPr>
+        <p:txBody>
+          <a:bodyPr wrap="square" lIns="0" rIns="0" tIns="0" bIns="0" anchor="t">
+            <a:spAutoFit/>
+          </a:bodyPr>
+          <a:lstStyle/>
+          <a:p>
+            <a:pPr algn="l">
+              <a:lnSpc>
+                <a:spcPct val="135000"/>
+              </a:lnSpc>
+            </a:pPr>
+            <a:r>
+              <a:rPr sz="1000" b="1" i="0">
+                <a:solidFill>
                   <a:srgbClr val="0A0A0A"/>
                 </a:solidFill>
                 <a:latin typeface="Inter"/>
               </a:rPr>
-              <a:t>Ideation Fellowship admission</a:t>
-            </a:r>
-            <a:r>
-              <a:rPr sz="1100" b="0" i="0">
+              <a:t>Design partners — 25%</a:t>
+            </a:r>
+            <a:r>
+              <a:rPr sz="1000" b="0" i="0">
                 <a:solidFill>
                   <a:srgbClr val="1A1A1A"/>
                 </a:solidFill>
                 <a:latin typeface="Inter"/>
               </a:rPr>
-              <a:t> — 4-week intensive cohort</a:t>
-            </a:r>
-          </a:p>
-        </p:txBody>
-      </p:sp>
-      <p:sp>
-        <p:nvSpPr>
-          <p:cNvPr id="14" name="TextBox 13"/>
-          <p:cNvSpPr txBox="1"/>
-          <p:nvPr/>
-        </p:nvSpPr>
-        <p:spPr>
-          <a:xfrm>
-            <a:off x="914400" y="4032504"/>
+              <a:t> · dedicated success + onboarding + drift-telemetry tooling</a:t>
+            </a:r>
+          </a:p>
+        </p:txBody>
+      </p:sp>
+      <p:sp>
+        <p:nvSpPr>
+          <p:cNvPr id="18" name="TextBox 17"/>
+          <p:cNvSpPr txBox="1"/>
+          <p:nvPr/>
+        </p:nvSpPr>
+        <p:spPr>
+          <a:xfrm>
+            <a:off x="914400" y="4425696"/>
             <a:ext cx="182880" cy="274320"/>
           </a:xfrm>
           <a:prstGeom prst="rect">
@@ -4167,236 +4332,149 @@
       </p:sp>
       <p:sp>
         <p:nvSpPr>
-          <p:cNvPr id="15" name="TextBox 14"/>
-          <p:cNvSpPr txBox="1"/>
-          <p:nvPr/>
-        </p:nvSpPr>
-        <p:spPr>
-          <a:xfrm>
-            <a:off x="1143000" y="4032504"/>
-            <a:ext cx="4541367" cy="274320"/>
-          </a:xfrm>
-          <a:prstGeom prst="rect">
-            <a:avLst/>
-          </a:prstGeom>
-          <a:noFill/>
-        </p:spPr>
-        <p:txBody>
-          <a:bodyPr wrap="square" lIns="0" rIns="0" tIns="0" bIns="0" anchor="t">
-            <a:spAutoFit/>
-          </a:bodyPr>
-          <a:lstStyle/>
-          <a:p>
-            <a:pPr algn="l">
-              <a:lnSpc>
-                <a:spcPct val="130000"/>
+          <p:cNvPr id="19" name="TextBox 18"/>
+          <p:cNvSpPr txBox="1"/>
+          <p:nvPr/>
+        </p:nvSpPr>
+        <p:spPr>
+          <a:xfrm>
+            <a:off x="1143000" y="4425696"/>
+            <a:ext cx="4541367" cy="365760"/>
+          </a:xfrm>
+          <a:prstGeom prst="rect">
+            <a:avLst/>
+          </a:prstGeom>
+          <a:noFill/>
+        </p:spPr>
+        <p:txBody>
+          <a:bodyPr wrap="square" lIns="0" rIns="0" tIns="0" bIns="0" anchor="t">
+            <a:spAutoFit/>
+          </a:bodyPr>
+          <a:lstStyle/>
+          <a:p>
+            <a:pPr algn="l">
+              <a:lnSpc>
+                <a:spcPct val="135000"/>
+              </a:lnSpc>
+            </a:pPr>
+            <a:r>
+              <a:rPr sz="1000" b="1" i="0">
+                <a:solidFill>
+                  <a:srgbClr val="0A0A0A"/>
+                </a:solidFill>
+                <a:latin typeface="Inter"/>
+              </a:rPr>
+              <a:t>Legal / IP / compliance — 10%</a:t>
+            </a:r>
+            <a:r>
+              <a:rPr sz="1000" b="0" i="0">
+                <a:solidFill>
+                  <a:srgbClr val="1A1A1A"/>
+                </a:solidFill>
+                <a:latin typeface="Inter"/>
+              </a:rPr>
+              <a:t> · entity, IP assignments, SOC2 prep</a:t>
+            </a:r>
+          </a:p>
+        </p:txBody>
+      </p:sp>
+      <p:sp>
+        <p:nvSpPr>
+          <p:cNvPr id="20" name="TextBox 19"/>
+          <p:cNvSpPr txBox="1"/>
+          <p:nvPr/>
+        </p:nvSpPr>
+        <p:spPr>
+          <a:xfrm>
+            <a:off x="914400" y="4809744"/>
+            <a:ext cx="182880" cy="274320"/>
+          </a:xfrm>
+          <a:prstGeom prst="rect">
+            <a:avLst/>
+          </a:prstGeom>
+          <a:noFill/>
+        </p:spPr>
+        <p:txBody>
+          <a:bodyPr wrap="square" lIns="0" rIns="0" tIns="0" bIns="0" anchor="t">
+            <a:spAutoFit/>
+          </a:bodyPr>
+          <a:lstStyle/>
+          <a:p>
+            <a:pPr algn="l">
+              <a:lnSpc>
+                <a:spcPct val="100000"/>
               </a:lnSpc>
             </a:pPr>
             <a:r>
               <a:rPr sz="1100" b="1" i="0">
                 <a:solidFill>
+                  <a:srgbClr val="E84057"/>
+                </a:solidFill>
+                <a:latin typeface="JetBrains Mono"/>
+              </a:rPr>
+              <a:t>→</a:t>
+            </a:r>
+          </a:p>
+        </p:txBody>
+      </p:sp>
+      <p:sp>
+        <p:nvSpPr>
+          <p:cNvPr id="21" name="TextBox 20"/>
+          <p:cNvSpPr txBox="1"/>
+          <p:nvPr/>
+        </p:nvSpPr>
+        <p:spPr>
+          <a:xfrm>
+            <a:off x="1143000" y="4809744"/>
+            <a:ext cx="4541367" cy="365760"/>
+          </a:xfrm>
+          <a:prstGeom prst="rect">
+            <a:avLst/>
+          </a:prstGeom>
+          <a:noFill/>
+        </p:spPr>
+        <p:txBody>
+          <a:bodyPr wrap="square" lIns="0" rIns="0" tIns="0" bIns="0" anchor="t">
+            <a:spAutoFit/>
+          </a:bodyPr>
+          <a:lstStyle/>
+          <a:p>
+            <a:pPr algn="l">
+              <a:lnSpc>
+                <a:spcPct val="135000"/>
+              </a:lnSpc>
+            </a:pPr>
+            <a:r>
+              <a:rPr sz="1000" b="1" i="0">
+                <a:solidFill>
                   <a:srgbClr val="0A0A0A"/>
                 </a:solidFill>
                 <a:latin typeface="Inter"/>
               </a:rPr>
-              <a:t>Mentor pairing</a:t>
-            </a:r>
-            <a:r>
-              <a:rPr sz="1100" b="0" i="0">
+              <a:t>Buffer + ops — 10%</a:t>
+            </a:r>
+            <a:r>
+              <a:rPr sz="1000" b="0" i="0">
                 <a:solidFill>
                   <a:srgbClr val="1A1A1A"/>
                 </a:solidFill>
                 <a:latin typeface="Inter"/>
               </a:rPr>
-              <a:t> — deeptech / dev-infra operator</a:t>
-            </a:r>
-          </a:p>
-        </p:txBody>
-      </p:sp>
-      <p:sp>
-        <p:nvSpPr>
-          <p:cNvPr id="16" name="TextBox 15"/>
-          <p:cNvSpPr txBox="1"/>
-          <p:nvPr/>
-        </p:nvSpPr>
-        <p:spPr>
-          <a:xfrm>
-            <a:off x="914400" y="4361688"/>
-            <a:ext cx="182880" cy="274320"/>
-          </a:xfrm>
-          <a:prstGeom prst="rect">
-            <a:avLst/>
-          </a:prstGeom>
-          <a:noFill/>
-        </p:spPr>
-        <p:txBody>
-          <a:bodyPr wrap="square" lIns="0" rIns="0" tIns="0" bIns="0" anchor="t">
-            <a:spAutoFit/>
-          </a:bodyPr>
-          <a:lstStyle/>
-          <a:p>
-            <a:pPr algn="l">
-              <a:lnSpc>
-                <a:spcPct val="100000"/>
-              </a:lnSpc>
-            </a:pPr>
-            <a:r>
-              <a:rPr sz="1100" b="1" i="0">
-                <a:solidFill>
-                  <a:srgbClr val="E84057"/>
-                </a:solidFill>
-                <a:latin typeface="JetBrains Mono"/>
-              </a:rPr>
-              <a:t>→</a:t>
-            </a:r>
-          </a:p>
-        </p:txBody>
-      </p:sp>
-      <p:sp>
-        <p:nvSpPr>
-          <p:cNvPr id="17" name="TextBox 16"/>
-          <p:cNvSpPr txBox="1"/>
-          <p:nvPr/>
-        </p:nvSpPr>
-        <p:spPr>
-          <a:xfrm>
-            <a:off x="1143000" y="4361688"/>
-            <a:ext cx="4541367" cy="274320"/>
-          </a:xfrm>
-          <a:prstGeom prst="rect">
-            <a:avLst/>
-          </a:prstGeom>
-          <a:noFill/>
-        </p:spPr>
-        <p:txBody>
-          <a:bodyPr wrap="square" lIns="0" rIns="0" tIns="0" bIns="0" anchor="t">
-            <a:spAutoFit/>
-          </a:bodyPr>
-          <a:lstStyle/>
-          <a:p>
-            <a:pPr algn="l">
-              <a:lnSpc>
-                <a:spcPct val="130000"/>
-              </a:lnSpc>
-            </a:pPr>
-            <a:r>
-              <a:rPr sz="1100" b="1" i="0">
-                <a:solidFill>
-                  <a:srgbClr val="0A0A0A"/>
-                </a:solidFill>
-                <a:latin typeface="Inter"/>
-              </a:rPr>
-              <a:t>Co-founder matching</a:t>
-            </a:r>
-            <a:r>
-              <a:rPr sz="1100" b="0" i="0">
-                <a:solidFill>
-                  <a:srgbClr val="1A1A1A"/>
-                </a:solidFill>
-                <a:latin typeface="Inter"/>
-              </a:rPr>
-              <a:t> — distributed-systems background</a:t>
-            </a:r>
-          </a:p>
-        </p:txBody>
-      </p:sp>
-      <p:sp>
-        <p:nvSpPr>
-          <p:cNvPr id="18" name="TextBox 17"/>
-          <p:cNvSpPr txBox="1"/>
-          <p:nvPr/>
-        </p:nvSpPr>
-        <p:spPr>
-          <a:xfrm>
-            <a:off x="914400" y="4690872"/>
-            <a:ext cx="182880" cy="274320"/>
-          </a:xfrm>
-          <a:prstGeom prst="rect">
-            <a:avLst/>
-          </a:prstGeom>
-          <a:noFill/>
-        </p:spPr>
-        <p:txBody>
-          <a:bodyPr wrap="square" lIns="0" rIns="0" tIns="0" bIns="0" anchor="t">
-            <a:spAutoFit/>
-          </a:bodyPr>
-          <a:lstStyle/>
-          <a:p>
-            <a:pPr algn="l">
-              <a:lnSpc>
-                <a:spcPct val="100000"/>
-              </a:lnSpc>
-            </a:pPr>
-            <a:r>
-              <a:rPr sz="1100" b="1" i="0">
-                <a:solidFill>
-                  <a:srgbClr val="E84057"/>
-                </a:solidFill>
-                <a:latin typeface="JetBrains Mono"/>
-              </a:rPr>
-              <a:t>→</a:t>
-            </a:r>
-          </a:p>
-        </p:txBody>
-      </p:sp>
-      <p:sp>
-        <p:nvSpPr>
-          <p:cNvPr id="19" name="TextBox 18"/>
-          <p:cNvSpPr txBox="1"/>
-          <p:nvPr/>
-        </p:nvSpPr>
-        <p:spPr>
-          <a:xfrm>
-            <a:off x="1143000" y="4690872"/>
-            <a:ext cx="4541367" cy="274320"/>
-          </a:xfrm>
-          <a:prstGeom prst="rect">
-            <a:avLst/>
-          </a:prstGeom>
-          <a:noFill/>
-        </p:spPr>
-        <p:txBody>
-          <a:bodyPr wrap="square" lIns="0" rIns="0" tIns="0" bIns="0" anchor="t">
-            <a:spAutoFit/>
-          </a:bodyPr>
-          <a:lstStyle/>
-          <a:p>
-            <a:pPr algn="l">
-              <a:lnSpc>
-                <a:spcPct val="130000"/>
-              </a:lnSpc>
-            </a:pPr>
-            <a:r>
-              <a:rPr sz="1100" b="1" i="0">
-                <a:solidFill>
-                  <a:srgbClr val="0A0A0A"/>
-                </a:solidFill>
-                <a:latin typeface="Inter"/>
-              </a:rPr>
-              <a:t>Design-partner intros</a:t>
-            </a:r>
-            <a:r>
-              <a:rPr sz="1100" b="0" i="0">
-                <a:solidFill>
-                  <a:srgbClr val="1A1A1A"/>
-                </a:solidFill>
-                <a:latin typeface="Inter"/>
-              </a:rPr>
-              <a:t> — eng teams running multi-agent code-gen in production</a:t>
-            </a:r>
-          </a:p>
-        </p:txBody>
-      </p:sp>
-      <p:sp>
-        <p:nvSpPr>
-          <p:cNvPr id="20" name="Rounded Rectangle 19"/>
+              <a:t> · cloud, tooling, contingency</a:t>
+            </a:r>
+          </a:p>
+        </p:txBody>
+      </p:sp>
+      <p:sp>
+        <p:nvSpPr>
+          <p:cNvPr id="22" name="Rounded Rectangle 21"/>
           <p:cNvSpPr/>
           <p:nvPr/>
         </p:nvSpPr>
         <p:spPr>
           <a:xfrm>
-            <a:off x="6233007" y="3108960"/>
-            <a:ext cx="5318607" cy="2011680"/>
+            <a:off x="6233007" y="3063240"/>
+            <a:ext cx="5318607" cy="2194560"/>
           </a:xfrm>
           <a:prstGeom prst="roundRect">
             <a:avLst>
@@ -4437,13 +4515,13 @@
       </p:sp>
       <p:sp>
         <p:nvSpPr>
-          <p:cNvPr id="21" name="TextBox 20"/>
-          <p:cNvSpPr txBox="1"/>
-          <p:nvPr/>
-        </p:nvSpPr>
-        <p:spPr>
-          <a:xfrm>
-            <a:off x="6507327" y="3291840"/>
+          <p:cNvPr id="23" name="TextBox 22"/>
+          <p:cNvSpPr txBox="1"/>
+          <p:nvPr/>
+        </p:nvSpPr>
+        <p:spPr>
+          <a:xfrm>
+            <a:off x="6507327" y="3246120"/>
             <a:ext cx="4861407" cy="274320"/>
           </a:xfrm>
           <a:prstGeom prst="rect">
@@ -4469,20 +4547,20 @@
                 </a:solidFill>
                 <a:latin typeface="JetBrains Mono"/>
               </a:rPr>
-              <a:t>WHAT WE'LL PROVE IN 4 WEEKS</a:t>
-            </a:r>
-          </a:p>
-        </p:txBody>
-      </p:sp>
-      <p:sp>
-        <p:nvSpPr>
-          <p:cNvPr id="22" name="TextBox 21"/>
-          <p:cNvSpPr txBox="1"/>
-          <p:nvPr/>
-        </p:nvSpPr>
-        <p:spPr>
-          <a:xfrm>
-            <a:off x="6507327" y="3703320"/>
+              <a:t>MILESTONES TO SERIES A</a:t>
+            </a:r>
+          </a:p>
+        </p:txBody>
+      </p:sp>
+      <p:sp>
+        <p:nvSpPr>
+          <p:cNvPr id="24" name="TextBox 23"/>
+          <p:cNvSpPr txBox="1"/>
+          <p:nvPr/>
+        </p:nvSpPr>
+        <p:spPr>
+          <a:xfrm>
+            <a:off x="6507327" y="3657600"/>
             <a:ext cx="182880" cy="274320"/>
           </a:xfrm>
           <a:prstGeom prst="rect">
@@ -4515,61 +4593,148 @@
       </p:sp>
       <p:sp>
         <p:nvSpPr>
-          <p:cNvPr id="23" name="TextBox 22"/>
-          <p:cNvSpPr txBox="1"/>
-          <p:nvPr/>
-        </p:nvSpPr>
-        <p:spPr>
-          <a:xfrm>
-            <a:off x="6735927" y="3703320"/>
-            <a:ext cx="4541367" cy="274320"/>
-          </a:xfrm>
-          <a:prstGeom prst="rect">
-            <a:avLst/>
-          </a:prstGeom>
-          <a:noFill/>
-        </p:spPr>
-        <p:txBody>
-          <a:bodyPr wrap="square" lIns="0" rIns="0" tIns="0" bIns="0" anchor="t">
-            <a:spAutoFit/>
-          </a:bodyPr>
-          <a:lstStyle/>
-          <a:p>
-            <a:pPr algn="l">
-              <a:lnSpc>
-                <a:spcPct val="130000"/>
+          <p:cNvPr id="25" name="TextBox 24"/>
+          <p:cNvSpPr txBox="1"/>
+          <p:nvPr/>
+        </p:nvSpPr>
+        <p:spPr>
+          <a:xfrm>
+            <a:off x="6735927" y="3657600"/>
+            <a:ext cx="4541367" cy="365760"/>
+          </a:xfrm>
+          <a:prstGeom prst="rect">
+            <a:avLst/>
+          </a:prstGeom>
+          <a:noFill/>
+        </p:spPr>
+        <p:txBody>
+          <a:bodyPr wrap="square" lIns="0" rIns="0" tIns="0" bIns="0" anchor="t">
+            <a:spAutoFit/>
+          </a:bodyPr>
+          <a:lstStyle/>
+          <a:p>
+            <a:pPr algn="l">
+              <a:lnSpc>
+                <a:spcPct val="135000"/>
+              </a:lnSpc>
+            </a:pPr>
+            <a:r>
+              <a:rPr sz="1000" b="1" i="0">
+                <a:solidFill>
+                  <a:srgbClr val="0A0A0A"/>
+                </a:solidFill>
+                <a:latin typeface="Inter"/>
+              </a:rPr>
+              <a:t>Month 3</a:t>
+            </a:r>
+            <a:r>
+              <a:rPr sz="1000" b="0" i="0">
+                <a:solidFill>
+                  <a:srgbClr val="1A1A1A"/>
+                </a:solidFill>
+                <a:latin typeface="Inter"/>
+              </a:rPr>
+              <a:t> · Engine v0.4 dogfood-ready (spec → runnable Python)</a:t>
+            </a:r>
+          </a:p>
+        </p:txBody>
+      </p:sp>
+      <p:sp>
+        <p:nvSpPr>
+          <p:cNvPr id="26" name="TextBox 25"/>
+          <p:cNvSpPr txBox="1"/>
+          <p:nvPr/>
+        </p:nvSpPr>
+        <p:spPr>
+          <a:xfrm>
+            <a:off x="6507327" y="4041648"/>
+            <a:ext cx="182880" cy="274320"/>
+          </a:xfrm>
+          <a:prstGeom prst="rect">
+            <a:avLst/>
+          </a:prstGeom>
+          <a:noFill/>
+        </p:spPr>
+        <p:txBody>
+          <a:bodyPr wrap="square" lIns="0" rIns="0" tIns="0" bIns="0" anchor="t">
+            <a:spAutoFit/>
+          </a:bodyPr>
+          <a:lstStyle/>
+          <a:p>
+            <a:pPr algn="l">
+              <a:lnSpc>
+                <a:spcPct val="100000"/>
               </a:lnSpc>
             </a:pPr>
             <a:r>
               <a:rPr sz="1100" b="1" i="0">
                 <a:solidFill>
+                  <a:srgbClr val="E84057"/>
+                </a:solidFill>
+                <a:latin typeface="JetBrains Mono"/>
+              </a:rPr>
+              <a:t>→</a:t>
+            </a:r>
+          </a:p>
+        </p:txBody>
+      </p:sp>
+      <p:sp>
+        <p:nvSpPr>
+          <p:cNvPr id="27" name="TextBox 26"/>
+          <p:cNvSpPr txBox="1"/>
+          <p:nvPr/>
+        </p:nvSpPr>
+        <p:spPr>
+          <a:xfrm>
+            <a:off x="6735927" y="4041648"/>
+            <a:ext cx="4541367" cy="365760"/>
+          </a:xfrm>
+          <a:prstGeom prst="rect">
+            <a:avLst/>
+          </a:prstGeom>
+          <a:noFill/>
+        </p:spPr>
+        <p:txBody>
+          <a:bodyPr wrap="square" lIns="0" rIns="0" tIns="0" bIns="0" anchor="t">
+            <a:spAutoFit/>
+          </a:bodyPr>
+          <a:lstStyle/>
+          <a:p>
+            <a:pPr algn="l">
+              <a:lnSpc>
+                <a:spcPct val="135000"/>
+              </a:lnSpc>
+            </a:pPr>
+            <a:r>
+              <a:rPr sz="1000" b="1" i="0">
+                <a:solidFill>
                   <a:srgbClr val="0A0A0A"/>
                 </a:solidFill>
                 <a:latin typeface="Inter"/>
               </a:rPr>
-              <a:t>Engine v0.4</a:t>
-            </a:r>
-            <a:r>
-              <a:rPr sz="1100" b="0" i="0">
+              <a:t>Month 6</a:t>
+            </a:r>
+            <a:r>
+              <a:rPr sz="1000" b="0" i="0">
                 <a:solidFill>
                   <a:srgbClr val="1A1A1A"/>
                 </a:solidFill>
                 <a:latin typeface="Inter"/>
               </a:rPr>
-              <a:t> dogfood-ready (methodology spec → runnable Python)</a:t>
-            </a:r>
-          </a:p>
-        </p:txBody>
-      </p:sp>
-      <p:sp>
-        <p:nvSpPr>
-          <p:cNvPr id="24" name="TextBox 23"/>
-          <p:cNvSpPr txBox="1"/>
-          <p:nvPr/>
-        </p:nvSpPr>
-        <p:spPr>
-          <a:xfrm>
-            <a:off x="6507327" y="4032504"/>
+              <a:t> · Technical co-founder onboarded + 5 design partners shipping</a:t>
+            </a:r>
+          </a:p>
+        </p:txBody>
+      </p:sp>
+      <p:sp>
+        <p:nvSpPr>
+          <p:cNvPr id="28" name="TextBox 27"/>
+          <p:cNvSpPr txBox="1"/>
+          <p:nvPr/>
+        </p:nvSpPr>
+        <p:spPr>
+          <a:xfrm>
+            <a:off x="6507327" y="4425696"/>
             <a:ext cx="182880" cy="274320"/>
           </a:xfrm>
           <a:prstGeom prst="rect">
@@ -4602,236 +4767,149 @@
       </p:sp>
       <p:sp>
         <p:nvSpPr>
-          <p:cNvPr id="25" name="TextBox 24"/>
-          <p:cNvSpPr txBox="1"/>
-          <p:nvPr/>
-        </p:nvSpPr>
-        <p:spPr>
-          <a:xfrm>
-            <a:off x="6735927" y="4032504"/>
-            <a:ext cx="4541367" cy="274320"/>
-          </a:xfrm>
-          <a:prstGeom prst="rect">
-            <a:avLst/>
-          </a:prstGeom>
-          <a:noFill/>
-        </p:spPr>
-        <p:txBody>
-          <a:bodyPr wrap="square" lIns="0" rIns="0" tIns="0" bIns="0" anchor="t">
-            <a:spAutoFit/>
-          </a:bodyPr>
-          <a:lstStyle/>
-          <a:p>
-            <a:pPr algn="l">
-              <a:lnSpc>
-                <a:spcPct val="130000"/>
+          <p:cNvPr id="29" name="TextBox 28"/>
+          <p:cNvSpPr txBox="1"/>
+          <p:nvPr/>
+        </p:nvSpPr>
+        <p:spPr>
+          <a:xfrm>
+            <a:off x="6735927" y="4425696"/>
+            <a:ext cx="4541367" cy="365760"/>
+          </a:xfrm>
+          <a:prstGeom prst="rect">
+            <a:avLst/>
+          </a:prstGeom>
+          <a:noFill/>
+        </p:spPr>
+        <p:txBody>
+          <a:bodyPr wrap="square" lIns="0" rIns="0" tIns="0" bIns="0" anchor="t">
+            <a:spAutoFit/>
+          </a:bodyPr>
+          <a:lstStyle/>
+          <a:p>
+            <a:pPr algn="l">
+              <a:lnSpc>
+                <a:spcPct val="135000"/>
+              </a:lnSpc>
+            </a:pPr>
+            <a:r>
+              <a:rPr sz="1000" b="1" i="0">
+                <a:solidFill>
+                  <a:srgbClr val="0A0A0A"/>
+                </a:solidFill>
+                <a:latin typeface="Inter"/>
+              </a:rPr>
+              <a:t>Month 12</a:t>
+            </a:r>
+            <a:r>
+              <a:rPr sz="1000" b="0" i="0">
+                <a:solidFill>
+                  <a:srgbClr val="1A1A1A"/>
+                </a:solidFill>
+                <a:latin typeface="Inter"/>
+              </a:rPr>
+              <a:t> · First paying teams + drift telemetry across 10+ codebases</a:t>
+            </a:r>
+          </a:p>
+        </p:txBody>
+      </p:sp>
+      <p:sp>
+        <p:nvSpPr>
+          <p:cNvPr id="30" name="TextBox 29"/>
+          <p:cNvSpPr txBox="1"/>
+          <p:nvPr/>
+        </p:nvSpPr>
+        <p:spPr>
+          <a:xfrm>
+            <a:off x="6507327" y="4809744"/>
+            <a:ext cx="182880" cy="274320"/>
+          </a:xfrm>
+          <a:prstGeom prst="rect">
+            <a:avLst/>
+          </a:prstGeom>
+          <a:noFill/>
+        </p:spPr>
+        <p:txBody>
+          <a:bodyPr wrap="square" lIns="0" rIns="0" tIns="0" bIns="0" anchor="t">
+            <a:spAutoFit/>
+          </a:bodyPr>
+          <a:lstStyle/>
+          <a:p>
+            <a:pPr algn="l">
+              <a:lnSpc>
+                <a:spcPct val="100000"/>
               </a:lnSpc>
             </a:pPr>
             <a:r>
               <a:rPr sz="1100" b="1" i="0">
                 <a:solidFill>
+                  <a:srgbClr val="E84057"/>
+                </a:solidFill>
+                <a:latin typeface="JetBrains Mono"/>
+              </a:rPr>
+              <a:t>→</a:t>
+            </a:r>
+          </a:p>
+        </p:txBody>
+      </p:sp>
+      <p:sp>
+        <p:nvSpPr>
+          <p:cNvPr id="31" name="TextBox 30"/>
+          <p:cNvSpPr txBox="1"/>
+          <p:nvPr/>
+        </p:nvSpPr>
+        <p:spPr>
+          <a:xfrm>
+            <a:off x="6735927" y="4809744"/>
+            <a:ext cx="4541367" cy="365760"/>
+          </a:xfrm>
+          <a:prstGeom prst="rect">
+            <a:avLst/>
+          </a:prstGeom>
+          <a:noFill/>
+        </p:spPr>
+        <p:txBody>
+          <a:bodyPr wrap="square" lIns="0" rIns="0" tIns="0" bIns="0" anchor="t">
+            <a:spAutoFit/>
+          </a:bodyPr>
+          <a:lstStyle/>
+          <a:p>
+            <a:pPr algn="l">
+              <a:lnSpc>
+                <a:spcPct val="135000"/>
+              </a:lnSpc>
+            </a:pPr>
+            <a:r>
+              <a:rPr sz="1000" b="1" i="0">
+                <a:solidFill>
                   <a:srgbClr val="0A0A0A"/>
                 </a:solidFill>
                 <a:latin typeface="Inter"/>
               </a:rPr>
-              <a:t>3 design-partner LOIs</a:t>
-            </a:r>
-            <a:r>
-              <a:rPr sz="1100" b="0" i="0">
+              <a:t>Month 18</a:t>
+            </a:r>
+            <a:r>
+              <a:rPr sz="1000" b="0" i="0">
                 <a:solidFill>
                   <a:srgbClr val="1A1A1A"/>
                 </a:solidFill>
                 <a:latin typeface="Inter"/>
               </a:rPr>
-              <a:t> from production engineering teams</a:t>
-            </a:r>
-          </a:p>
-        </p:txBody>
-      </p:sp>
-      <p:sp>
-        <p:nvSpPr>
-          <p:cNvPr id="26" name="TextBox 25"/>
-          <p:cNvSpPr txBox="1"/>
-          <p:nvPr/>
-        </p:nvSpPr>
-        <p:spPr>
-          <a:xfrm>
-            <a:off x="6507327" y="4361688"/>
-            <a:ext cx="182880" cy="274320"/>
-          </a:xfrm>
-          <a:prstGeom prst="rect">
-            <a:avLst/>
-          </a:prstGeom>
-          <a:noFill/>
-        </p:spPr>
-        <p:txBody>
-          <a:bodyPr wrap="square" lIns="0" rIns="0" tIns="0" bIns="0" anchor="t">
-            <a:spAutoFit/>
-          </a:bodyPr>
-          <a:lstStyle/>
-          <a:p>
-            <a:pPr algn="l">
-              <a:lnSpc>
-                <a:spcPct val="100000"/>
-              </a:lnSpc>
-            </a:pPr>
-            <a:r>
-              <a:rPr sz="1100" b="1" i="0">
-                <a:solidFill>
-                  <a:srgbClr val="E84057"/>
-                </a:solidFill>
-                <a:latin typeface="JetBrains Mono"/>
-              </a:rPr>
-              <a:t>→</a:t>
-            </a:r>
-          </a:p>
-        </p:txBody>
-      </p:sp>
-      <p:sp>
-        <p:nvSpPr>
-          <p:cNvPr id="27" name="TextBox 26"/>
-          <p:cNvSpPr txBox="1"/>
-          <p:nvPr/>
-        </p:nvSpPr>
-        <p:spPr>
-          <a:xfrm>
-            <a:off x="6735927" y="4361688"/>
-            <a:ext cx="4541367" cy="274320"/>
-          </a:xfrm>
-          <a:prstGeom prst="rect">
-            <a:avLst/>
-          </a:prstGeom>
-          <a:noFill/>
-        </p:spPr>
-        <p:txBody>
-          <a:bodyPr wrap="square" lIns="0" rIns="0" tIns="0" bIns="0" anchor="t">
-            <a:spAutoFit/>
-          </a:bodyPr>
-          <a:lstStyle/>
-          <a:p>
-            <a:pPr algn="l">
-              <a:lnSpc>
-                <a:spcPct val="130000"/>
-              </a:lnSpc>
-            </a:pPr>
-            <a:r>
-              <a:rPr sz="1100" b="1" i="0">
-                <a:solidFill>
-                  <a:srgbClr val="0A0A0A"/>
-                </a:solidFill>
-                <a:latin typeface="Inter"/>
-              </a:rPr>
-              <a:t>Co-founder shortlist</a:t>
-            </a:r>
-            <a:r>
-              <a:rPr sz="1100" b="0" i="0">
-                <a:solidFill>
-                  <a:srgbClr val="1A1A1A"/>
-                </a:solidFill>
-                <a:latin typeface="Inter"/>
-              </a:rPr>
-              <a:t> — 5+ strong candidates in conversation</a:t>
-            </a:r>
-          </a:p>
-        </p:txBody>
-      </p:sp>
-      <p:sp>
-        <p:nvSpPr>
-          <p:cNvPr id="28" name="TextBox 27"/>
-          <p:cNvSpPr txBox="1"/>
-          <p:nvPr/>
-        </p:nvSpPr>
-        <p:spPr>
-          <a:xfrm>
-            <a:off x="6507327" y="4690872"/>
-            <a:ext cx="182880" cy="274320"/>
-          </a:xfrm>
-          <a:prstGeom prst="rect">
-            <a:avLst/>
-          </a:prstGeom>
-          <a:noFill/>
-        </p:spPr>
-        <p:txBody>
-          <a:bodyPr wrap="square" lIns="0" rIns="0" tIns="0" bIns="0" anchor="t">
-            <a:spAutoFit/>
-          </a:bodyPr>
-          <a:lstStyle/>
-          <a:p>
-            <a:pPr algn="l">
-              <a:lnSpc>
-                <a:spcPct val="100000"/>
-              </a:lnSpc>
-            </a:pPr>
-            <a:r>
-              <a:rPr sz="1100" b="1" i="0">
-                <a:solidFill>
-                  <a:srgbClr val="E84057"/>
-                </a:solidFill>
-                <a:latin typeface="JetBrains Mono"/>
-              </a:rPr>
-              <a:t>→</a:t>
-            </a:r>
-          </a:p>
-        </p:txBody>
-      </p:sp>
-      <p:sp>
-        <p:nvSpPr>
-          <p:cNvPr id="29" name="TextBox 28"/>
-          <p:cNvSpPr txBox="1"/>
-          <p:nvPr/>
-        </p:nvSpPr>
-        <p:spPr>
-          <a:xfrm>
-            <a:off x="6735927" y="4690872"/>
-            <a:ext cx="4541367" cy="274320"/>
-          </a:xfrm>
-          <a:prstGeom prst="rect">
-            <a:avLst/>
-          </a:prstGeom>
-          <a:noFill/>
-        </p:spPr>
-        <p:txBody>
-          <a:bodyPr wrap="square" lIns="0" rIns="0" tIns="0" bIns="0" anchor="t">
-            <a:spAutoFit/>
-          </a:bodyPr>
-          <a:lstStyle/>
-          <a:p>
-            <a:pPr algn="l">
-              <a:lnSpc>
-                <a:spcPct val="130000"/>
-              </a:lnSpc>
-            </a:pPr>
-            <a:r>
-              <a:rPr sz="1100" b="1" i="0">
-                <a:solidFill>
-                  <a:srgbClr val="0A0A0A"/>
-                </a:solidFill>
-                <a:latin typeface="Inter"/>
-              </a:rPr>
-              <a:t>First drift telemetry</a:t>
-            </a:r>
-            <a:r>
-              <a:rPr sz="1100" b="0" i="0">
-                <a:solidFill>
-                  <a:srgbClr val="1A1A1A"/>
-                </a:solidFill>
-                <a:latin typeface="Inter"/>
-              </a:rPr>
-              <a:t> from real-world dogfood</a:t>
-            </a:r>
-          </a:p>
-        </p:txBody>
-      </p:sp>
-      <p:sp>
-        <p:nvSpPr>
-          <p:cNvPr id="30" name="Rectangle 29"/>
+              <a:t> · Series A on the back of trace-derived learning evidence</a:t>
+            </a:r>
+          </a:p>
+        </p:txBody>
+      </p:sp>
+      <p:sp>
+        <p:nvSpPr>
+          <p:cNvPr id="32" name="Rectangle 31"/>
           <p:cNvSpPr/>
           <p:nvPr/>
         </p:nvSpPr>
         <p:spPr>
           <a:xfrm>
-            <a:off x="640080" y="5303520"/>
-            <a:ext cx="10911535" cy="1097280"/>
+            <a:off x="640080" y="5440680"/>
+            <a:ext cx="10911535" cy="914400"/>
           </a:xfrm>
           <a:prstGeom prst="rect">
             <a:avLst/>
@@ -4868,14 +4946,14 @@
       </p:sp>
       <p:sp>
         <p:nvSpPr>
-          <p:cNvPr id="31" name="TextBox 30"/>
-          <p:cNvSpPr txBox="1"/>
-          <p:nvPr/>
-        </p:nvSpPr>
-        <p:spPr>
-          <a:xfrm>
-            <a:off x="1005840" y="5504688"/>
-            <a:ext cx="6400800" cy="731520"/>
+          <p:cNvPr id="33" name="TextBox 32"/>
+          <p:cNvSpPr txBox="1"/>
+          <p:nvPr/>
+        </p:nvSpPr>
+        <p:spPr>
+          <a:xfrm>
+            <a:off x="1005840" y="5605272"/>
+            <a:ext cx="6858000" cy="640080"/>
           </a:xfrm>
           <a:prstGeom prst="rect">
             <a:avLst/>
@@ -4894,7 +4972,7 @@
               </a:lnSpc>
             </a:pPr>
             <a:r>
-              <a:rPr sz="1600" b="1" i="0">
+              <a:rPr sz="1400" b="1" i="0">
                 <a:solidFill>
                   <a:srgbClr val="FFFFFF"/>
                 </a:solidFill>
@@ -4903,7 +4981,7 @@
               <a:t>Cursor enabled </a:t>
             </a:r>
             <a:r>
-              <a:rPr sz="1600" b="1" i="1">
+              <a:rPr sz="1400" b="1" i="1">
                 <a:solidFill>
                   <a:srgbClr val="E84057"/>
                 </a:solidFill>
@@ -4912,7 +4990,7 @@
               <a:t>vibe coding.</a:t>
             </a:r>
             <a:r>
-              <a:rPr sz="1600" b="1" i="0">
+              <a:rPr sz="1400" b="1" i="0">
                 <a:solidFill>
                   <a:srgbClr val="FFFFFF"/>
                 </a:solidFill>
@@ -4922,27 +5000,54 @@
 VibeLoom enables </a:t>
             </a:r>
             <a:r>
-              <a:rPr sz="1600" b="1" i="1">
+              <a:rPr sz="1400" b="1" i="1">
                 <a:solidFill>
                   <a:srgbClr val="E84057"/>
                 </a:solidFill>
                 <a:latin typeface="Fraunces"/>
               </a:rPr>
-              <a:t>agentic engineering.</a:t>
-            </a:r>
-          </a:p>
-        </p:txBody>
-      </p:sp>
-      <p:sp>
-        <p:nvSpPr>
-          <p:cNvPr id="32" name="TextBox 31"/>
-          <p:cNvSpPr txBox="1"/>
-          <p:nvPr/>
-        </p:nvSpPr>
-        <p:spPr>
-          <a:xfrm>
-            <a:off x="7955280" y="5504688"/>
-            <a:ext cx="3230575" cy="731520"/>
+              <a:t>agentic engineering</a:t>
+            </a:r>
+            <a:r>
+              <a:rPr sz="1400" b="1" i="0">
+                <a:solidFill>
+                  <a:srgbClr val="FFFFFF"/>
+                </a:solidFill>
+                <a:latin typeface="Inter"/>
+              </a:rPr>
+              <a:t> — and the </a:t>
+            </a:r>
+            <a:r>
+              <a:rPr sz="1400" b="1" i="1">
+                <a:solidFill>
+                  <a:srgbClr val="E84057"/>
+                </a:solidFill>
+                <a:latin typeface="Fraunces"/>
+              </a:rPr>
+              <a:t>dark factory</a:t>
+            </a:r>
+            <a:r>
+              <a:rPr sz="1400" b="1" i="0">
+                <a:solidFill>
+                  <a:srgbClr val="FFFFFF"/>
+                </a:solidFill>
+                <a:latin typeface="Inter"/>
+              </a:rPr>
+              <a:t> it requires.</a:t>
+            </a:r>
+          </a:p>
+        </p:txBody>
+      </p:sp>
+      <p:sp>
+        <p:nvSpPr>
+          <p:cNvPr id="34" name="TextBox 33"/>
+          <p:cNvSpPr txBox="1"/>
+          <p:nvPr/>
+        </p:nvSpPr>
+        <p:spPr>
+          <a:xfrm>
+            <a:off x="7955280" y="5605272"/>
+            <a:ext cx="3230575" cy="640080"/>
           </a:xfrm>
           <a:prstGeom prst="rect">
             <a:avLst/>
@@ -4961,7 +5066,7 @@
               </a:lnSpc>
             </a:pPr>
             <a:r>
-              <a:rPr sz="1100" b="1" i="0">
+              <a:rPr sz="1000" b="1" i="0">
                 <a:solidFill>
                   <a:srgbClr val="FFFFFF"/>
                 </a:solidFill>
@@ -4971,7 +5076,7 @@
 </a:t>
             </a:r>
             <a:r>
-              <a:rPr sz="1000" b="0" i="0">
+              <a:rPr sz="900" b="0" i="0">
                 <a:solidFill>
                   <a:srgbClr val="FFFFFF"/>
                 </a:solidFill>
@@ -4981,7 +5086,7 @@
 </a:t>
             </a:r>
             <a:r>
-              <a:rPr sz="1000" b="0" i="0">
+              <a:rPr sz="900" b="0" i="0">
                 <a:solidFill>
                   <a:srgbClr val="FFFFFF"/>
                 </a:solidFill>
@@ -6214,7 +6319,7 @@
                 </a:solidFill>
                 <a:latin typeface="JetBrains Mono"/>
               </a:rPr>
-              <a:t>SOLUTION</a:t>
+              <a:t>THE BET</a:t>
             </a:r>
           </a:p>
         </p:txBody>
@@ -6327,7 +6432,7 @@
                 </a:solidFill>
                 <a:latin typeface="JetBrains Mono"/>
               </a:rPr>
-              <a:t>03 — SOLUTION</a:t>
+              <a:t>03 — THE BET</a:t>
             </a:r>
           </a:p>
         </p:txBody>
@@ -6366,7 +6471,7 @@
                 </a:solidFill>
                 <a:latin typeface="Inter"/>
               </a:rPr>
-              <a:t>Move the human review surface </a:t>
+              <a:t>Code becomes a </a:t>
             </a:r>
             <a:r>
               <a:rPr sz="3000" b="0" i="1">
@@ -6375,7 +6480,7 @@
                 </a:solidFill>
                 <a:latin typeface="Fraunces"/>
               </a:rPr>
-              <a:t>up</a:t>
+              <a:t>dark factory.</a:t>
             </a:r>
             <a:r>
               <a:rPr sz="3000" b="1" i="0">
@@ -6384,7 +6489,25 @@
                 </a:solidFill>
                 <a:latin typeface="Inter"/>
               </a:rPr>
-              <a:t> the stack — from code to contract.</a:t>
+              <a:t> We build the </a:t>
+            </a:r>
+            <a:r>
+              <a:rPr sz="3000" b="0" i="1">
+                <a:solidFill>
+                  <a:srgbClr val="E84057"/>
+                </a:solidFill>
+                <a:latin typeface="Fraunces"/>
+              </a:rPr>
+              <a:t>contract layer</a:t>
+            </a:r>
+            <a:r>
+              <a:rPr sz="3000" b="1" i="0">
+                <a:solidFill>
+                  <a:srgbClr val="0A0A0A"/>
+                </a:solidFill>
+                <a:latin typeface="Inter"/>
+              </a:rPr>
+              <a:t> above it.</a:t>
             </a:r>
           </a:p>
         </p:txBody>
@@ -6398,7 +6521,7 @@
         <p:spPr>
           <a:xfrm>
             <a:off x="640080" y="2331720"/>
-            <a:ext cx="10515600" cy="640080"/>
+            <a:ext cx="10515600" cy="777240"/>
           </a:xfrm>
           <a:prstGeom prst="rect">
             <a:avLst/>
@@ -6423,7 +6546,7 @@
                 </a:solidFill>
                 <a:latin typeface="Inter"/>
               </a:rPr>
-              <a:t>Teams approve `intent`, `product`, and `architecture`. Our deterministic engine regenerates code from the approved contract every cycle. Drift surfaces in the eval ladder, not in production.</a:t>
+              <a:t>Lights-out coding. Humans approve intent, product, and architecture. Our deterministic engine regenerates code from the approved contract every cycle. Code is machinery, not literature — generated, regenerated, never maintained by hand.</a:t>
             </a:r>
           </a:p>
         </p:txBody>
@@ -6510,7 +6633,7 @@
                 </a:solidFill>
                 <a:latin typeface="JetBrains Mono"/>
               </a:rPr>
-              <a:t>TODAY</a:t>
+              <a:t>TODAY · THE CURSOR ERA</a:t>
             </a:r>
           </a:p>
         </p:txBody>
@@ -6549,7 +6672,7 @@
                 </a:solidFill>
                 <a:latin typeface="Inter"/>
               </a:rPr>
-              <a:t>Humans review code.</a:t>
+              <a:t>Humans maintain code.</a:t>
             </a:r>
           </a:p>
         </p:txBody>
@@ -6797,7 +6920,7 @@
                 </a:solidFill>
                 <a:latin typeface="JetBrains Mono"/>
               </a:rPr>
-              <a:t>WITH VIBELOOM</a:t>
+              <a:t>AGENTIC ENGINEERING · DARK FACTORY</a:t>
             </a:r>
           </a:p>
         </p:txBody>
@@ -6830,13 +6953,13 @@
               </a:lnSpc>
             </a:pPr>
             <a:r>
-              <a:rPr sz="1800" b="1" i="0">
+              <a:rPr sz="1600" b="1" i="0">
                 <a:solidFill>
                   <a:srgbClr val="0A0A0A"/>
                 </a:solidFill>
                 <a:latin typeface="Inter"/>
               </a:rPr>
-              <a:t>Humans review the contract.</a:t>
+              <a:t>Humans approve contract; factory ships code.</a:t>
             </a:r>
           </a:p>
         </p:txBody>
@@ -6947,7 +7070,7 @@
               </a:lnSpc>
             </a:pPr>
             <a:r>
-              <a:rPr sz="1600" b="0" i="1">
+              <a:rPr sz="1400" b="0" i="1">
                 <a:solidFill>
                   <a:srgbClr val="1A1A1A"/>
                 </a:solidFill>
@@ -6956,7 +7079,7 @@
               <a:t>Cursor enabled </a:t>
             </a:r>
             <a:r>
-              <a:rPr sz="1600" b="0" i="1">
+              <a:rPr sz="1400" b="0" i="1">
                 <a:solidFill>
                   <a:srgbClr val="E84057"/>
                 </a:solidFill>
@@ -6965,7 +7088,7 @@
               <a:t>vibe coding.</a:t>
             </a:r>
             <a:r>
-              <a:rPr sz="1600" b="0" i="1">
+              <a:rPr sz="1400" b="0" i="1">
                 <a:solidFill>
                   <a:srgbClr val="1A1A1A"/>
                 </a:solidFill>
@@ -6974,13 +7097,40 @@
               <a:t> VibeLoom enables </a:t>
             </a:r>
             <a:r>
-              <a:rPr sz="1600" b="0" i="1">
+              <a:rPr sz="1400" b="0" i="1">
                 <a:solidFill>
                   <a:srgbClr val="E84057"/>
                 </a:solidFill>
                 <a:latin typeface="Fraunces"/>
               </a:rPr>
-              <a:t>agentic engineering.</a:t>
+              <a:t>agentic engineering</a:t>
+            </a:r>
+            <a:r>
+              <a:rPr sz="1400" b="0" i="1">
+                <a:solidFill>
+                  <a:srgbClr val="1A1A1A"/>
+                </a:solidFill>
+                <a:latin typeface="Fraunces"/>
+              </a:rPr>
+              <a:t> — and the </a:t>
+            </a:r>
+            <a:r>
+              <a:rPr sz="1400" b="0" i="1">
+                <a:solidFill>
+                  <a:srgbClr val="E84057"/>
+                </a:solidFill>
+                <a:latin typeface="Fraunces"/>
+              </a:rPr>
+              <a:t>dark factory</a:t>
+            </a:r>
+            <a:r>
+              <a:rPr sz="1400" b="0" i="1">
+                <a:solidFill>
+                  <a:srgbClr val="1A1A1A"/>
+                </a:solidFill>
+                <a:latin typeface="Fraunces"/>
+              </a:rPr>
+              <a:t> it requires.</a:t>
             </a:r>
           </a:p>
         </p:txBody>
@@ -14154,7 +14304,7 @@
                 </a:solidFill>
                 <a:latin typeface="Inter"/>
               </a:rPr>
-              <a:t>EWOR's stated concern about solo geniuses is fair. We treat co-founder acquisition as a tracked Q1 milestone — not glossed over. The methodology, spec, and engine shipped solo are themselves the artifact that recruits the right co-founder.</a:t>
+              <a:t>VCs commonly flag solo founders. The concern is fair. We treat co-founder acquisition as a tracked Q1 milestone — not glossed over. The methodology, spec, and engine shipped solo are themselves the artifact that recruits the right co-founder.</a:t>
             </a:r>
           </a:p>
         </p:txBody>
@@ -14619,7 +14769,7 @@
                 </a:solidFill>
                 <a:latin typeface="Fraunces"/>
               </a:rPr>
-              <a:t>technical co-founder onboarded by month 6. Profile: distributed-systems / dev-infra / ex-platform-engineering. EWOR fellowship is the team-formation forcing function — not a workaround.</a:t>
+              <a:t>technical co-founder onboarded by month 6. Profile: distributed-systems / dev-infra / ex-platform-engineering. The pre-seed round itself is the team-formation forcing function — not a workaround.</a:t>
             </a:r>
           </a:p>
         </p:txBody>

--- a/v03/pitch-deck.pptx
+++ b/v03/pitch-deck.pptx
@@ -1793,7 +1793,7 @@
               <a:buNone/>
             </a:pPr>
             <a:r>
-              <a:rPr lang="en-US" sz="6400" b="1" i="1" spc="-200" kern="0" dirty="0">
+              <a:rPr lang="en-US" sz="6000" b="1" i="1" spc="-200" kern="0" dirty="0">
                 <a:solidFill>
                   <a:srgbClr val="E84057"/>
                 </a:solidFill>
@@ -1801,9 +1801,9 @@
                 <a:ea typeface="Fraunces" pitchFamily="34" charset="-122"/>
                 <a:cs typeface="Fraunces" pitchFamily="34" charset="-120"/>
               </a:rPr>
-              <a:t>Code becomes a dark factory.</a:t>
-            </a:r>
-            <a:endParaRPr lang="en-US" sz="6400" dirty="0"/>
+              <a:t>Coding becomes a dark factory.</a:t>
+            </a:r>
+            <a:endParaRPr lang="en-US" sz="6000" dirty="0"/>
           </a:p>
         </p:txBody>
       </p:sp>
@@ -3423,7 +3423,7 @@
                 <a:ea typeface="JetBrains Mono" pitchFamily="34" charset="-122"/>
                 <a:cs typeface="JetBrains Mono" pitchFamily="34" charset="-120"/>
               </a:rPr>
-              <a:t>THE BET</a:t>
+              <a:t>SOLUTION · THE BET</a:t>
             </a:r>
             <a:endParaRPr lang="en-US" sz="1000" dirty="0"/>
           </a:p>
@@ -3462,7 +3462,7 @@
                 <a:ea typeface="Inter" pitchFamily="34" charset="-122"/>
                 <a:cs typeface="Inter" pitchFamily="34" charset="-120"/>
               </a:rPr>
-              <a:t>Lights out for code.</a:t>
+              <a:t>Lights out for coding.</a:t>
             </a:r>
             <a:endParaRPr lang="en-US" sz="6400" dirty="0"/>
           </a:p>
@@ -4155,7 +4155,7 @@
                 <a:ea typeface="JetBrains Mono" pitchFamily="34" charset="-122"/>
                 <a:cs typeface="JetBrains Mono" pitchFamily="34" charset="-120"/>
               </a:rPr>
-              <a:t>PRODUCT</a:t>
+              <a:t>WHY NOW</a:t>
             </a:r>
             <a:endParaRPr lang="en-US" sz="1000" dirty="0"/>
           </a:p>
@@ -4169,24 +4169,24 @@
         </p:nvSpPr>
         <p:spPr>
           <a:xfrm>
-            <a:off x="594360" y="914400"/>
-            <a:ext cx="11002975" cy="1005840"/>
-          </a:xfrm>
-          <a:prstGeom prst="rect">
-            <a:avLst/>
-          </a:prstGeom>
-          <a:noFill/>
-          <a:ln/>
-        </p:spPr>
-        <p:txBody>
-          <a:bodyPr wrap="square" lIns="0" tIns="0" rIns="0" bIns="0" rtlCol="0" anchor="ctr"/>
-          <a:lstStyle/>
-          <a:p>
-            <a:pPr indent="0" marL="0">
-              <a:buNone/>
-            </a:pPr>
-            <a:r>
-              <a:rPr lang="en-US" sz="6400" b="1" spc="-200" kern="0" dirty="0">
+            <a:off x="594360" y="868680"/>
+            <a:ext cx="11002975" cy="1783080"/>
+          </a:xfrm>
+          <a:prstGeom prst="rect">
+            <a:avLst/>
+          </a:prstGeom>
+          <a:noFill/>
+          <a:ln/>
+        </p:spPr>
+        <p:txBody>
+          <a:bodyPr wrap="square" lIns="0" tIns="0" rIns="0" bIns="0" rtlCol="0" anchor="t"/>
+          <a:lstStyle/>
+          <a:p>
+            <a:pPr indent="0" marL="0">
+              <a:buNone/>
+            </a:pPr>
+            <a:r>
+              <a:rPr lang="en-US" sz="5600" b="1" spc="-200" kern="0" dirty="0">
                 <a:solidFill>
                   <a:srgbClr val="0A0A0A"/>
                 </a:solidFill>
@@ -4194,9 +4194,26 @@
                 <a:ea typeface="Inter" pitchFamily="34" charset="-122"/>
                 <a:cs typeface="Inter" pitchFamily="34" charset="-120"/>
               </a:rPr>
-              <a:t>The contract layer.</a:t>
-            </a:r>
-            <a:endParaRPr lang="en-US" sz="6400" dirty="0"/>
+              <a:t>Four forces.</a:t>
+            </a:r>
+            <a:endParaRPr lang="en-US" sz="5600" dirty="0"/>
+          </a:p>
+          <a:p>
+            <a:pPr indent="0" marL="0">
+              <a:buNone/>
+            </a:pPr>
+            <a:r>
+              <a:rPr lang="en-US" sz="5600" b="1" i="1" spc="-200" kern="0" dirty="0">
+                <a:solidFill>
+                  <a:srgbClr val="E84057"/>
+                </a:solidFill>
+                <a:latin typeface="Fraunces" pitchFamily="34" charset="0"/>
+                <a:ea typeface="Fraunces" pitchFamily="34" charset="-122"/>
+                <a:cs typeface="Fraunces" pitchFamily="34" charset="-120"/>
+              </a:rPr>
+              <a:t>Same six months.</a:t>
+            </a:r>
+            <a:endParaRPr lang="en-US" sz="5600" dirty="0"/>
           </a:p>
         </p:txBody>
       </p:sp>
@@ -4208,8 +4225,8 @@
         </p:nvSpPr>
         <p:spPr>
           <a:xfrm>
-            <a:off x="594360" y="2057400"/>
-            <a:ext cx="11002975" cy="640080"/>
+            <a:off x="594360" y="2788920"/>
+            <a:ext cx="11002975" cy="548640"/>
           </a:xfrm>
           <a:prstGeom prst="rect">
             <a:avLst/>
@@ -4233,7 +4250,7 @@
                 <a:ea typeface="Inter" pitchFamily="34" charset="-122"/>
                 <a:cs typeface="Inter" pitchFamily="34" charset="-120"/>
               </a:rPr>
-              <a:t>Methodology + Skill + deterministic engine. Ships as a Claude Code / Codex Skill. Open source under MIT.</a:t>
+              <a:t>None of these conditions held two years ago. All four crossed their threshold in Q1 2026.</a:t>
             </a:r>
             <a:endParaRPr lang="en-US" sz="1600" dirty="0"/>
           </a:p>
@@ -4247,8 +4264,8 @@
         </p:nvSpPr>
         <p:spPr>
           <a:xfrm>
-            <a:off x="594360" y="3108960"/>
-            <a:ext cx="2579294" cy="1463040"/>
+            <a:off x="594360" y="3520440"/>
+            <a:ext cx="5387188" cy="1417320"/>
           </a:xfrm>
           <a:prstGeom prst="rect">
             <a:avLst/>
@@ -4266,50 +4283,30 @@
       </p:sp>
       <p:sp>
         <p:nvSpPr>
-          <p:cNvPr id="7" name="Shape 5"/>
-          <p:cNvSpPr/>
-          <p:nvPr/>
-        </p:nvSpPr>
-        <p:spPr>
-          <a:xfrm>
-            <a:off x="594360" y="3108960"/>
-            <a:ext cx="36576" cy="1463040"/>
-          </a:xfrm>
-          <a:prstGeom prst="rect">
-            <a:avLst/>
-          </a:prstGeom>
-          <a:solidFill>
-            <a:srgbClr val="E84057"/>
-          </a:solidFill>
-          <a:ln/>
-        </p:spPr>
-      </p:sp>
-      <p:sp>
-        <p:nvSpPr>
-          <p:cNvPr id="8" name="Text 6"/>
-          <p:cNvSpPr/>
-          <p:nvPr/>
-        </p:nvSpPr>
-        <p:spPr>
-          <a:xfrm>
-            <a:off x="822960" y="3291840"/>
-            <a:ext cx="457200" cy="457200"/>
-          </a:xfrm>
-          <a:prstGeom prst="rect">
-            <a:avLst/>
-          </a:prstGeom>
-          <a:noFill/>
-          <a:ln/>
-        </p:spPr>
-        <p:txBody>
-          <a:bodyPr wrap="square" lIns="0" tIns="0" rIns="0" bIns="0" rtlCol="0" anchor="ctr"/>
-          <a:lstStyle/>
-          <a:p>
-            <a:pPr indent="0" marL="0">
-              <a:buNone/>
-            </a:pPr>
-            <a:r>
-              <a:rPr lang="en-US" sz="2800" b="1" i="1" dirty="0">
+          <p:cNvPr id="7" name="Text 5"/>
+          <p:cNvSpPr/>
+          <p:nvPr/>
+        </p:nvSpPr>
+        <p:spPr>
+          <a:xfrm>
+            <a:off x="868680" y="3703320"/>
+            <a:ext cx="3657600" cy="594360"/>
+          </a:xfrm>
+          <a:prstGeom prst="rect">
+            <a:avLst/>
+          </a:prstGeom>
+          <a:noFill/>
+          <a:ln/>
+        </p:spPr>
+        <p:txBody>
+          <a:bodyPr wrap="square" lIns="0" tIns="0" rIns="0" bIns="0" rtlCol="0" anchor="ctr"/>
+          <a:lstStyle/>
+          <a:p>
+            <a:pPr indent="0" marL="0">
+              <a:buNone/>
+            </a:pPr>
+            <a:r>
+              <a:rPr lang="en-US" sz="2600" b="1" i="1" spc="-100" kern="0" dirty="0">
                 <a:solidFill>
                   <a:srgbClr val="E84057"/>
                 </a:solidFill>
@@ -4317,61 +4314,22 @@
                 <a:ea typeface="Fraunces" pitchFamily="34" charset="-122"/>
                 <a:cs typeface="Fraunces" pitchFamily="34" charset="-120"/>
               </a:rPr>
-              <a:t>1</a:t>
-            </a:r>
-            <a:endParaRPr lang="en-US" sz="2800" dirty="0"/>
-          </a:p>
-        </p:txBody>
-      </p:sp>
-      <p:sp>
-        <p:nvSpPr>
-          <p:cNvPr id="9" name="Text 7"/>
-          <p:cNvSpPr/>
-          <p:nvPr/>
-        </p:nvSpPr>
-        <p:spPr>
-          <a:xfrm>
-            <a:off x="1371600" y="3355848"/>
-            <a:ext cx="1664894" cy="365760"/>
-          </a:xfrm>
-          <a:prstGeom prst="rect">
-            <a:avLst/>
-          </a:prstGeom>
-          <a:noFill/>
-          <a:ln/>
-        </p:spPr>
-        <p:txBody>
-          <a:bodyPr wrap="square" lIns="0" tIns="0" rIns="0" bIns="0" rtlCol="0" anchor="ctr"/>
-          <a:lstStyle/>
-          <a:p>
-            <a:pPr indent="0" marL="0">
-              <a:buNone/>
-            </a:pPr>
-            <a:r>
-              <a:rPr lang="en-US" sz="1400" b="1" spc="-30" kern="0" dirty="0">
-                <a:solidFill>
-                  <a:srgbClr val="0A0A0A"/>
-                </a:solidFill>
-                <a:latin typeface="JetBrains Mono" pitchFamily="34" charset="0"/>
-                <a:ea typeface="JetBrains Mono" pitchFamily="34" charset="-122"/>
-                <a:cs typeface="JetBrains Mono" pitchFamily="34" charset="-120"/>
-              </a:rPr>
-              <a:t>intent.md</a:t>
-            </a:r>
-            <a:endParaRPr lang="en-US" sz="1400" dirty="0"/>
-          </a:p>
-        </p:txBody>
-      </p:sp>
-      <p:sp>
-        <p:nvSpPr>
-          <p:cNvPr id="10" name="Text 8"/>
-          <p:cNvSpPr/>
-          <p:nvPr/>
-        </p:nvSpPr>
-        <p:spPr>
-          <a:xfrm>
-            <a:off x="822960" y="3886200"/>
-            <a:ext cx="2122094" cy="548640"/>
+              <a:t>$9B</a:t>
+            </a:r>
+            <a:endParaRPr lang="en-US" sz="2600" dirty="0"/>
+          </a:p>
+        </p:txBody>
+      </p:sp>
+      <p:sp>
+        <p:nvSpPr>
+          <p:cNvPr id="8" name="Text 6"/>
+          <p:cNvSpPr/>
+          <p:nvPr/>
+        </p:nvSpPr>
+        <p:spPr>
+          <a:xfrm>
+            <a:off x="868680" y="4251960"/>
+            <a:ext cx="4838548" cy="640080"/>
           </a:xfrm>
           <a:prstGeom prst="rect">
             <a:avLst/>
@@ -4389,28 +4347,45 @@
             <a:r>
               <a:rPr lang="en-US" sz="1200" dirty="0">
                 <a:solidFill>
-                  <a:srgbClr val="3A3A3A"/>
-                </a:solidFill>
-                <a:latin typeface="Inter" pitchFamily="34" charset="0"/>
-                <a:ea typeface="Inter" pitchFamily="34" charset="-122"/>
-                <a:cs typeface="Inter" pitchFamily="34" charset="-120"/>
-              </a:rPr>
-              <a:t>User edits intent + approves</a:t>
+                  <a:srgbClr val="1A1A1A"/>
+                </a:solidFill>
+                <a:latin typeface="Inter" pitchFamily="34" charset="0"/>
+                <a:ea typeface="Inter" pitchFamily="34" charset="-122"/>
+                <a:cs typeface="Inter" pitchFamily="34" charset="-120"/>
+              </a:rPr>
+              <a:t>Cursor proves AI-dev-infra is a real market.</a:t>
             </a:r>
             <a:endParaRPr lang="en-US" sz="1200" dirty="0"/>
           </a:p>
-        </p:txBody>
-      </p:sp>
-      <p:sp>
-        <p:nvSpPr>
-          <p:cNvPr id="11" name="Shape 9"/>
-          <p:cNvSpPr/>
-          <p:nvPr/>
-        </p:nvSpPr>
-        <p:spPr>
-          <a:xfrm>
-            <a:off x="3402254" y="3108960"/>
-            <a:ext cx="2579294" cy="1463040"/>
+          <a:p>
+            <a:pPr indent="0" marL="0">
+              <a:buNone/>
+            </a:pPr>
+            <a:r>
+              <a:rPr lang="en-US" sz="1200" dirty="0">
+                <a:solidFill>
+                  <a:srgbClr val="1A1A1A"/>
+                </a:solidFill>
+                <a:latin typeface="Inter" pitchFamily="34" charset="0"/>
+                <a:ea typeface="Inter" pitchFamily="34" charset="-122"/>
+                <a:cs typeface="Inter" pitchFamily="34" charset="-120"/>
+              </a:rPr>
+              <a:t>The layer above is the next category.</a:t>
+            </a:r>
+            <a:endParaRPr lang="en-US" sz="1200" dirty="0"/>
+          </a:p>
+        </p:txBody>
+      </p:sp>
+      <p:sp>
+        <p:nvSpPr>
+          <p:cNvPr id="9" name="Shape 7"/>
+          <p:cNvSpPr/>
+          <p:nvPr/>
+        </p:nvSpPr>
+        <p:spPr>
+          <a:xfrm>
+            <a:off x="6210148" y="3520440"/>
+            <a:ext cx="5387188" cy="1417320"/>
           </a:xfrm>
           <a:prstGeom prst="rect">
             <a:avLst/>
@@ -4428,112 +4403,53 @@
       </p:sp>
       <p:sp>
         <p:nvSpPr>
-          <p:cNvPr id="12" name="Shape 10"/>
-          <p:cNvSpPr/>
-          <p:nvPr/>
-        </p:nvSpPr>
-        <p:spPr>
-          <a:xfrm>
-            <a:off x="3402254" y="3108960"/>
-            <a:ext cx="36576" cy="1463040"/>
-          </a:xfrm>
-          <a:prstGeom prst="rect">
-            <a:avLst/>
-          </a:prstGeom>
-          <a:solidFill>
-            <a:srgbClr val="5A5A5A"/>
-          </a:solidFill>
-          <a:ln/>
-        </p:spPr>
-      </p:sp>
-      <p:sp>
-        <p:nvSpPr>
-          <p:cNvPr id="13" name="Text 11"/>
-          <p:cNvSpPr/>
-          <p:nvPr/>
-        </p:nvSpPr>
-        <p:spPr>
-          <a:xfrm>
-            <a:off x="3630854" y="3291840"/>
-            <a:ext cx="457200" cy="457200"/>
-          </a:xfrm>
-          <a:prstGeom prst="rect">
-            <a:avLst/>
-          </a:prstGeom>
-          <a:noFill/>
-          <a:ln/>
-        </p:spPr>
-        <p:txBody>
-          <a:bodyPr wrap="square" lIns="0" tIns="0" rIns="0" bIns="0" rtlCol="0" anchor="ctr"/>
-          <a:lstStyle/>
-          <a:p>
-            <a:pPr indent="0" marL="0">
-              <a:buNone/>
-            </a:pPr>
-            <a:r>
-              <a:rPr lang="en-US" sz="2800" b="1" i="1" dirty="0">
-                <a:solidFill>
-                  <a:srgbClr val="5A5A5A"/>
+          <p:cNvPr id="10" name="Text 8"/>
+          <p:cNvSpPr/>
+          <p:nvPr/>
+        </p:nvSpPr>
+        <p:spPr>
+          <a:xfrm>
+            <a:off x="6484468" y="3703320"/>
+            <a:ext cx="3657600" cy="594360"/>
+          </a:xfrm>
+          <a:prstGeom prst="rect">
+            <a:avLst/>
+          </a:prstGeom>
+          <a:noFill/>
+          <a:ln/>
+        </p:spPr>
+        <p:txBody>
+          <a:bodyPr wrap="square" lIns="0" tIns="0" rIns="0" bIns="0" rtlCol="0" anchor="ctr"/>
+          <a:lstStyle/>
+          <a:p>
+            <a:pPr indent="0" marL="0">
+              <a:buNone/>
+            </a:pPr>
+            <a:r>
+              <a:rPr lang="en-US" sz="2600" b="1" i="1" spc="-100" kern="0" dirty="0">
+                <a:solidFill>
+                  <a:srgbClr val="E84057"/>
                 </a:solidFill>
                 <a:latin typeface="Fraunces" pitchFamily="34" charset="0"/>
                 <a:ea typeface="Fraunces" pitchFamily="34" charset="-122"/>
                 <a:cs typeface="Fraunces" pitchFamily="34" charset="-120"/>
               </a:rPr>
-              <a:t>2</a:t>
-            </a:r>
-            <a:endParaRPr lang="en-US" sz="2800" dirty="0"/>
-          </a:p>
-        </p:txBody>
-      </p:sp>
-      <p:sp>
-        <p:nvSpPr>
-          <p:cNvPr id="14" name="Text 12"/>
-          <p:cNvSpPr/>
-          <p:nvPr/>
-        </p:nvSpPr>
-        <p:spPr>
-          <a:xfrm>
-            <a:off x="4179494" y="3355848"/>
-            <a:ext cx="1664894" cy="365760"/>
-          </a:xfrm>
-          <a:prstGeom prst="rect">
-            <a:avLst/>
-          </a:prstGeom>
-          <a:noFill/>
-          <a:ln/>
-        </p:spPr>
-        <p:txBody>
-          <a:bodyPr wrap="square" lIns="0" tIns="0" rIns="0" bIns="0" rtlCol="0" anchor="ctr"/>
-          <a:lstStyle/>
-          <a:p>
-            <a:pPr indent="0" marL="0">
-              <a:buNone/>
-            </a:pPr>
-            <a:r>
-              <a:rPr lang="en-US" sz="1400" b="1" spc="-30" kern="0" dirty="0">
-                <a:solidFill>
-                  <a:srgbClr val="0A0A0A"/>
-                </a:solidFill>
-                <a:latin typeface="JetBrains Mono" pitchFamily="34" charset="0"/>
-                <a:ea typeface="JetBrains Mono" pitchFamily="34" charset="-122"/>
-                <a:cs typeface="JetBrains Mono" pitchFamily="34" charset="-120"/>
-              </a:rPr>
-              <a:t>regenerate</a:t>
-            </a:r>
-            <a:endParaRPr lang="en-US" sz="1400" dirty="0"/>
-          </a:p>
-        </p:txBody>
-      </p:sp>
-      <p:sp>
-        <p:nvSpPr>
-          <p:cNvPr id="15" name="Text 13"/>
-          <p:cNvSpPr/>
-          <p:nvPr/>
-        </p:nvSpPr>
-        <p:spPr>
-          <a:xfrm>
-            <a:off x="3630854" y="3886200"/>
-            <a:ext cx="2122094" cy="548640"/>
+              <a:t>Mar '26</a:t>
+            </a:r>
+            <a:endParaRPr lang="en-US" sz="2600" dirty="0"/>
+          </a:p>
+        </p:txBody>
+      </p:sp>
+      <p:sp>
+        <p:nvSpPr>
+          <p:cNvPr id="11" name="Text 9"/>
+          <p:cNvSpPr/>
+          <p:nvPr/>
+        </p:nvSpPr>
+        <p:spPr>
+          <a:xfrm>
+            <a:off x="6484468" y="4251960"/>
+            <a:ext cx="4838548" cy="640080"/>
           </a:xfrm>
           <a:prstGeom prst="rect">
             <a:avLst/>
@@ -4551,28 +4467,45 @@
             <a:r>
               <a:rPr lang="en-US" sz="1200" dirty="0">
                 <a:solidFill>
-                  <a:srgbClr val="3A3A3A"/>
-                </a:solidFill>
-                <a:latin typeface="Inter" pitchFamily="34" charset="0"/>
-                <a:ea typeface="Inter" pitchFamily="34" charset="-122"/>
-                <a:cs typeface="Inter" pitchFamily="34" charset="-120"/>
-              </a:rPr>
-              <a:t>Engine produces architecture, code, tests</a:t>
+                  <a:srgbClr val="1A1A1A"/>
+                </a:solidFill>
+                <a:latin typeface="Inter" pitchFamily="34" charset="0"/>
+                <a:ea typeface="Inter" pitchFamily="34" charset="-122"/>
+                <a:cs typeface="Inter" pitchFamily="34" charset="-120"/>
+              </a:rPr>
+              <a:t>SlopCodeBench + AI-debt papers shipped.</a:t>
             </a:r>
             <a:endParaRPr lang="en-US" sz="1200" dirty="0"/>
           </a:p>
-        </p:txBody>
-      </p:sp>
-      <p:sp>
-        <p:nvSpPr>
-          <p:cNvPr id="16" name="Shape 14"/>
-          <p:cNvSpPr/>
-          <p:nvPr/>
-        </p:nvSpPr>
-        <p:spPr>
-          <a:xfrm>
-            <a:off x="6210148" y="3108960"/>
-            <a:ext cx="2579294" cy="1463040"/>
+          <a:p>
+            <a:pPr indent="0" marL="0">
+              <a:buNone/>
+            </a:pPr>
+            <a:r>
+              <a:rPr lang="en-US" sz="1200" dirty="0">
+                <a:solidFill>
+                  <a:srgbClr val="1A1A1A"/>
+                </a:solidFill>
+                <a:latin typeface="Inter" pitchFamily="34" charset="0"/>
+                <a:ea typeface="Inter" pitchFamily="34" charset="-122"/>
+                <a:cs typeface="Inter" pitchFamily="34" charset="-120"/>
+              </a:rPr>
+              <a:t>Drift quantified for the first time.</a:t>
+            </a:r>
+            <a:endParaRPr lang="en-US" sz="1200" dirty="0"/>
+          </a:p>
+        </p:txBody>
+      </p:sp>
+      <p:sp>
+        <p:nvSpPr>
+          <p:cNvPr id="12" name="Shape 10"/>
+          <p:cNvSpPr/>
+          <p:nvPr/>
+        </p:nvSpPr>
+        <p:spPr>
+          <a:xfrm>
+            <a:off x="594360" y="5166360"/>
+            <a:ext cx="5387188" cy="1417320"/>
           </a:xfrm>
           <a:prstGeom prst="rect">
             <a:avLst/>
@@ -4590,112 +4523,53 @@
       </p:sp>
       <p:sp>
         <p:nvSpPr>
-          <p:cNvPr id="17" name="Shape 15"/>
-          <p:cNvSpPr/>
-          <p:nvPr/>
-        </p:nvSpPr>
-        <p:spPr>
-          <a:xfrm>
-            <a:off x="6210148" y="3108960"/>
-            <a:ext cx="36576" cy="1463040"/>
-          </a:xfrm>
-          <a:prstGeom prst="rect">
-            <a:avLst/>
-          </a:prstGeom>
-          <a:solidFill>
-            <a:srgbClr val="5A5A5A"/>
-          </a:solidFill>
-          <a:ln/>
-        </p:spPr>
-      </p:sp>
-      <p:sp>
-        <p:nvSpPr>
-          <p:cNvPr id="18" name="Text 16"/>
-          <p:cNvSpPr/>
-          <p:nvPr/>
-        </p:nvSpPr>
-        <p:spPr>
-          <a:xfrm>
-            <a:off x="6438748" y="3291840"/>
-            <a:ext cx="457200" cy="457200"/>
-          </a:xfrm>
-          <a:prstGeom prst="rect">
-            <a:avLst/>
-          </a:prstGeom>
-          <a:noFill/>
-          <a:ln/>
-        </p:spPr>
-        <p:txBody>
-          <a:bodyPr wrap="square" lIns="0" tIns="0" rIns="0" bIns="0" rtlCol="0" anchor="ctr"/>
-          <a:lstStyle/>
-          <a:p>
-            <a:pPr indent="0" marL="0">
-              <a:buNone/>
-            </a:pPr>
-            <a:r>
-              <a:rPr lang="en-US" sz="2800" b="1" i="1" dirty="0">
-                <a:solidFill>
-                  <a:srgbClr val="5A5A5A"/>
+          <p:cNvPr id="13" name="Text 11"/>
+          <p:cNvSpPr/>
+          <p:nvPr/>
+        </p:nvSpPr>
+        <p:spPr>
+          <a:xfrm>
+            <a:off x="868680" y="5349240"/>
+            <a:ext cx="3657600" cy="594360"/>
+          </a:xfrm>
+          <a:prstGeom prst="rect">
+            <a:avLst/>
+          </a:prstGeom>
+          <a:noFill/>
+          <a:ln/>
+        </p:spPr>
+        <p:txBody>
+          <a:bodyPr wrap="square" lIns="0" tIns="0" rIns="0" bIns="0" rtlCol="0" anchor="ctr"/>
+          <a:lstStyle/>
+          <a:p>
+            <a:pPr indent="0" marL="0">
+              <a:buNone/>
+            </a:pPr>
+            <a:r>
+              <a:rPr lang="en-US" sz="2600" b="1" i="1" spc="-100" kern="0" dirty="0">
+                <a:solidFill>
+                  <a:srgbClr val="E84057"/>
                 </a:solidFill>
                 <a:latin typeface="Fraunces" pitchFamily="34" charset="0"/>
                 <a:ea typeface="Fraunces" pitchFamily="34" charset="-122"/>
                 <a:cs typeface="Fraunces" pitchFamily="34" charset="-120"/>
               </a:rPr>
-              <a:t>3</a:t>
-            </a:r>
-            <a:endParaRPr lang="en-US" sz="2800" dirty="0"/>
-          </a:p>
-        </p:txBody>
-      </p:sp>
-      <p:sp>
-        <p:nvSpPr>
-          <p:cNvPr id="19" name="Text 17"/>
-          <p:cNvSpPr/>
-          <p:nvPr/>
-        </p:nvSpPr>
-        <p:spPr>
-          <a:xfrm>
-            <a:off x="6987388" y="3355848"/>
-            <a:ext cx="1664894" cy="365760"/>
-          </a:xfrm>
-          <a:prstGeom prst="rect">
-            <a:avLst/>
-          </a:prstGeom>
-          <a:noFill/>
-          <a:ln/>
-        </p:spPr>
-        <p:txBody>
-          <a:bodyPr wrap="square" lIns="0" tIns="0" rIns="0" bIns="0" rtlCol="0" anchor="ctr"/>
-          <a:lstStyle/>
-          <a:p>
-            <a:pPr indent="0" marL="0">
-              <a:buNone/>
-            </a:pPr>
-            <a:r>
-              <a:rPr lang="en-US" sz="1400" b="1" spc="-30" kern="0" dirty="0">
-                <a:solidFill>
-                  <a:srgbClr val="0A0A0A"/>
-                </a:solidFill>
-                <a:latin typeface="JetBrains Mono" pitchFamily="34" charset="0"/>
-                <a:ea typeface="JetBrains Mono" pitchFamily="34" charset="-122"/>
-                <a:cs typeface="JetBrains Mono" pitchFamily="34" charset="-120"/>
-              </a:rPr>
-              <a:t>eval</a:t>
-            </a:r>
-            <a:endParaRPr lang="en-US" sz="1400" dirty="0"/>
-          </a:p>
-        </p:txBody>
-      </p:sp>
-      <p:sp>
-        <p:nvSpPr>
-          <p:cNvPr id="20" name="Text 18"/>
-          <p:cNvSpPr/>
-          <p:nvPr/>
-        </p:nvSpPr>
-        <p:spPr>
-          <a:xfrm>
-            <a:off x="6438748" y="3886200"/>
-            <a:ext cx="2122094" cy="548640"/>
+              <a:t>GPT-5</a:t>
+            </a:r>
+            <a:endParaRPr lang="en-US" sz="2600" dirty="0"/>
+          </a:p>
+        </p:txBody>
+      </p:sp>
+      <p:sp>
+        <p:nvSpPr>
+          <p:cNvPr id="14" name="Text 12"/>
+          <p:cNvSpPr/>
+          <p:nvPr/>
+        </p:nvSpPr>
+        <p:spPr>
+          <a:xfrm>
+            <a:off x="868680" y="5897880"/>
+            <a:ext cx="4838548" cy="640080"/>
           </a:xfrm>
           <a:prstGeom prst="rect">
             <a:avLst/>
@@ -4713,34 +4587,51 @@
             <a:r>
               <a:rPr lang="en-US" sz="1200" dirty="0">
                 <a:solidFill>
-                  <a:srgbClr val="3A3A3A"/>
-                </a:solidFill>
-                <a:latin typeface="Inter" pitchFamily="34" charset="0"/>
-                <a:ea typeface="Inter" pitchFamily="34" charset="-122"/>
-                <a:cs typeface="Inter" pitchFamily="34" charset="-120"/>
-              </a:rPr>
-              <a:t>Decidable + mechanical + heuristic checks</a:t>
+                  <a:srgbClr val="1A1A1A"/>
+                </a:solidFill>
+                <a:latin typeface="Inter" pitchFamily="34" charset="0"/>
+                <a:ea typeface="Inter" pitchFamily="34" charset="-122"/>
+                <a:cs typeface="Inter" pitchFamily="34" charset="-120"/>
+              </a:rPr>
+              <a:t>Frontier models finally reliable for deterministic regen.</a:t>
             </a:r>
             <a:endParaRPr lang="en-US" sz="1200" dirty="0"/>
           </a:p>
-        </p:txBody>
-      </p:sp>
-      <p:sp>
-        <p:nvSpPr>
-          <p:cNvPr id="21" name="Shape 19"/>
-          <p:cNvSpPr/>
-          <p:nvPr/>
-        </p:nvSpPr>
-        <p:spPr>
-          <a:xfrm>
-            <a:off x="9018041" y="3108960"/>
-            <a:ext cx="2579294" cy="1463040"/>
+          <a:p>
+            <a:pPr indent="0" marL="0">
+              <a:buNone/>
+            </a:pPr>
+            <a:r>
+              <a:rPr lang="en-US" sz="1200" dirty="0">
+                <a:solidFill>
+                  <a:srgbClr val="1A1A1A"/>
+                </a:solidFill>
+                <a:latin typeface="Inter" pitchFamily="34" charset="0"/>
+                <a:ea typeface="Inter" pitchFamily="34" charset="-122"/>
+                <a:cs typeface="Inter" pitchFamily="34" charset="-120"/>
+              </a:rPr>
+              <a:t>Same prompt, same output, every cycle.</a:t>
+            </a:r>
+            <a:endParaRPr lang="en-US" sz="1200" dirty="0"/>
+          </a:p>
+        </p:txBody>
+      </p:sp>
+      <p:sp>
+        <p:nvSpPr>
+          <p:cNvPr id="15" name="Shape 13"/>
+          <p:cNvSpPr/>
+          <p:nvPr/>
+        </p:nvSpPr>
+        <p:spPr>
+          <a:xfrm>
+            <a:off x="6210148" y="5166360"/>
+            <a:ext cx="5387188" cy="1417320"/>
           </a:xfrm>
           <a:prstGeom prst="rect">
             <a:avLst/>
           </a:prstGeom>
           <a:solidFill>
-            <a:srgbClr val="EFEEEC"/>
+            <a:srgbClr val="FFFFFF"/>
           </a:solidFill>
           <a:ln w="9525">
             <a:solidFill>
@@ -4752,112 +4643,53 @@
       </p:sp>
       <p:sp>
         <p:nvSpPr>
-          <p:cNvPr id="22" name="Shape 20"/>
-          <p:cNvSpPr/>
-          <p:nvPr/>
-        </p:nvSpPr>
-        <p:spPr>
-          <a:xfrm>
-            <a:off x="9018041" y="3108960"/>
-            <a:ext cx="36576" cy="1463040"/>
-          </a:xfrm>
-          <a:prstGeom prst="rect">
-            <a:avLst/>
-          </a:prstGeom>
-          <a:solidFill>
-            <a:srgbClr val="D6D3CD"/>
-          </a:solidFill>
-          <a:ln/>
-        </p:spPr>
-      </p:sp>
-      <p:sp>
-        <p:nvSpPr>
-          <p:cNvPr id="23" name="Text 21"/>
-          <p:cNvSpPr/>
-          <p:nvPr/>
-        </p:nvSpPr>
-        <p:spPr>
-          <a:xfrm>
-            <a:off x="9246641" y="3291840"/>
-            <a:ext cx="457200" cy="457200"/>
-          </a:xfrm>
-          <a:prstGeom prst="rect">
-            <a:avLst/>
-          </a:prstGeom>
-          <a:noFill/>
-          <a:ln/>
-        </p:spPr>
-        <p:txBody>
-          <a:bodyPr wrap="square" lIns="0" tIns="0" rIns="0" bIns="0" rtlCol="0" anchor="ctr"/>
-          <a:lstStyle/>
-          <a:p>
-            <a:pPr indent="0" marL="0">
-              <a:buNone/>
-            </a:pPr>
-            <a:r>
-              <a:rPr lang="en-US" sz="2800" b="1" i="1" dirty="0">
-                <a:solidFill>
-                  <a:srgbClr val="5A5A5A"/>
+          <p:cNvPr id="16" name="Text 14"/>
+          <p:cNvSpPr/>
+          <p:nvPr/>
+        </p:nvSpPr>
+        <p:spPr>
+          <a:xfrm>
+            <a:off x="6484468" y="5349240"/>
+            <a:ext cx="3657600" cy="594360"/>
+          </a:xfrm>
+          <a:prstGeom prst="rect">
+            <a:avLst/>
+          </a:prstGeom>
+          <a:noFill/>
+          <a:ln/>
+        </p:spPr>
+        <p:txBody>
+          <a:bodyPr wrap="square" lIns="0" tIns="0" rIns="0" bIns="0" rtlCol="0" anchor="ctr"/>
+          <a:lstStyle/>
+          <a:p>
+            <a:pPr indent="0" marL="0">
+              <a:buNone/>
+            </a:pPr>
+            <a:r>
+              <a:rPr lang="en-US" sz="2600" b="1" i="1" spc="-100" kern="0" dirty="0">
+                <a:solidFill>
+                  <a:srgbClr val="E84057"/>
                 </a:solidFill>
                 <a:latin typeface="Fraunces" pitchFamily="34" charset="0"/>
                 <a:ea typeface="Fraunces" pitchFamily="34" charset="-122"/>
                 <a:cs typeface="Fraunces" pitchFamily="34" charset="-120"/>
               </a:rPr>
-              <a:t>4</a:t>
-            </a:r>
-            <a:endParaRPr lang="en-US" sz="2800" dirty="0"/>
-          </a:p>
-        </p:txBody>
-      </p:sp>
-      <p:sp>
-        <p:nvSpPr>
-          <p:cNvPr id="24" name="Text 22"/>
-          <p:cNvSpPr/>
-          <p:nvPr/>
-        </p:nvSpPr>
-        <p:spPr>
-          <a:xfrm>
-            <a:off x="9795281" y="3355848"/>
-            <a:ext cx="1664894" cy="365760"/>
-          </a:xfrm>
-          <a:prstGeom prst="rect">
-            <a:avLst/>
-          </a:prstGeom>
-          <a:noFill/>
-          <a:ln/>
-        </p:spPr>
-        <p:txBody>
-          <a:bodyPr wrap="square" lIns="0" tIns="0" rIns="0" bIns="0" rtlCol="0" anchor="ctr"/>
-          <a:lstStyle/>
-          <a:p>
-            <a:pPr indent="0" marL="0">
-              <a:buNone/>
-            </a:pPr>
-            <a:r>
-              <a:rPr lang="en-US" sz="1400" b="1" spc="-30" kern="0" dirty="0">
-                <a:solidFill>
-                  <a:srgbClr val="0A0A0A"/>
-                </a:solidFill>
-                <a:latin typeface="JetBrains Mono" pitchFamily="34" charset="0"/>
-                <a:ea typeface="JetBrains Mono" pitchFamily="34" charset="-122"/>
-                <a:cs typeface="JetBrains Mono" pitchFamily="34" charset="-120"/>
-              </a:rPr>
-              <a:t>ship</a:t>
-            </a:r>
-            <a:endParaRPr lang="en-US" sz="1400" dirty="0"/>
-          </a:p>
-        </p:txBody>
-      </p:sp>
-      <p:sp>
-        <p:nvSpPr>
-          <p:cNvPr id="25" name="Text 23"/>
-          <p:cNvSpPr/>
-          <p:nvPr/>
-        </p:nvSpPr>
-        <p:spPr>
-          <a:xfrm>
-            <a:off x="9246641" y="3886200"/>
-            <a:ext cx="2122094" cy="548640"/>
+              <a:t>60% / 0–20%</a:t>
+            </a:r>
+            <a:endParaRPr lang="en-US" sz="2600" dirty="0"/>
+          </a:p>
+        </p:txBody>
+      </p:sp>
+      <p:sp>
+        <p:nvSpPr>
+          <p:cNvPr id="17" name="Text 15"/>
+          <p:cNvSpPr/>
+          <p:nvPr/>
+        </p:nvSpPr>
+        <p:spPr>
+          <a:xfrm>
+            <a:off x="6484468" y="5897880"/>
+            <a:ext cx="4838548" cy="640080"/>
           </a:xfrm>
           <a:prstGeom prst="rect">
             <a:avLst/>
@@ -4875,217 +4707,16 @@
             <a:r>
               <a:rPr lang="en-US" sz="1200" dirty="0">
                 <a:solidFill>
-                  <a:srgbClr val="3A3A3A"/>
-                </a:solidFill>
-                <a:latin typeface="Inter" pitchFamily="34" charset="0"/>
-                <a:ea typeface="Inter" pitchFamily="34" charset="-122"/>
-                <a:cs typeface="Inter" pitchFamily="34" charset="-120"/>
-              </a:rPr>
-              <a:t>Code-sync trace closes the loop</a:t>
+                  <a:srgbClr val="1A1A1A"/>
+                </a:solidFill>
+                <a:latin typeface="Inter" pitchFamily="34" charset="0"/>
+                <a:ea typeface="Inter" pitchFamily="34" charset="-122"/>
+                <a:cs typeface="Inter" pitchFamily="34" charset="-120"/>
+              </a:rPr>
+              <a:t>Devs use AI in 60% of work; can fully delegate 0–20%.</a:t>
             </a:r>
             <a:endParaRPr lang="en-US" sz="1200" dirty="0"/>
           </a:p>
-        </p:txBody>
-      </p:sp>
-      <p:sp>
-        <p:nvSpPr>
-          <p:cNvPr id="26" name="Text 24"/>
-          <p:cNvSpPr/>
-          <p:nvPr/>
-        </p:nvSpPr>
-        <p:spPr>
-          <a:xfrm>
-            <a:off x="594360" y="4937760"/>
-            <a:ext cx="11002975" cy="457200"/>
-          </a:xfrm>
-          <a:prstGeom prst="rect">
-            <a:avLst/>
-          </a:prstGeom>
-          <a:noFill/>
-          <a:ln/>
-        </p:spPr>
-        <p:txBody>
-          <a:bodyPr wrap="square" lIns="0" tIns="0" rIns="0" bIns="0" rtlCol="0" anchor="ctr"/>
-          <a:lstStyle/>
-          <a:p>
-            <a:pPr indent="0" marL="0">
-              <a:buNone/>
-            </a:pPr>
-            <a:r>
-              <a:rPr lang="en-US" sz="1000" b="1" spc="100" kern="0" dirty="0">
-                <a:solidFill>
-                  <a:srgbClr val="C43A50"/>
-                </a:solidFill>
-                <a:latin typeface="JetBrains Mono" pitchFamily="34" charset="0"/>
-                <a:ea typeface="JetBrains Mono" pitchFamily="34" charset="-122"/>
-                <a:cs typeface="JetBrains Mono" pitchFamily="34" charset="-120"/>
-              </a:rPr>
-              <a:t>FIVE MODES   </a:t>
-            </a:r>
-            <a:pPr indent="0" marL="0">
-              <a:buNone/>
-            </a:pPr>
-            <a:r>
-              <a:rPr lang="en-US" sz="1400" b="1" dirty="0">
-                <a:solidFill>
-                  <a:srgbClr val="0A0A0A"/>
-                </a:solidFill>
-                <a:latin typeface="JetBrains Mono" pitchFamily="34" charset="0"/>
-                <a:ea typeface="JetBrains Mono" pitchFamily="34" charset="-122"/>
-                <a:cs typeface="JetBrains Mono" pitchFamily="34" charset="-120"/>
-              </a:rPr>
-              <a:t>vibe</a:t>
-            </a:r>
-            <a:pPr indent="0" marL="0">
-              <a:buNone/>
-            </a:pPr>
-            <a:r>
-              <a:rPr lang="en-US" sz="1400" dirty="0">
-                <a:solidFill>
-                  <a:srgbClr val="5A5A5A"/>
-                </a:solidFill>
-                <a:latin typeface="Inter" pitchFamily="34" charset="0"/>
-                <a:ea typeface="Inter" pitchFamily="34" charset="-122"/>
-                <a:cs typeface="Inter" pitchFamily="34" charset="-120"/>
-              </a:rPr>
-              <a:t> (solo) · </a:t>
-            </a:r>
-            <a:pPr indent="0" marL="0">
-              <a:buNone/>
-            </a:pPr>
-            <a:r>
-              <a:rPr lang="en-US" sz="1400" b="1" dirty="0">
-                <a:solidFill>
-                  <a:srgbClr val="0A0A0A"/>
-                </a:solidFill>
-                <a:latin typeface="JetBrains Mono" pitchFamily="34" charset="0"/>
-                <a:ea typeface="JetBrains Mono" pitchFamily="34" charset="-122"/>
-                <a:cs typeface="JetBrains Mono" pitchFamily="34" charset="-120"/>
-              </a:rPr>
-              <a:t>pm</a:t>
-            </a:r>
-            <a:pPr indent="0" marL="0">
-              <a:buNone/>
-            </a:pPr>
-            <a:r>
-              <a:rPr lang="en-US" sz="1400" dirty="0">
-                <a:solidFill>
-                  <a:srgbClr val="5A5A5A"/>
-                </a:solidFill>
-                <a:latin typeface="Inter" pitchFamily="34" charset="0"/>
-                <a:ea typeface="Inter" pitchFamily="34" charset="-122"/>
-                <a:cs typeface="Inter" pitchFamily="34" charset="-120"/>
-              </a:rPr>
-              <a:t> (product) · </a:t>
-            </a:r>
-            <a:pPr indent="0" marL="0">
-              <a:buNone/>
-            </a:pPr>
-            <a:r>
-              <a:rPr lang="en-US" sz="1400" b="1" dirty="0">
-                <a:solidFill>
-                  <a:srgbClr val="0A0A0A"/>
-                </a:solidFill>
-                <a:latin typeface="JetBrains Mono" pitchFamily="34" charset="0"/>
-                <a:ea typeface="JetBrains Mono" pitchFamily="34" charset="-122"/>
-                <a:cs typeface="JetBrains Mono" pitchFamily="34" charset="-120"/>
-              </a:rPr>
-              <a:t>dev</a:t>
-            </a:r>
-            <a:pPr indent="0" marL="0">
-              <a:buNone/>
-            </a:pPr>
-            <a:r>
-              <a:rPr lang="en-US" sz="1400" dirty="0">
-                <a:solidFill>
-                  <a:srgbClr val="5A5A5A"/>
-                </a:solidFill>
-                <a:latin typeface="Inter" pitchFamily="34" charset="0"/>
-                <a:ea typeface="Inter" pitchFamily="34" charset="-122"/>
-                <a:cs typeface="Inter" pitchFamily="34" charset="-120"/>
-              </a:rPr>
-              <a:t> (tech) · </a:t>
-            </a:r>
-            <a:pPr indent="0" marL="0">
-              <a:buNone/>
-            </a:pPr>
-            <a:r>
-              <a:rPr lang="en-US" sz="1400" b="1" dirty="0">
-                <a:solidFill>
-                  <a:srgbClr val="0A0A0A"/>
-                </a:solidFill>
-                <a:latin typeface="JetBrains Mono" pitchFamily="34" charset="0"/>
-                <a:ea typeface="JetBrains Mono" pitchFamily="34" charset="-122"/>
-                <a:cs typeface="JetBrains Mono" pitchFamily="34" charset="-120"/>
-              </a:rPr>
-              <a:t>ux</a:t>
-            </a:r>
-            <a:pPr indent="0" marL="0">
-              <a:buNone/>
-            </a:pPr>
-            <a:r>
-              <a:rPr lang="en-US" sz="1400" dirty="0">
-                <a:solidFill>
-                  <a:srgbClr val="5A5A5A"/>
-                </a:solidFill>
-                <a:latin typeface="Inter" pitchFamily="34" charset="0"/>
-                <a:ea typeface="Inter" pitchFamily="34" charset="-122"/>
-                <a:cs typeface="Inter" pitchFamily="34" charset="-120"/>
-              </a:rPr>
-              <a:t> (design) · </a:t>
-            </a:r>
-            <a:pPr indent="0" marL="0">
-              <a:buNone/>
-            </a:pPr>
-            <a:r>
-              <a:rPr lang="en-US" sz="1400" b="1" dirty="0">
-                <a:solidFill>
-                  <a:srgbClr val="0A0A0A"/>
-                </a:solidFill>
-                <a:latin typeface="JetBrains Mono" pitchFamily="34" charset="0"/>
-                <a:ea typeface="JetBrains Mono" pitchFamily="34" charset="-122"/>
-                <a:cs typeface="JetBrains Mono" pitchFamily="34" charset="-120"/>
-              </a:rPr>
-              <a:t>expert</a:t>
-            </a:r>
-            <a:pPr indent="0" marL="0">
-              <a:buNone/>
-            </a:pPr>
-            <a:r>
-              <a:rPr lang="en-US" sz="1400" dirty="0">
-                <a:solidFill>
-                  <a:srgbClr val="5A5A5A"/>
-                </a:solidFill>
-                <a:latin typeface="Inter" pitchFamily="34" charset="0"/>
-                <a:ea typeface="Inter" pitchFamily="34" charset="-122"/>
-                <a:cs typeface="Inter" pitchFamily="34" charset="-120"/>
-              </a:rPr>
-              <a:t> (regulated)</a:t>
-            </a:r>
-            <a:endParaRPr lang="en-US" sz="1400" dirty="0"/>
-          </a:p>
-        </p:txBody>
-      </p:sp>
-      <p:sp>
-        <p:nvSpPr>
-          <p:cNvPr id="27" name="Text 25"/>
-          <p:cNvSpPr/>
-          <p:nvPr/>
-        </p:nvSpPr>
-        <p:spPr>
-          <a:xfrm>
-            <a:off x="594360" y="5440680"/>
-            <a:ext cx="11002975" cy="365760"/>
-          </a:xfrm>
-          <a:prstGeom prst="rect">
-            <a:avLst/>
-          </a:prstGeom>
-          <a:noFill/>
-          <a:ln/>
-        </p:spPr>
-        <p:txBody>
-          <a:bodyPr wrap="square" lIns="0" tIns="0" rIns="0" bIns="0" rtlCol="0" anchor="ctr"/>
-          <a:lstStyle/>
           <a:p>
             <a:pPr indent="0" marL="0">
               <a:buNone/>
@@ -5093,13 +4724,13 @@
             <a:r>
               <a:rPr lang="en-US" sz="1200" dirty="0">
                 <a:solidFill>
-                  <a:srgbClr val="707070"/>
-                </a:solidFill>
-                <a:latin typeface="JetBrains Mono" pitchFamily="34" charset="0"/>
-                <a:ea typeface="JetBrains Mono" pitchFamily="34" charset="-122"/>
-                <a:cs typeface="JetBrains Mono" pitchFamily="34" charset="-120"/>
-              </a:rPr>
-              <a:t>Open source: methodology, Skill, templates.  Paid: hosted engine, audit, compliance.</a:t>
+                  <a:srgbClr val="1A1A1A"/>
+                </a:solidFill>
+                <a:latin typeface="Inter" pitchFamily="34" charset="0"/>
+                <a:ea typeface="Inter" pitchFamily="34" charset="-122"/>
+                <a:cs typeface="Inter" pitchFamily="34" charset="-120"/>
+              </a:rPr>
+              <a:t>Governance is the new bottleneck.</a:t>
             </a:r>
             <a:endParaRPr lang="en-US" sz="1200" dirty="0"/>
           </a:p>
@@ -5209,7 +4840,7 @@
                 <a:ea typeface="JetBrains Mono" pitchFamily="34" charset="-122"/>
                 <a:cs typeface="JetBrains Mono" pitchFamily="34" charset="-120"/>
               </a:rPr>
-              <a:t>WHY NOW</a:t>
+              <a:t>MARKET</a:t>
             </a:r>
             <a:endParaRPr lang="en-US" sz="1000" dirty="0"/>
           </a:p>
@@ -5248,7 +4879,7 @@
                 <a:ea typeface="Inter" pitchFamily="34" charset="-122"/>
                 <a:cs typeface="Inter" pitchFamily="34" charset="-120"/>
               </a:rPr>
-              <a:t>Four forces.</a:t>
+              <a:t>$2.2B SAM.</a:t>
             </a:r>
             <a:endParaRPr lang="en-US" sz="5600" dirty="0"/>
           </a:p>
@@ -5265,7 +4896,7 @@
                 <a:ea typeface="Fraunces" pitchFamily="34" charset="-122"/>
                 <a:cs typeface="Fraunces" pitchFamily="34" charset="-120"/>
               </a:rPr>
-              <a:t>Same six months.</a:t>
+              <a:t>Cursor proves it.</a:t>
             </a:r>
             <a:endParaRPr lang="en-US" sz="5600" dirty="0"/>
           </a:p>
@@ -5280,23 +4911,23 @@
         <p:spPr>
           <a:xfrm>
             <a:off x="594360" y="2788920"/>
-            <a:ext cx="11002975" cy="548640"/>
-          </a:xfrm>
-          <a:prstGeom prst="rect">
-            <a:avLst/>
-          </a:prstGeom>
-          <a:noFill/>
-          <a:ln/>
-        </p:spPr>
-        <p:txBody>
-          <a:bodyPr wrap="square" lIns="0" tIns="0" rIns="0" bIns="0" rtlCol="0" anchor="ctr"/>
-          <a:lstStyle/>
-          <a:p>
-            <a:pPr indent="0" marL="0">
-              <a:buNone/>
-            </a:pPr>
-            <a:r>
-              <a:rPr lang="en-US" sz="1600" dirty="0">
+            <a:ext cx="11002975" cy="777240"/>
+          </a:xfrm>
+          <a:prstGeom prst="rect">
+            <a:avLst/>
+          </a:prstGeom>
+          <a:noFill/>
+          <a:ln/>
+        </p:spPr>
+        <p:txBody>
+          <a:bodyPr wrap="square" lIns="0" tIns="0" rIns="0" bIns="0" rtlCol="0" anchor="ctr"/>
+          <a:lstStyle/>
+          <a:p>
+            <a:pPr indent="0" marL="0">
+              <a:buNone/>
+            </a:pPr>
+            <a:r>
+              <a:rPr lang="en-US" sz="1500" dirty="0">
                 <a:solidFill>
                   <a:srgbClr val="3A3A3A"/>
                 </a:solidFill>
@@ -5304,32 +4935,459 @@
                 <a:ea typeface="Inter" pitchFamily="34" charset="-122"/>
                 <a:cs typeface="Inter" pitchFamily="34" charset="-120"/>
               </a:rPr>
-              <a:t>None of these conditions held two years ago. All four crossed their threshold in Q1 2026.</a:t>
-            </a:r>
-            <a:endParaRPr lang="en-US" sz="1600" dirty="0"/>
-          </a:p>
-        </p:txBody>
-      </p:sp>
-      <p:sp>
-        <p:nvSpPr>
-          <p:cNvPr id="6" name="Shape 4"/>
-          <p:cNvSpPr/>
-          <p:nvPr/>
-        </p:nvSpPr>
-        <p:spPr>
-          <a:xfrm>
-            <a:off x="594360" y="3520440"/>
-            <a:ext cx="5387188" cy="1417320"/>
-          </a:xfrm>
-          <a:prstGeom prst="rect">
-            <a:avLst/>
-          </a:prstGeom>
-          <a:solidFill>
-            <a:srgbClr val="FFFFFF"/>
-          </a:solidFill>
-          <a:ln w="9525">
+              <a:t>Cursor at $9B revenue/valuation proves AI-dev-infra is a real market. We sell the layer above it — to a different buyer, at a different ACV (per-team, not per-seat).</a:t>
+            </a:r>
+            <a:endParaRPr lang="en-US" sz="1500" dirty="0"/>
+          </a:p>
+        </p:txBody>
+      </p:sp>
+      <p:sp>
+        <p:nvSpPr>
+          <p:cNvPr id="6" name="Text 4"/>
+          <p:cNvSpPr/>
+          <p:nvPr/>
+        </p:nvSpPr>
+        <p:spPr>
+          <a:xfrm>
+            <a:off x="594360" y="3703320"/>
+            <a:ext cx="5943600" cy="365760"/>
+          </a:xfrm>
+          <a:prstGeom prst="rect">
+            <a:avLst/>
+          </a:prstGeom>
+          <a:noFill/>
+          <a:ln/>
+        </p:spPr>
+        <p:txBody>
+          <a:bodyPr wrap="square" lIns="0" tIns="0" rIns="0" bIns="0" rtlCol="0" anchor="ctr"/>
+          <a:lstStyle/>
+          <a:p>
+            <a:pPr indent="0" marL="0">
+              <a:buNone/>
+            </a:pPr>
+            <a:r>
+              <a:rPr lang="en-US" sz="1400" dirty="0">
+                <a:solidFill>
+                  <a:srgbClr val="1A1A1A"/>
+                </a:solidFill>
+                <a:latin typeface="Inter" pitchFamily="34" charset="0"/>
+                <a:ea typeface="Inter" pitchFamily="34" charset="-122"/>
+                <a:cs typeface="Inter" pitchFamily="34" charset="-120"/>
+              </a:rPr>
+              <a:t>Developers worldwide</a:t>
+            </a:r>
+            <a:endParaRPr lang="en-US" sz="1400" dirty="0"/>
+          </a:p>
+        </p:txBody>
+      </p:sp>
+      <p:sp>
+        <p:nvSpPr>
+          <p:cNvPr id="7" name="Text 5"/>
+          <p:cNvSpPr/>
+          <p:nvPr/>
+        </p:nvSpPr>
+        <p:spPr>
+          <a:xfrm>
+            <a:off x="594360" y="3995928"/>
+            <a:ext cx="5943600" cy="182880"/>
+          </a:xfrm>
+          <a:prstGeom prst="rect">
+            <a:avLst/>
+          </a:prstGeom>
+          <a:noFill/>
+          <a:ln/>
+        </p:spPr>
+        <p:txBody>
+          <a:bodyPr wrap="square" lIns="0" tIns="0" rIns="0" bIns="0" rtlCol="0" anchor="ctr"/>
+          <a:lstStyle/>
+          <a:p>
+            <a:pPr indent="0" marL="0">
+              <a:buNone/>
+            </a:pPr>
+            <a:r>
+              <a:rPr lang="en-US" sz="900" dirty="0">
+                <a:solidFill>
+                  <a:srgbClr val="707070"/>
+                </a:solidFill>
+                <a:latin typeface="JetBrains Mono" pitchFamily="34" charset="0"/>
+                <a:ea typeface="JetBrains Mono" pitchFamily="34" charset="-122"/>
+                <a:cs typeface="JetBrains Mono" pitchFamily="34" charset="-120"/>
+              </a:rPr>
+              <a:t>Stack Overflow Dev Survey 2025</a:t>
+            </a:r>
+            <a:endParaRPr lang="en-US" sz="900" dirty="0"/>
+          </a:p>
+        </p:txBody>
+      </p:sp>
+      <p:sp>
+        <p:nvSpPr>
+          <p:cNvPr id="8" name="Text 6"/>
+          <p:cNvSpPr/>
+          <p:nvPr/>
+        </p:nvSpPr>
+        <p:spPr>
+          <a:xfrm>
+            <a:off x="6217920" y="3703320"/>
+            <a:ext cx="1371600" cy="365760"/>
+          </a:xfrm>
+          <a:prstGeom prst="rect">
+            <a:avLst/>
+          </a:prstGeom>
+          <a:noFill/>
+          <a:ln/>
+        </p:spPr>
+        <p:txBody>
+          <a:bodyPr wrap="square" lIns="0" tIns="0" rIns="0" bIns="0" rtlCol="0" anchor="ctr"/>
+          <a:lstStyle/>
+          <a:p>
+            <a:pPr algn="r" indent="0" marL="0">
+              <a:buNone/>
+            </a:pPr>
+            <a:r>
+              <a:rPr lang="en-US" sz="2000" b="1" dirty="0">
+                <a:solidFill>
+                  <a:srgbClr val="0A0A0A"/>
+                </a:solidFill>
+                <a:latin typeface="JetBrains Mono" pitchFamily="34" charset="0"/>
+                <a:ea typeface="JetBrains Mono" pitchFamily="34" charset="-122"/>
+                <a:cs typeface="JetBrains Mono" pitchFamily="34" charset="-120"/>
+              </a:rPr>
+              <a:t>30M</a:t>
+            </a:r>
+            <a:endParaRPr lang="en-US" sz="2000" dirty="0"/>
+          </a:p>
+        </p:txBody>
+      </p:sp>
+      <p:sp>
+        <p:nvSpPr>
+          <p:cNvPr id="9" name="Text 7"/>
+          <p:cNvSpPr/>
+          <p:nvPr/>
+        </p:nvSpPr>
+        <p:spPr>
+          <a:xfrm>
+            <a:off x="594360" y="4206240"/>
+            <a:ext cx="5943600" cy="365760"/>
+          </a:xfrm>
+          <a:prstGeom prst="rect">
+            <a:avLst/>
+          </a:prstGeom>
+          <a:noFill/>
+          <a:ln/>
+        </p:spPr>
+        <p:txBody>
+          <a:bodyPr wrap="square" lIns="0" tIns="0" rIns="0" bIns="0" rtlCol="0" anchor="ctr"/>
+          <a:lstStyle/>
+          <a:p>
+            <a:pPr indent="0" marL="0">
+              <a:buNone/>
+            </a:pPr>
+            <a:r>
+              <a:rPr lang="en-US" sz="1400" dirty="0">
+                <a:solidFill>
+                  <a:srgbClr val="1A1A1A"/>
+                </a:solidFill>
+                <a:latin typeface="Inter" pitchFamily="34" charset="0"/>
+                <a:ea typeface="Inter" pitchFamily="34" charset="-122"/>
+                <a:cs typeface="Inter" pitchFamily="34" charset="-120"/>
+              </a:rPr>
+              <a:t>Using AI coding tools (~33%)</a:t>
+            </a:r>
+            <a:endParaRPr lang="en-US" sz="1400" dirty="0"/>
+          </a:p>
+        </p:txBody>
+      </p:sp>
+      <p:sp>
+        <p:nvSpPr>
+          <p:cNvPr id="10" name="Text 8"/>
+          <p:cNvSpPr/>
+          <p:nvPr/>
+        </p:nvSpPr>
+        <p:spPr>
+          <a:xfrm>
+            <a:off x="594360" y="4498848"/>
+            <a:ext cx="5943600" cy="182880"/>
+          </a:xfrm>
+          <a:prstGeom prst="rect">
+            <a:avLst/>
+          </a:prstGeom>
+          <a:noFill/>
+          <a:ln/>
+        </p:spPr>
+        <p:txBody>
+          <a:bodyPr wrap="square" lIns="0" tIns="0" rIns="0" bIns="0" rtlCol="0" anchor="ctr"/>
+          <a:lstStyle/>
+          <a:p>
+            <a:pPr indent="0" marL="0">
+              <a:buNone/>
+            </a:pPr>
+            <a:r>
+              <a:rPr lang="en-US" sz="900" dirty="0">
+                <a:solidFill>
+                  <a:srgbClr val="707070"/>
+                </a:solidFill>
+                <a:latin typeface="JetBrains Mono" pitchFamily="34" charset="0"/>
+                <a:ea typeface="JetBrains Mono" pitchFamily="34" charset="-122"/>
+                <a:cs typeface="JetBrains Mono" pitchFamily="34" charset="-120"/>
+              </a:rPr>
+              <a:t>JetBrains 2025; GitHub Octoverse</a:t>
+            </a:r>
+            <a:endParaRPr lang="en-US" sz="900" dirty="0"/>
+          </a:p>
+        </p:txBody>
+      </p:sp>
+      <p:sp>
+        <p:nvSpPr>
+          <p:cNvPr id="11" name="Text 9"/>
+          <p:cNvSpPr/>
+          <p:nvPr/>
+        </p:nvSpPr>
+        <p:spPr>
+          <a:xfrm>
+            <a:off x="6217920" y="4206240"/>
+            <a:ext cx="1371600" cy="365760"/>
+          </a:xfrm>
+          <a:prstGeom prst="rect">
+            <a:avLst/>
+          </a:prstGeom>
+          <a:noFill/>
+          <a:ln/>
+        </p:spPr>
+        <p:txBody>
+          <a:bodyPr wrap="square" lIns="0" tIns="0" rIns="0" bIns="0" rtlCol="0" anchor="ctr"/>
+          <a:lstStyle/>
+          <a:p>
+            <a:pPr algn="r" indent="0" marL="0">
+              <a:buNone/>
+            </a:pPr>
+            <a:r>
+              <a:rPr lang="en-US" sz="2000" b="1" dirty="0">
+                <a:solidFill>
+                  <a:srgbClr val="0A0A0A"/>
+                </a:solidFill>
+                <a:latin typeface="JetBrains Mono" pitchFamily="34" charset="0"/>
+                <a:ea typeface="JetBrains Mono" pitchFamily="34" charset="-122"/>
+                <a:cs typeface="JetBrains Mono" pitchFamily="34" charset="-120"/>
+              </a:rPr>
+              <a:t>10M</a:t>
+            </a:r>
+            <a:endParaRPr lang="en-US" sz="2000" dirty="0"/>
+          </a:p>
+        </p:txBody>
+      </p:sp>
+      <p:sp>
+        <p:nvSpPr>
+          <p:cNvPr id="12" name="Text 10"/>
+          <p:cNvSpPr/>
+          <p:nvPr/>
+        </p:nvSpPr>
+        <p:spPr>
+          <a:xfrm>
+            <a:off x="594360" y="4709160"/>
+            <a:ext cx="5943600" cy="365760"/>
+          </a:xfrm>
+          <a:prstGeom prst="rect">
+            <a:avLst/>
+          </a:prstGeom>
+          <a:noFill/>
+          <a:ln/>
+        </p:spPr>
+        <p:txBody>
+          <a:bodyPr wrap="square" lIns="0" tIns="0" rIns="0" bIns="0" rtlCol="0" anchor="ctr"/>
+          <a:lstStyle/>
+          <a:p>
+            <a:pPr indent="0" marL="0">
+              <a:buNone/>
+            </a:pPr>
+            <a:r>
+              <a:rPr lang="en-US" sz="1400" dirty="0">
+                <a:solidFill>
+                  <a:srgbClr val="1A1A1A"/>
+                </a:solidFill>
+                <a:latin typeface="Inter" pitchFamily="34" charset="0"/>
+                <a:ea typeface="Inter" pitchFamily="34" charset="-122"/>
+                <a:cs typeface="Inter" pitchFamily="34" charset="-120"/>
+              </a:rPr>
+              <a:t>Multi-cycle agentic generation (~30%)</a:t>
+            </a:r>
+            <a:endParaRPr lang="en-US" sz="1400" dirty="0"/>
+          </a:p>
+        </p:txBody>
+      </p:sp>
+      <p:sp>
+        <p:nvSpPr>
+          <p:cNvPr id="13" name="Text 11"/>
+          <p:cNvSpPr/>
+          <p:nvPr/>
+        </p:nvSpPr>
+        <p:spPr>
+          <a:xfrm>
+            <a:off x="594360" y="5001768"/>
+            <a:ext cx="5943600" cy="182880"/>
+          </a:xfrm>
+          <a:prstGeom prst="rect">
+            <a:avLst/>
+          </a:prstGeom>
+          <a:noFill/>
+          <a:ln/>
+        </p:spPr>
+        <p:txBody>
+          <a:bodyPr wrap="square" lIns="0" tIns="0" rIns="0" bIns="0" rtlCol="0" anchor="ctr"/>
+          <a:lstStyle/>
+          <a:p>
+            <a:pPr indent="0" marL="0">
+              <a:buNone/>
+            </a:pPr>
+            <a:r>
+              <a:rPr lang="en-US" sz="900" dirty="0">
+                <a:solidFill>
+                  <a:srgbClr val="707070"/>
+                </a:solidFill>
+                <a:latin typeface="JetBrains Mono" pitchFamily="34" charset="0"/>
+                <a:ea typeface="JetBrains Mono" pitchFamily="34" charset="-122"/>
+                <a:cs typeface="JetBrains Mono" pitchFamily="34" charset="-120"/>
+              </a:rPr>
+              <a:t>the cohort that hits drift</a:t>
+            </a:r>
+            <a:endParaRPr lang="en-US" sz="900" dirty="0"/>
+          </a:p>
+        </p:txBody>
+      </p:sp>
+      <p:sp>
+        <p:nvSpPr>
+          <p:cNvPr id="14" name="Text 12"/>
+          <p:cNvSpPr/>
+          <p:nvPr/>
+        </p:nvSpPr>
+        <p:spPr>
+          <a:xfrm>
+            <a:off x="6217920" y="4709160"/>
+            <a:ext cx="1371600" cy="365760"/>
+          </a:xfrm>
+          <a:prstGeom prst="rect">
+            <a:avLst/>
+          </a:prstGeom>
+          <a:noFill/>
+          <a:ln/>
+        </p:spPr>
+        <p:txBody>
+          <a:bodyPr wrap="square" lIns="0" tIns="0" rIns="0" bIns="0" rtlCol="0" anchor="ctr"/>
+          <a:lstStyle/>
+          <a:p>
+            <a:pPr algn="r" indent="0" marL="0">
+              <a:buNone/>
+            </a:pPr>
+            <a:r>
+              <a:rPr lang="en-US" sz="2000" b="1" dirty="0">
+                <a:solidFill>
+                  <a:srgbClr val="0A0A0A"/>
+                </a:solidFill>
+                <a:latin typeface="JetBrains Mono" pitchFamily="34" charset="0"/>
+                <a:ea typeface="JetBrains Mono" pitchFamily="34" charset="-122"/>
+                <a:cs typeface="JetBrains Mono" pitchFamily="34" charset="-120"/>
+              </a:rPr>
+              <a:t>3M</a:t>
+            </a:r>
+            <a:endParaRPr lang="en-US" sz="2000" dirty="0"/>
+          </a:p>
+        </p:txBody>
+      </p:sp>
+      <p:sp>
+        <p:nvSpPr>
+          <p:cNvPr id="15" name="Text 13"/>
+          <p:cNvSpPr/>
+          <p:nvPr/>
+        </p:nvSpPr>
+        <p:spPr>
+          <a:xfrm>
+            <a:off x="594360" y="5212080"/>
+            <a:ext cx="5943600" cy="365760"/>
+          </a:xfrm>
+          <a:prstGeom prst="rect">
+            <a:avLst/>
+          </a:prstGeom>
+          <a:noFill/>
+          <a:ln/>
+        </p:spPr>
+        <p:txBody>
+          <a:bodyPr wrap="square" lIns="0" tIns="0" rIns="0" bIns="0" rtlCol="0" anchor="ctr"/>
+          <a:lstStyle/>
+          <a:p>
+            <a:pPr indent="0" marL="0">
+              <a:buNone/>
+            </a:pPr>
+            <a:r>
+              <a:rPr lang="en-US" sz="1400" dirty="0">
+                <a:solidFill>
+                  <a:srgbClr val="1A1A1A"/>
+                </a:solidFill>
+                <a:latin typeface="Inter" pitchFamily="34" charset="0"/>
+                <a:ea typeface="Inter" pitchFamily="34" charset="-122"/>
+                <a:cs typeface="Inter" pitchFamily="34" charset="-120"/>
+              </a:rPr>
+              <a:t>× $720 / yr (mid-tier B2B SaaS)</a:t>
+            </a:r>
+            <a:endParaRPr lang="en-US" sz="1400" dirty="0"/>
+          </a:p>
+        </p:txBody>
+      </p:sp>
+      <p:sp>
+        <p:nvSpPr>
+          <p:cNvPr id="16" name="Text 14"/>
+          <p:cNvSpPr/>
+          <p:nvPr/>
+        </p:nvSpPr>
+        <p:spPr>
+          <a:xfrm>
+            <a:off x="6217920" y="5212080"/>
+            <a:ext cx="1371600" cy="365760"/>
+          </a:xfrm>
+          <a:prstGeom prst="rect">
+            <a:avLst/>
+          </a:prstGeom>
+          <a:noFill/>
+          <a:ln/>
+        </p:spPr>
+        <p:txBody>
+          <a:bodyPr wrap="square" lIns="0" tIns="0" rIns="0" bIns="0" rtlCol="0" anchor="ctr"/>
+          <a:lstStyle/>
+          <a:p>
+            <a:pPr algn="r" indent="0" marL="0">
+              <a:buNone/>
+            </a:pPr>
+            <a:r>
+              <a:rPr lang="en-US" sz="2000" b="1" dirty="0">
+                <a:solidFill>
+                  <a:srgbClr val="0A0A0A"/>
+                </a:solidFill>
+                <a:latin typeface="JetBrains Mono" pitchFamily="34" charset="0"/>
+                <a:ea typeface="JetBrains Mono" pitchFamily="34" charset="-122"/>
+                <a:cs typeface="JetBrains Mono" pitchFamily="34" charset="-120"/>
+              </a:rPr>
+              <a:t>$720</a:t>
+            </a:r>
+            <a:endParaRPr lang="en-US" sz="2000" dirty="0"/>
+          </a:p>
+        </p:txBody>
+      </p:sp>
+      <p:sp>
+        <p:nvSpPr>
+          <p:cNvPr id="17" name="Shape 15"/>
+          <p:cNvSpPr/>
+          <p:nvPr/>
+        </p:nvSpPr>
+        <p:spPr>
+          <a:xfrm>
+            <a:off x="594360" y="5852160"/>
+            <a:ext cx="6995160" cy="0"/>
+          </a:xfrm>
+          <a:prstGeom prst="line">
+            <a:avLst/>
+          </a:prstGeom>
+          <a:noFill/>
+          <a:ln w="25400">
             <a:solidFill>
-              <a:srgbClr val="E6E4E0"/>
+              <a:srgbClr val="E84057"/>
             </a:solidFill>
             <a:prstDash val="solid"/>
           </a:ln>
@@ -5337,30 +5395,69 @@
       </p:sp>
       <p:sp>
         <p:nvSpPr>
-          <p:cNvPr id="7" name="Text 5"/>
-          <p:cNvSpPr/>
-          <p:nvPr/>
-        </p:nvSpPr>
-        <p:spPr>
-          <a:xfrm>
-            <a:off x="868680" y="3703320"/>
-            <a:ext cx="3657600" cy="594360"/>
-          </a:xfrm>
-          <a:prstGeom prst="rect">
-            <a:avLst/>
-          </a:prstGeom>
-          <a:noFill/>
-          <a:ln/>
-        </p:spPr>
-        <p:txBody>
-          <a:bodyPr wrap="square" lIns="0" tIns="0" rIns="0" bIns="0" rtlCol="0" anchor="ctr"/>
-          <a:lstStyle/>
-          <a:p>
-            <a:pPr indent="0" marL="0">
-              <a:buNone/>
-            </a:pPr>
-            <a:r>
-              <a:rPr lang="en-US" sz="2600" b="1" i="1" spc="-100" kern="0" dirty="0">
+          <p:cNvPr id="18" name="Text 16"/>
+          <p:cNvSpPr/>
+          <p:nvPr/>
+        </p:nvSpPr>
+        <p:spPr>
+          <a:xfrm>
+            <a:off x="594360" y="5943600"/>
+            <a:ext cx="5943600" cy="457200"/>
+          </a:xfrm>
+          <a:prstGeom prst="rect">
+            <a:avLst/>
+          </a:prstGeom>
+          <a:noFill/>
+          <a:ln/>
+        </p:spPr>
+        <p:txBody>
+          <a:bodyPr wrap="square" lIns="0" tIns="0" rIns="0" bIns="0" rtlCol="0" anchor="ctr"/>
+          <a:lstStyle/>
+          <a:p>
+            <a:pPr indent="0" marL="0">
+              <a:buNone/>
+            </a:pPr>
+            <a:r>
+              <a:rPr lang="en-US" sz="1600" b="1" dirty="0">
+                <a:solidFill>
+                  <a:srgbClr val="0A0A0A"/>
+                </a:solidFill>
+                <a:latin typeface="Inter" pitchFamily="34" charset="0"/>
+                <a:ea typeface="Inter" pitchFamily="34" charset="-122"/>
+                <a:cs typeface="Inter" pitchFamily="34" charset="-120"/>
+              </a:rPr>
+              <a:t>SAM at saturation</a:t>
+            </a:r>
+            <a:endParaRPr lang="en-US" sz="1600" dirty="0"/>
+          </a:p>
+        </p:txBody>
+      </p:sp>
+      <p:sp>
+        <p:nvSpPr>
+          <p:cNvPr id="19" name="Text 17"/>
+          <p:cNvSpPr/>
+          <p:nvPr/>
+        </p:nvSpPr>
+        <p:spPr>
+          <a:xfrm>
+            <a:off x="6217920" y="5897880"/>
+            <a:ext cx="1371600" cy="548640"/>
+          </a:xfrm>
+          <a:prstGeom prst="rect">
+            <a:avLst/>
+          </a:prstGeom>
+          <a:noFill/>
+          <a:ln/>
+        </p:spPr>
+        <p:txBody>
+          <a:bodyPr wrap="square" lIns="0" tIns="0" rIns="0" bIns="0" rtlCol="0" anchor="ctr"/>
+          <a:lstStyle/>
+          <a:p>
+            <a:pPr algn="r" indent="0" marL="0">
+              <a:buNone/>
+            </a:pPr>
+            <a:r>
+              <a:rPr lang="en-US" sz="2800" b="1" i="1" spc="-100" kern="0" dirty="0">
                 <a:solidFill>
                   <a:srgbClr val="E84057"/>
                 </a:solidFill>
@@ -5368,119 +5465,38 @@
                 <a:ea typeface="Fraunces" pitchFamily="34" charset="-122"/>
                 <a:cs typeface="Fraunces" pitchFamily="34" charset="-120"/>
               </a:rPr>
-              <a:t>$9B</a:t>
-            </a:r>
-            <a:endParaRPr lang="en-US" sz="2600" dirty="0"/>
-          </a:p>
-        </p:txBody>
-      </p:sp>
-      <p:sp>
-        <p:nvSpPr>
-          <p:cNvPr id="8" name="Text 6"/>
-          <p:cNvSpPr/>
-          <p:nvPr/>
-        </p:nvSpPr>
-        <p:spPr>
-          <a:xfrm>
-            <a:off x="868680" y="4251960"/>
-            <a:ext cx="4838548" cy="640080"/>
-          </a:xfrm>
-          <a:prstGeom prst="rect">
-            <a:avLst/>
-          </a:prstGeom>
-          <a:noFill/>
-          <a:ln/>
-        </p:spPr>
-        <p:txBody>
-          <a:bodyPr wrap="square" lIns="0" tIns="0" rIns="0" bIns="0" rtlCol="0" anchor="ctr"/>
-          <a:lstStyle/>
-          <a:p>
-            <a:pPr indent="0" marL="0">
-              <a:buNone/>
-            </a:pPr>
-            <a:r>
-              <a:rPr lang="en-US" sz="1200" dirty="0">
-                <a:solidFill>
-                  <a:srgbClr val="1A1A1A"/>
-                </a:solidFill>
-                <a:latin typeface="Inter" pitchFamily="34" charset="0"/>
-                <a:ea typeface="Inter" pitchFamily="34" charset="-122"/>
-                <a:cs typeface="Inter" pitchFamily="34" charset="-120"/>
-              </a:rPr>
-              <a:t>Cursor proves AI-dev-infra is a real market.</a:t>
-            </a:r>
-            <a:endParaRPr lang="en-US" sz="1200" dirty="0"/>
-          </a:p>
-          <a:p>
-            <a:pPr indent="0" marL="0">
-              <a:buNone/>
-            </a:pPr>
-            <a:r>
-              <a:rPr lang="en-US" sz="1200" dirty="0">
-                <a:solidFill>
-                  <a:srgbClr val="1A1A1A"/>
-                </a:solidFill>
-                <a:latin typeface="Inter" pitchFamily="34" charset="0"/>
-                <a:ea typeface="Inter" pitchFamily="34" charset="-122"/>
-                <a:cs typeface="Inter" pitchFamily="34" charset="-120"/>
-              </a:rPr>
-              <a:t>The layer above is the next category.</a:t>
-            </a:r>
-            <a:endParaRPr lang="en-US" sz="1200" dirty="0"/>
-          </a:p>
-        </p:txBody>
-      </p:sp>
-      <p:sp>
-        <p:nvSpPr>
-          <p:cNvPr id="9" name="Shape 7"/>
-          <p:cNvSpPr/>
-          <p:nvPr/>
-        </p:nvSpPr>
-        <p:spPr>
-          <a:xfrm>
-            <a:off x="6210148" y="3520440"/>
-            <a:ext cx="5387188" cy="1417320"/>
-          </a:xfrm>
-          <a:prstGeom prst="rect">
-            <a:avLst/>
-          </a:prstGeom>
-          <a:solidFill>
-            <a:srgbClr val="FFFFFF"/>
-          </a:solidFill>
-          <a:ln w="9525">
-            <a:solidFill>
-              <a:srgbClr val="E6E4E0"/>
-            </a:solidFill>
-            <a:prstDash val="solid"/>
-          </a:ln>
-        </p:spPr>
-      </p:sp>
-      <p:sp>
-        <p:nvSpPr>
-          <p:cNvPr id="10" name="Text 8"/>
-          <p:cNvSpPr/>
-          <p:nvPr/>
-        </p:nvSpPr>
-        <p:spPr>
-          <a:xfrm>
-            <a:off x="6484468" y="3703320"/>
-            <a:ext cx="3657600" cy="594360"/>
-          </a:xfrm>
-          <a:prstGeom prst="rect">
-            <a:avLst/>
-          </a:prstGeom>
-          <a:noFill/>
-          <a:ln/>
-        </p:spPr>
-        <p:txBody>
-          <a:bodyPr wrap="square" lIns="0" tIns="0" rIns="0" bIns="0" rtlCol="0" anchor="ctr"/>
-          <a:lstStyle/>
-          <a:p>
-            <a:pPr indent="0" marL="0">
-              <a:buNone/>
-            </a:pPr>
-            <a:r>
-              <a:rPr lang="en-US" sz="2600" b="1" i="1" spc="-100" kern="0" dirty="0">
+              <a:t>$2.2B</a:t>
+            </a:r>
+            <a:endParaRPr lang="en-US" sz="2800" dirty="0"/>
+          </a:p>
+        </p:txBody>
+      </p:sp>
+      <p:sp>
+        <p:nvSpPr>
+          <p:cNvPr id="20" name="Text 18"/>
+          <p:cNvSpPr/>
+          <p:nvPr/>
+        </p:nvSpPr>
+        <p:spPr>
+          <a:xfrm>
+            <a:off x="8229600" y="3703320"/>
+            <a:ext cx="3367735" cy="1188720"/>
+          </a:xfrm>
+          <a:prstGeom prst="rect">
+            <a:avLst/>
+          </a:prstGeom>
+          <a:noFill/>
+          <a:ln/>
+        </p:spPr>
+        <p:txBody>
+          <a:bodyPr wrap="square" lIns="0" tIns="0" rIns="0" bIns="0" rtlCol="0" anchor="ctr"/>
+          <a:lstStyle/>
+          <a:p>
+            <a:pPr algn="l" indent="0" marL="0">
+              <a:buNone/>
+            </a:pPr>
+            <a:r>
+              <a:rPr lang="en-US" sz="8800" b="1" i="1" spc="-300" kern="0" dirty="0">
                 <a:solidFill>
                   <a:srgbClr val="E84057"/>
                 </a:solidFill>
@@ -5488,22 +5504,22 @@
                 <a:ea typeface="Fraunces" pitchFamily="34" charset="-122"/>
                 <a:cs typeface="Fraunces" pitchFamily="34" charset="-120"/>
               </a:rPr>
-              <a:t>Mar '26</a:t>
-            </a:r>
-            <a:endParaRPr lang="en-US" sz="2600" dirty="0"/>
-          </a:p>
-        </p:txBody>
-      </p:sp>
-      <p:sp>
-        <p:nvSpPr>
-          <p:cNvPr id="11" name="Text 9"/>
-          <p:cNvSpPr/>
-          <p:nvPr/>
-        </p:nvSpPr>
-        <p:spPr>
-          <a:xfrm>
-            <a:off x="6484468" y="4251960"/>
-            <a:ext cx="4838548" cy="640080"/>
+              <a:t>$2.2B</a:t>
+            </a:r>
+            <a:endParaRPr lang="en-US" sz="8800" dirty="0"/>
+          </a:p>
+        </p:txBody>
+      </p:sp>
+      <p:sp>
+        <p:nvSpPr>
+          <p:cNvPr id="21" name="Text 19"/>
+          <p:cNvSpPr/>
+          <p:nvPr/>
+        </p:nvSpPr>
+        <p:spPr>
+          <a:xfrm>
+            <a:off x="8229600" y="4937760"/>
+            <a:ext cx="3367735" cy="320040"/>
           </a:xfrm>
           <a:prstGeom prst="rect">
             <a:avLst/>
@@ -5521,270 +5537,66 @@
             <a:r>
               <a:rPr lang="en-US" sz="1200" dirty="0">
                 <a:solidFill>
-                  <a:srgbClr val="1A1A1A"/>
-                </a:solidFill>
-                <a:latin typeface="Inter" pitchFamily="34" charset="0"/>
-                <a:ea typeface="Inter" pitchFamily="34" charset="-122"/>
-                <a:cs typeface="Inter" pitchFamily="34" charset="-120"/>
-              </a:rPr>
-              <a:t>SlopCodeBench + AI-debt papers shipped.</a:t>
+                  <a:srgbClr val="707070"/>
+                </a:solidFill>
+                <a:latin typeface="JetBrains Mono" pitchFamily="34" charset="0"/>
+                <a:ea typeface="JetBrains Mono" pitchFamily="34" charset="-122"/>
+                <a:cs typeface="JetBrains Mono" pitchFamily="34" charset="-120"/>
+              </a:rPr>
+              <a:t>at saturation, B2B SaaS only</a:t>
             </a:r>
             <a:endParaRPr lang="en-US" sz="1200" dirty="0"/>
           </a:p>
-          <a:p>
+        </p:txBody>
+      </p:sp>
+      <p:sp>
+        <p:nvSpPr>
+          <p:cNvPr id="22" name="Text 20"/>
+          <p:cNvSpPr/>
+          <p:nvPr/>
+        </p:nvSpPr>
+        <p:spPr>
+          <a:xfrm>
+            <a:off x="8229600" y="5394960"/>
+            <a:ext cx="3367735" cy="1188720"/>
+          </a:xfrm>
+          <a:prstGeom prst="rect">
+            <a:avLst/>
+          </a:prstGeom>
+          <a:noFill/>
+          <a:ln/>
+        </p:spPr>
+        <p:txBody>
+          <a:bodyPr wrap="square" lIns="0" tIns="0" rIns="0" bIns="0" rtlCol="0" anchor="ctr"/>
+          <a:lstStyle/>
+          <a:p>
+            <a:pPr indent="0" marL="0">
+              <a:buNone/>
+            </a:pPr>
+            <a:r>
+              <a:rPr lang="en-US" sz="1200" b="1" dirty="0">
+                <a:solidFill>
+                  <a:srgbClr val="0A0A0A"/>
+                </a:solidFill>
+                <a:latin typeface="Inter" pitchFamily="34" charset="0"/>
+                <a:ea typeface="Inter" pitchFamily="34" charset="-122"/>
+                <a:cs typeface="Inter" pitchFamily="34" charset="-120"/>
+              </a:rPr>
+              <a:t>+ $5B adjacent: </a:t>
+            </a:r>
             <a:pPr indent="0" marL="0">
               <a:buNone/>
             </a:pPr>
             <a:r>
               <a:rPr lang="en-US" sz="1200" dirty="0">
                 <a:solidFill>
-                  <a:srgbClr val="1A1A1A"/>
-                </a:solidFill>
-                <a:latin typeface="Inter" pitchFamily="34" charset="0"/>
-                <a:ea typeface="Inter" pitchFamily="34" charset="-122"/>
-                <a:cs typeface="Inter" pitchFamily="34" charset="-120"/>
-              </a:rPr>
-              <a:t>Drift quantified for the first time.</a:t>
-            </a:r>
-            <a:endParaRPr lang="en-US" sz="1200" dirty="0"/>
-          </a:p>
-        </p:txBody>
-      </p:sp>
-      <p:sp>
-        <p:nvSpPr>
-          <p:cNvPr id="12" name="Shape 10"/>
-          <p:cNvSpPr/>
-          <p:nvPr/>
-        </p:nvSpPr>
-        <p:spPr>
-          <a:xfrm>
-            <a:off x="594360" y="5166360"/>
-            <a:ext cx="5387188" cy="1417320"/>
-          </a:xfrm>
-          <a:prstGeom prst="rect">
-            <a:avLst/>
-          </a:prstGeom>
-          <a:solidFill>
-            <a:srgbClr val="FFFFFF"/>
-          </a:solidFill>
-          <a:ln w="9525">
-            <a:solidFill>
-              <a:srgbClr val="E6E4E0"/>
-            </a:solidFill>
-            <a:prstDash val="solid"/>
-          </a:ln>
-        </p:spPr>
-      </p:sp>
-      <p:sp>
-        <p:nvSpPr>
-          <p:cNvPr id="13" name="Text 11"/>
-          <p:cNvSpPr/>
-          <p:nvPr/>
-        </p:nvSpPr>
-        <p:spPr>
-          <a:xfrm>
-            <a:off x="868680" y="5349240"/>
-            <a:ext cx="3657600" cy="594360"/>
-          </a:xfrm>
-          <a:prstGeom prst="rect">
-            <a:avLst/>
-          </a:prstGeom>
-          <a:noFill/>
-          <a:ln/>
-        </p:spPr>
-        <p:txBody>
-          <a:bodyPr wrap="square" lIns="0" tIns="0" rIns="0" bIns="0" rtlCol="0" anchor="ctr"/>
-          <a:lstStyle/>
-          <a:p>
-            <a:pPr indent="0" marL="0">
-              <a:buNone/>
-            </a:pPr>
-            <a:r>
-              <a:rPr lang="en-US" sz="2600" b="1" i="1" spc="-100" kern="0" dirty="0">
-                <a:solidFill>
-                  <a:srgbClr val="E84057"/>
-                </a:solidFill>
-                <a:latin typeface="Fraunces" pitchFamily="34" charset="0"/>
-                <a:ea typeface="Fraunces" pitchFamily="34" charset="-122"/>
-                <a:cs typeface="Fraunces" pitchFamily="34" charset="-120"/>
-              </a:rPr>
-              <a:t>GPT-5</a:t>
-            </a:r>
-            <a:endParaRPr lang="en-US" sz="2600" dirty="0"/>
-          </a:p>
-        </p:txBody>
-      </p:sp>
-      <p:sp>
-        <p:nvSpPr>
-          <p:cNvPr id="14" name="Text 12"/>
-          <p:cNvSpPr/>
-          <p:nvPr/>
-        </p:nvSpPr>
-        <p:spPr>
-          <a:xfrm>
-            <a:off x="868680" y="5897880"/>
-            <a:ext cx="4838548" cy="640080"/>
-          </a:xfrm>
-          <a:prstGeom prst="rect">
-            <a:avLst/>
-          </a:prstGeom>
-          <a:noFill/>
-          <a:ln/>
-        </p:spPr>
-        <p:txBody>
-          <a:bodyPr wrap="square" lIns="0" tIns="0" rIns="0" bIns="0" rtlCol="0" anchor="ctr"/>
-          <a:lstStyle/>
-          <a:p>
-            <a:pPr indent="0" marL="0">
-              <a:buNone/>
-            </a:pPr>
-            <a:r>
-              <a:rPr lang="en-US" sz="1200" dirty="0">
-                <a:solidFill>
-                  <a:srgbClr val="1A1A1A"/>
-                </a:solidFill>
-                <a:latin typeface="Inter" pitchFamily="34" charset="0"/>
-                <a:ea typeface="Inter" pitchFamily="34" charset="-122"/>
-                <a:cs typeface="Inter" pitchFamily="34" charset="-120"/>
-              </a:rPr>
-              <a:t>Frontier models finally reliable for deterministic regen.</a:t>
-            </a:r>
-            <a:endParaRPr lang="en-US" sz="1200" dirty="0"/>
-          </a:p>
-          <a:p>
-            <a:pPr indent="0" marL="0">
-              <a:buNone/>
-            </a:pPr>
-            <a:r>
-              <a:rPr lang="en-US" sz="1200" dirty="0">
-                <a:solidFill>
-                  <a:srgbClr val="1A1A1A"/>
-                </a:solidFill>
-                <a:latin typeface="Inter" pitchFamily="34" charset="0"/>
-                <a:ea typeface="Inter" pitchFamily="34" charset="-122"/>
-                <a:cs typeface="Inter" pitchFamily="34" charset="-120"/>
-              </a:rPr>
-              <a:t>Same prompt, same output, every cycle.</a:t>
-            </a:r>
-            <a:endParaRPr lang="en-US" sz="1200" dirty="0"/>
-          </a:p>
-        </p:txBody>
-      </p:sp>
-      <p:sp>
-        <p:nvSpPr>
-          <p:cNvPr id="15" name="Shape 13"/>
-          <p:cNvSpPr/>
-          <p:nvPr/>
-        </p:nvSpPr>
-        <p:spPr>
-          <a:xfrm>
-            <a:off x="6210148" y="5166360"/>
-            <a:ext cx="5387188" cy="1417320"/>
-          </a:xfrm>
-          <a:prstGeom prst="rect">
-            <a:avLst/>
-          </a:prstGeom>
-          <a:solidFill>
-            <a:srgbClr val="FFFFFF"/>
-          </a:solidFill>
-          <a:ln w="9525">
-            <a:solidFill>
-              <a:srgbClr val="E6E4E0"/>
-            </a:solidFill>
-            <a:prstDash val="solid"/>
-          </a:ln>
-        </p:spPr>
-      </p:sp>
-      <p:sp>
-        <p:nvSpPr>
-          <p:cNvPr id="16" name="Text 14"/>
-          <p:cNvSpPr/>
-          <p:nvPr/>
-        </p:nvSpPr>
-        <p:spPr>
-          <a:xfrm>
-            <a:off x="6484468" y="5349240"/>
-            <a:ext cx="3657600" cy="594360"/>
-          </a:xfrm>
-          <a:prstGeom prst="rect">
-            <a:avLst/>
-          </a:prstGeom>
-          <a:noFill/>
-          <a:ln/>
-        </p:spPr>
-        <p:txBody>
-          <a:bodyPr wrap="square" lIns="0" tIns="0" rIns="0" bIns="0" rtlCol="0" anchor="ctr"/>
-          <a:lstStyle/>
-          <a:p>
-            <a:pPr indent="0" marL="0">
-              <a:buNone/>
-            </a:pPr>
-            <a:r>
-              <a:rPr lang="en-US" sz="2600" b="1" i="1" spc="-100" kern="0" dirty="0">
-                <a:solidFill>
-                  <a:srgbClr val="E84057"/>
-                </a:solidFill>
-                <a:latin typeface="Fraunces" pitchFamily="34" charset="0"/>
-                <a:ea typeface="Fraunces" pitchFamily="34" charset="-122"/>
-                <a:cs typeface="Fraunces" pitchFamily="34" charset="-120"/>
-              </a:rPr>
-              <a:t>60% / 0–20%</a:t>
-            </a:r>
-            <a:endParaRPr lang="en-US" sz="2600" dirty="0"/>
-          </a:p>
-        </p:txBody>
-      </p:sp>
-      <p:sp>
-        <p:nvSpPr>
-          <p:cNvPr id="17" name="Text 15"/>
-          <p:cNvSpPr/>
-          <p:nvPr/>
-        </p:nvSpPr>
-        <p:spPr>
-          <a:xfrm>
-            <a:off x="6484468" y="5897880"/>
-            <a:ext cx="4838548" cy="640080"/>
-          </a:xfrm>
-          <a:prstGeom prst="rect">
-            <a:avLst/>
-          </a:prstGeom>
-          <a:noFill/>
-          <a:ln/>
-        </p:spPr>
-        <p:txBody>
-          <a:bodyPr wrap="square" lIns="0" tIns="0" rIns="0" bIns="0" rtlCol="0" anchor="ctr"/>
-          <a:lstStyle/>
-          <a:p>
-            <a:pPr indent="0" marL="0">
-              <a:buNone/>
-            </a:pPr>
-            <a:r>
-              <a:rPr lang="en-US" sz="1200" dirty="0">
-                <a:solidFill>
-                  <a:srgbClr val="1A1A1A"/>
-                </a:solidFill>
-                <a:latin typeface="Inter" pitchFamily="34" charset="0"/>
-                <a:ea typeface="Inter" pitchFamily="34" charset="-122"/>
-                <a:cs typeface="Inter" pitchFamily="34" charset="-120"/>
-              </a:rPr>
-              <a:t>Devs use AI in 60% of work; can fully delegate 0–20%.</a:t>
-            </a:r>
-            <a:endParaRPr lang="en-US" sz="1200" dirty="0"/>
-          </a:p>
-          <a:p>
-            <a:pPr indent="0" marL="0">
-              <a:buNone/>
-            </a:pPr>
-            <a:r>
-              <a:rPr lang="en-US" sz="1200" dirty="0">
-                <a:solidFill>
-                  <a:srgbClr val="1A1A1A"/>
-                </a:solidFill>
-                <a:latin typeface="Inter" pitchFamily="34" charset="0"/>
-                <a:ea typeface="Inter" pitchFamily="34" charset="-122"/>
-                <a:cs typeface="Inter" pitchFamily="34" charset="-120"/>
-              </a:rPr>
-              <a:t>Governance is the new bottleneck.</a:t>
+                  <a:srgbClr val="3A3A3A"/>
+                </a:solidFill>
+                <a:latin typeface="Inter" pitchFamily="34" charset="0"/>
+                <a:ea typeface="Inter" pitchFamily="34" charset="-122"/>
+                <a:cs typeface="Inter" pitchFamily="34" charset="-120"/>
+              </a:rPr>
+              <a:t>methodology consulting, contract pattern marketplaces, audit + compliance bundles, training.</a:t>
             </a:r>
             <a:endParaRPr lang="en-US" sz="1200" dirty="0"/>
           </a:p>
@@ -5894,7 +5706,7 @@
                 <a:ea typeface="JetBrains Mono" pitchFamily="34" charset="-122"/>
                 <a:cs typeface="JetBrains Mono" pitchFamily="34" charset="-120"/>
               </a:rPr>
-              <a:t>INSIGHT</a:t>
+              <a:t>COMPETITION</a:t>
             </a:r>
             <a:endParaRPr lang="en-US" sz="1000" dirty="0"/>
           </a:p>
@@ -6450,7 +6262,7 @@
                 <a:ea typeface="JetBrains Mono" pitchFamily="34" charset="-122"/>
                 <a:cs typeface="JetBrains Mono" pitchFamily="34" charset="-120"/>
               </a:rPr>
-              <a:t>BUSINESS MODEL</a:t>
+              <a:t>PRODUCT</a:t>
             </a:r>
             <a:endParaRPr lang="en-US" sz="1000" dirty="0"/>
           </a:p>
@@ -6481,7 +6293,7 @@
               <a:buNone/>
             </a:pPr>
             <a:r>
-              <a:rPr lang="en-US" sz="5600" b="1" spc="-200" kern="0" dirty="0">
+              <a:rPr lang="en-US" sz="6400" b="1" spc="-200" kern="0" dirty="0">
                 <a:solidFill>
                   <a:srgbClr val="0A0A0A"/>
                 </a:solidFill>
@@ -6489,9 +6301,9 @@
                 <a:ea typeface="Inter" pitchFamily="34" charset="-122"/>
                 <a:cs typeface="Inter" pitchFamily="34" charset="-120"/>
               </a:rPr>
-              <a:t>Open core. Tiered SaaS.</a:t>
-            </a:r>
-            <a:endParaRPr lang="en-US" sz="5600" dirty="0"/>
+              <a:t>The contract layer.</a:t>
+            </a:r>
+            <a:endParaRPr lang="en-US" sz="6400" dirty="0"/>
           </a:p>
         </p:txBody>
       </p:sp>
@@ -6520,7 +6332,7 @@
               <a:buNone/>
             </a:pPr>
             <a:r>
-              <a:rPr lang="en-US" sz="1500" dirty="0">
+              <a:rPr lang="en-US" sz="1600" dirty="0">
                 <a:solidFill>
                   <a:srgbClr val="3A3A3A"/>
                 </a:solidFill>
@@ -6528,9 +6340,9 @@
                 <a:ea typeface="Inter" pitchFamily="34" charset="-122"/>
                 <a:cs typeface="Inter" pitchFamily="34" charset="-120"/>
               </a:rPr>
-              <a:t>MIT-licensed methodology + Skill pulls developers in (PLG, Cursor's pattern). Paid tiers capture engineering teams that need audit, telemetry, compliance.</a:t>
-            </a:r>
-            <a:endParaRPr lang="en-US" sz="1500" dirty="0"/>
+              <a:t>Methodology + Skill + deterministic engine. Ships as a Claude Code / Codex Skill. Open source under MIT.</a:t>
+            </a:r>
+            <a:endParaRPr lang="en-US" sz="1600" dirty="0"/>
           </a:p>
         </p:txBody>
       </p:sp>
@@ -6543,7 +6355,7 @@
         <p:spPr>
           <a:xfrm>
             <a:off x="594360" y="3108960"/>
-            <a:ext cx="3515258" cy="2926080"/>
+            <a:ext cx="2579294" cy="1463040"/>
           </a:xfrm>
           <a:prstGeom prst="rect">
             <a:avLst/>
@@ -6561,132 +6373,99 @@
       </p:sp>
       <p:sp>
         <p:nvSpPr>
-          <p:cNvPr id="7" name="Text 5"/>
-          <p:cNvSpPr/>
-          <p:nvPr/>
-        </p:nvSpPr>
-        <p:spPr>
-          <a:xfrm>
-            <a:off x="914400" y="3383280"/>
-            <a:ext cx="2875178" cy="274320"/>
-          </a:xfrm>
-          <a:prstGeom prst="rect">
-            <a:avLst/>
-          </a:prstGeom>
-          <a:noFill/>
-          <a:ln/>
-        </p:spPr>
-        <p:txBody>
-          <a:bodyPr wrap="square" lIns="0" tIns="0" rIns="0" bIns="0" rtlCol="0" anchor="ctr"/>
-          <a:lstStyle/>
-          <a:p>
-            <a:pPr indent="0" marL="0">
-              <a:buNone/>
-            </a:pPr>
-            <a:r>
-              <a:rPr lang="en-US" sz="900" b="1" spc="100" kern="0" dirty="0">
-                <a:solidFill>
-                  <a:srgbClr val="5A5A5A"/>
+          <p:cNvPr id="7" name="Shape 5"/>
+          <p:cNvSpPr/>
+          <p:nvPr/>
+        </p:nvSpPr>
+        <p:spPr>
+          <a:xfrm>
+            <a:off x="594360" y="3108960"/>
+            <a:ext cx="36576" cy="1463040"/>
+          </a:xfrm>
+          <a:prstGeom prst="rect">
+            <a:avLst/>
+          </a:prstGeom>
+          <a:solidFill>
+            <a:srgbClr val="E84057"/>
+          </a:solidFill>
+          <a:ln/>
+        </p:spPr>
+      </p:sp>
+      <p:sp>
+        <p:nvSpPr>
+          <p:cNvPr id="8" name="Text 6"/>
+          <p:cNvSpPr/>
+          <p:nvPr/>
+        </p:nvSpPr>
+        <p:spPr>
+          <a:xfrm>
+            <a:off x="822960" y="3291840"/>
+            <a:ext cx="457200" cy="457200"/>
+          </a:xfrm>
+          <a:prstGeom prst="rect">
+            <a:avLst/>
+          </a:prstGeom>
+          <a:noFill/>
+          <a:ln/>
+        </p:spPr>
+        <p:txBody>
+          <a:bodyPr wrap="square" lIns="0" tIns="0" rIns="0" bIns="0" rtlCol="0" anchor="ctr"/>
+          <a:lstStyle/>
+          <a:p>
+            <a:pPr indent="0" marL="0">
+              <a:buNone/>
+            </a:pPr>
+            <a:r>
+              <a:rPr lang="en-US" sz="2800" b="1" i="1" dirty="0">
+                <a:solidFill>
+                  <a:srgbClr val="E84057"/>
+                </a:solidFill>
+                <a:latin typeface="Fraunces" pitchFamily="34" charset="0"/>
+                <a:ea typeface="Fraunces" pitchFamily="34" charset="-122"/>
+                <a:cs typeface="Fraunces" pitchFamily="34" charset="-120"/>
+              </a:rPr>
+              <a:t>1</a:t>
+            </a:r>
+            <a:endParaRPr lang="en-US" sz="2800" dirty="0"/>
+          </a:p>
+        </p:txBody>
+      </p:sp>
+      <p:sp>
+        <p:nvSpPr>
+          <p:cNvPr id="9" name="Text 7"/>
+          <p:cNvSpPr/>
+          <p:nvPr/>
+        </p:nvSpPr>
+        <p:spPr>
+          <a:xfrm>
+            <a:off x="1371600" y="3355848"/>
+            <a:ext cx="1664894" cy="365760"/>
+          </a:xfrm>
+          <a:prstGeom prst="rect">
+            <a:avLst/>
+          </a:prstGeom>
+          <a:noFill/>
+          <a:ln/>
+        </p:spPr>
+        <p:txBody>
+          <a:bodyPr wrap="square" lIns="0" tIns="0" rIns="0" bIns="0" rtlCol="0" anchor="ctr"/>
+          <a:lstStyle/>
+          <a:p>
+            <a:pPr indent="0" marL="0">
+              <a:buNone/>
+            </a:pPr>
+            <a:r>
+              <a:rPr lang="en-US" sz="1400" b="1" spc="-30" kern="0" dirty="0">
+                <a:solidFill>
+                  <a:srgbClr val="0A0A0A"/>
                 </a:solidFill>
                 <a:latin typeface="JetBrains Mono" pitchFamily="34" charset="0"/>
                 <a:ea typeface="JetBrains Mono" pitchFamily="34" charset="-122"/>
                 <a:cs typeface="JetBrains Mono" pitchFamily="34" charset="-120"/>
               </a:rPr>
-              <a:t>FREE</a:t>
-            </a:r>
-            <a:endParaRPr lang="en-US" sz="900" dirty="0"/>
-          </a:p>
-        </p:txBody>
-      </p:sp>
-      <p:sp>
-        <p:nvSpPr>
-          <p:cNvPr id="8" name="Text 6"/>
-          <p:cNvSpPr/>
-          <p:nvPr/>
-        </p:nvSpPr>
-        <p:spPr>
-          <a:xfrm>
-            <a:off x="914400" y="3749040"/>
-            <a:ext cx="2875178" cy="640080"/>
-          </a:xfrm>
-          <a:prstGeom prst="rect">
-            <a:avLst/>
-          </a:prstGeom>
-          <a:noFill/>
-          <a:ln/>
-        </p:spPr>
-        <p:txBody>
-          <a:bodyPr wrap="square" lIns="0" tIns="0" rIns="0" bIns="0" rtlCol="0" anchor="ctr"/>
-          <a:lstStyle/>
-          <a:p>
-            <a:pPr indent="0" marL="0">
-              <a:buNone/>
-            </a:pPr>
-            <a:r>
-              <a:rPr lang="en-US" sz="3600" b="1" i="1" dirty="0">
-                <a:solidFill>
-                  <a:srgbClr val="0A0A0A"/>
-                </a:solidFill>
-                <a:latin typeface="Fraunces" pitchFamily="34" charset="0"/>
-                <a:ea typeface="Fraunces" pitchFamily="34" charset="-122"/>
-                <a:cs typeface="Fraunces" pitchFamily="34" charset="-120"/>
-              </a:rPr>
-              <a:t>$0</a:t>
-            </a:r>
-            <a:pPr indent="0" marL="0">
-              <a:buNone/>
-            </a:pPr>
-            <a:r>
-              <a:rPr lang="en-US" sz="1100" dirty="0">
-                <a:solidFill>
-                  <a:srgbClr val="5A5A5A"/>
-                </a:solidFill>
-                <a:latin typeface="Inter" pitchFamily="34" charset="0"/>
-                <a:ea typeface="Inter" pitchFamily="34" charset="-122"/>
-                <a:cs typeface="Inter" pitchFamily="34" charset="-120"/>
-              </a:rPr>
-              <a:t>  MIT-licensed</a:t>
-            </a:r>
-            <a:endParaRPr lang="en-US" sz="3600" dirty="0"/>
-          </a:p>
-        </p:txBody>
-      </p:sp>
-      <p:sp>
-        <p:nvSpPr>
-          <p:cNvPr id="9" name="Text 7"/>
-          <p:cNvSpPr/>
-          <p:nvPr/>
-        </p:nvSpPr>
-        <p:spPr>
-          <a:xfrm>
-            <a:off x="914400" y="4526280"/>
-            <a:ext cx="2875178" cy="365760"/>
-          </a:xfrm>
-          <a:prstGeom prst="rect">
-            <a:avLst/>
-          </a:prstGeom>
-          <a:noFill/>
-          <a:ln/>
-        </p:spPr>
-        <p:txBody>
-          <a:bodyPr wrap="square" lIns="0" tIns="0" rIns="0" bIns="0" rtlCol="0" anchor="ctr"/>
-          <a:lstStyle/>
-          <a:p>
-            <a:pPr indent="0" marL="0">
-              <a:buNone/>
-            </a:pPr>
-            <a:r>
-              <a:rPr lang="en-US" sz="1300" b="1" dirty="0">
-                <a:solidFill>
-                  <a:srgbClr val="1A1A1A"/>
-                </a:solidFill>
-                <a:latin typeface="Inter" pitchFamily="34" charset="0"/>
-                <a:ea typeface="Inter" pitchFamily="34" charset="-122"/>
-                <a:cs typeface="Inter" pitchFamily="34" charset="-120"/>
-              </a:rPr>
-              <a:t>Solo devs, OSS, hobbyists</a:t>
-            </a:r>
-            <a:endParaRPr lang="en-US" sz="1300" dirty="0"/>
+              <a:t>intent.md</a:t>
+            </a:r>
+            <a:endParaRPr lang="en-US" sz="1400" dirty="0"/>
           </a:p>
         </p:txBody>
       </p:sp>
@@ -6698,28 +6477,24 @@
         </p:nvSpPr>
         <p:spPr>
           <a:xfrm>
-            <a:off x="914400" y="4983480"/>
-            <a:ext cx="2875178" cy="914400"/>
-          </a:xfrm>
-          <a:prstGeom prst="rect">
-            <a:avLst/>
-          </a:prstGeom>
-          <a:noFill/>
-          <a:ln/>
-        </p:spPr>
-        <p:txBody>
-          <a:bodyPr wrap="square" lIns="0" tIns="0" rIns="0" bIns="0" rtlCol="0" anchor="ctr"/>
-          <a:lstStyle/>
-          <a:p>
-            <a:pPr marL="342900" indent="-342900">
-              <a:spcAft>
-                <a:spcPts val="400"/>
-              </a:spcAft>
-              <a:buSzPct val="100000"/>
-              <a:buChar char="→"/>
-            </a:pPr>
-            <a:r>
-              <a:rPr lang="en-US" sz="1100" dirty="0">
+            <a:off x="822960" y="3886200"/>
+            <a:ext cx="2122094" cy="548640"/>
+          </a:xfrm>
+          <a:prstGeom prst="rect">
+            <a:avLst/>
+          </a:prstGeom>
+          <a:noFill/>
+          <a:ln/>
+        </p:spPr>
+        <p:txBody>
+          <a:bodyPr wrap="square" lIns="0" tIns="0" rIns="0" bIns="0" rtlCol="0" anchor="ctr"/>
+          <a:lstStyle/>
+          <a:p>
+            <a:pPr indent="0" marL="0">
+              <a:buNone/>
+            </a:pPr>
+            <a:r>
+              <a:rPr lang="en-US" sz="1200" dirty="0">
                 <a:solidFill>
                   <a:srgbClr val="3A3A3A"/>
                 </a:solidFill>
@@ -6727,72 +6502,9 @@
                 <a:ea typeface="Inter" pitchFamily="34" charset="-122"/>
                 <a:cs typeface="Inter" pitchFamily="34" charset="-120"/>
               </a:rPr>
-              <a:t>vibe + pm modes</a:t>
-            </a:r>
-            <a:endParaRPr lang="en-US" sz="1100" dirty="0"/>
-          </a:p>
-          <a:p>
-            <a:pPr marL="342900" indent="-342900">
-              <a:spcAft>
-                <a:spcPts val="400"/>
-              </a:spcAft>
-              <a:buSzPct val="100000"/>
-              <a:buChar char="→"/>
-            </a:pPr>
-            <a:r>
-              <a:rPr lang="en-US" sz="1100" dirty="0">
-                <a:solidFill>
-                  <a:srgbClr val="3A3A3A"/>
-                </a:solidFill>
-                <a:latin typeface="Inter" pitchFamily="34" charset="0"/>
-                <a:ea typeface="Inter" pitchFamily="34" charset="-122"/>
-                <a:cs typeface="Inter" pitchFamily="34" charset="-120"/>
-              </a:rPr>
-              <a:t>Methodology + Skill</a:t>
-            </a:r>
-            <a:endParaRPr lang="en-US" sz="1100" dirty="0"/>
-          </a:p>
-          <a:p>
-            <a:pPr marL="342900" indent="-342900">
-              <a:spcAft>
-                <a:spcPts val="400"/>
-              </a:spcAft>
-              <a:buSzPct val="100000"/>
-              <a:buChar char="→"/>
-            </a:pPr>
-            <a:r>
-              <a:rPr lang="en-US" sz="1100" dirty="0">
-                <a:solidFill>
-                  <a:srgbClr val="3A3A3A"/>
-                </a:solidFill>
-                <a:latin typeface="Inter" pitchFamily="34" charset="0"/>
-                <a:ea typeface="Inter" pitchFamily="34" charset="-122"/>
-                <a:cs typeface="Inter" pitchFamily="34" charset="-120"/>
-              </a:rPr>
-              <a:t>Self-hosted engine</a:t>
-            </a:r>
-            <a:endParaRPr lang="en-US" sz="1100" dirty="0"/>
-          </a:p>
-          <a:p>
-            <a:pPr marL="342900" indent="-342900">
-              <a:spcAft>
-                <a:spcPts val="400"/>
-              </a:spcAft>
-              <a:buSzPct val="100000"/>
-              <a:buChar char="→"/>
-            </a:pPr>
-            <a:r>
-              <a:rPr lang="en-US" sz="1100" dirty="0">
-                <a:solidFill>
-                  <a:srgbClr val="3A3A3A"/>
-                </a:solidFill>
-                <a:latin typeface="Inter" pitchFamily="34" charset="0"/>
-                <a:ea typeface="Inter" pitchFamily="34" charset="-122"/>
-                <a:cs typeface="Inter" pitchFamily="34" charset="-120"/>
-              </a:rPr>
-              <a:t>100 generations / mo</a:t>
-            </a:r>
-            <a:endParaRPr lang="en-US" sz="1100" dirty="0"/>
+              <a:t>User edits intent + approves</a:t>
+            </a:r>
+            <a:endParaRPr lang="en-US" sz="1200" dirty="0"/>
           </a:p>
         </p:txBody>
       </p:sp>
@@ -6804,290 +6516,8 @@
         </p:nvSpPr>
         <p:spPr>
           <a:xfrm>
-            <a:off x="4338218" y="3108960"/>
-            <a:ext cx="3515258" cy="2926080"/>
-          </a:xfrm>
-          <a:prstGeom prst="rect">
-            <a:avLst/>
-          </a:prstGeom>
-          <a:solidFill>
-            <a:srgbClr val="FBE6EA"/>
-          </a:solidFill>
-          <a:ln w="12700">
-            <a:solidFill>
-              <a:srgbClr val="E84057"/>
-            </a:solidFill>
-            <a:prstDash val="solid"/>
-          </a:ln>
-        </p:spPr>
-      </p:sp>
-      <p:sp>
-        <p:nvSpPr>
-          <p:cNvPr id="12" name="Shape 10"/>
-          <p:cNvSpPr/>
-          <p:nvPr/>
-        </p:nvSpPr>
-        <p:spPr>
-          <a:xfrm>
-            <a:off x="4338218" y="3108960"/>
-            <a:ext cx="54864" cy="2926080"/>
-          </a:xfrm>
-          <a:prstGeom prst="rect">
-            <a:avLst/>
-          </a:prstGeom>
-          <a:solidFill>
-            <a:srgbClr val="E84057"/>
-          </a:solidFill>
-          <a:ln/>
-        </p:spPr>
-      </p:sp>
-      <p:sp>
-        <p:nvSpPr>
-          <p:cNvPr id="13" name="Text 11"/>
-          <p:cNvSpPr/>
-          <p:nvPr/>
-        </p:nvSpPr>
-        <p:spPr>
-          <a:xfrm>
-            <a:off x="4658258" y="3383280"/>
-            <a:ext cx="2875178" cy="274320"/>
-          </a:xfrm>
-          <a:prstGeom prst="rect">
-            <a:avLst/>
-          </a:prstGeom>
-          <a:noFill/>
-          <a:ln/>
-        </p:spPr>
-        <p:txBody>
-          <a:bodyPr wrap="square" lIns="0" tIns="0" rIns="0" bIns="0" rtlCol="0" anchor="ctr"/>
-          <a:lstStyle/>
-          <a:p>
-            <a:pPr indent="0" marL="0">
-              <a:buNone/>
-            </a:pPr>
-            <a:r>
-              <a:rPr lang="en-US" sz="900" b="1" spc="100" kern="0" dirty="0">
-                <a:solidFill>
-                  <a:srgbClr val="C43A50"/>
-                </a:solidFill>
-                <a:latin typeface="JetBrains Mono" pitchFamily="34" charset="0"/>
-                <a:ea typeface="JetBrains Mono" pitchFamily="34" charset="-122"/>
-                <a:cs typeface="JetBrains Mono" pitchFamily="34" charset="-120"/>
-              </a:rPr>
-              <a:t>TEAM · RECOMMENDED</a:t>
-            </a:r>
-            <a:endParaRPr lang="en-US" sz="900" dirty="0"/>
-          </a:p>
-        </p:txBody>
-      </p:sp>
-      <p:sp>
-        <p:nvSpPr>
-          <p:cNvPr id="14" name="Text 12"/>
-          <p:cNvSpPr/>
-          <p:nvPr/>
-        </p:nvSpPr>
-        <p:spPr>
-          <a:xfrm>
-            <a:off x="4658258" y="3749040"/>
-            <a:ext cx="2875178" cy="640080"/>
-          </a:xfrm>
-          <a:prstGeom prst="rect">
-            <a:avLst/>
-          </a:prstGeom>
-          <a:noFill/>
-          <a:ln/>
-        </p:spPr>
-        <p:txBody>
-          <a:bodyPr wrap="square" lIns="0" tIns="0" rIns="0" bIns="0" rtlCol="0" anchor="ctr"/>
-          <a:lstStyle/>
-          <a:p>
-            <a:pPr indent="0" marL="0">
-              <a:buNone/>
-            </a:pPr>
-            <a:r>
-              <a:rPr lang="en-US" sz="3600" b="1" i="1" dirty="0">
-                <a:solidFill>
-                  <a:srgbClr val="C43A50"/>
-                </a:solidFill>
-                <a:latin typeface="Fraunces" pitchFamily="34" charset="0"/>
-                <a:ea typeface="Fraunces" pitchFamily="34" charset="-122"/>
-                <a:cs typeface="Fraunces" pitchFamily="34" charset="-120"/>
-              </a:rPr>
-              <a:t>$30</a:t>
-            </a:r>
-            <a:pPr indent="0" marL="0">
-              <a:buNone/>
-            </a:pPr>
-            <a:r>
-              <a:rPr lang="en-US" sz="1100" dirty="0">
-                <a:solidFill>
-                  <a:srgbClr val="5A5A5A"/>
-                </a:solidFill>
-                <a:latin typeface="Inter" pitchFamily="34" charset="0"/>
-                <a:ea typeface="Inter" pitchFamily="34" charset="-122"/>
-                <a:cs typeface="Inter" pitchFamily="34" charset="-120"/>
-              </a:rPr>
-              <a:t>  / seat / month</a:t>
-            </a:r>
-            <a:endParaRPr lang="en-US" sz="3600" dirty="0"/>
-          </a:p>
-        </p:txBody>
-      </p:sp>
-      <p:sp>
-        <p:nvSpPr>
-          <p:cNvPr id="15" name="Text 13"/>
-          <p:cNvSpPr/>
-          <p:nvPr/>
-        </p:nvSpPr>
-        <p:spPr>
-          <a:xfrm>
-            <a:off x="4658258" y="4526280"/>
-            <a:ext cx="2875178" cy="365760"/>
-          </a:xfrm>
-          <a:prstGeom prst="rect">
-            <a:avLst/>
-          </a:prstGeom>
-          <a:noFill/>
-          <a:ln/>
-        </p:spPr>
-        <p:txBody>
-          <a:bodyPr wrap="square" lIns="0" tIns="0" rIns="0" bIns="0" rtlCol="0" anchor="ctr"/>
-          <a:lstStyle/>
-          <a:p>
-            <a:pPr indent="0" marL="0">
-              <a:buNone/>
-            </a:pPr>
-            <a:r>
-              <a:rPr lang="en-US" sz="1300" b="1" dirty="0">
-                <a:solidFill>
-                  <a:srgbClr val="1A1A1A"/>
-                </a:solidFill>
-                <a:latin typeface="Inter" pitchFamily="34" charset="0"/>
-                <a:ea typeface="Inter" pitchFamily="34" charset="-122"/>
-                <a:cs typeface="Inter" pitchFamily="34" charset="-120"/>
-              </a:rPr>
-              <a:t>Engineering teams of 5–50</a:t>
-            </a:r>
-            <a:endParaRPr lang="en-US" sz="1300" dirty="0"/>
-          </a:p>
-        </p:txBody>
-      </p:sp>
-      <p:sp>
-        <p:nvSpPr>
-          <p:cNvPr id="16" name="Text 14"/>
-          <p:cNvSpPr/>
-          <p:nvPr/>
-        </p:nvSpPr>
-        <p:spPr>
-          <a:xfrm>
-            <a:off x="4658258" y="4983480"/>
-            <a:ext cx="2875178" cy="914400"/>
-          </a:xfrm>
-          <a:prstGeom prst="rect">
-            <a:avLst/>
-          </a:prstGeom>
-          <a:noFill/>
-          <a:ln/>
-        </p:spPr>
-        <p:txBody>
-          <a:bodyPr wrap="square" lIns="0" tIns="0" rIns="0" bIns="0" rtlCol="0" anchor="ctr"/>
-          <a:lstStyle/>
-          <a:p>
-            <a:pPr marL="342900" indent="-342900">
-              <a:spcAft>
-                <a:spcPts val="400"/>
-              </a:spcAft>
-              <a:buSzPct val="100000"/>
-              <a:buChar char="→"/>
-            </a:pPr>
-            <a:r>
-              <a:rPr lang="en-US" sz="1100" dirty="0">
-                <a:solidFill>
-                  <a:srgbClr val="3A3A3A"/>
-                </a:solidFill>
-                <a:latin typeface="Inter" pitchFamily="34" charset="0"/>
-                <a:ea typeface="Inter" pitchFamily="34" charset="-122"/>
-                <a:cs typeface="Inter" pitchFamily="34" charset="-120"/>
-              </a:rPr>
-              <a:t>Full pm / dev / ux modes</a:t>
-            </a:r>
-            <a:endParaRPr lang="en-US" sz="1100" dirty="0"/>
-          </a:p>
-          <a:p>
-            <a:pPr marL="342900" indent="-342900">
-              <a:spcAft>
-                <a:spcPts val="400"/>
-              </a:spcAft>
-              <a:buSzPct val="100000"/>
-              <a:buChar char="→"/>
-            </a:pPr>
-            <a:r>
-              <a:rPr lang="en-US" sz="1100" dirty="0">
-                <a:solidFill>
-                  <a:srgbClr val="3A3A3A"/>
-                </a:solidFill>
-                <a:latin typeface="Inter" pitchFamily="34" charset="0"/>
-                <a:ea typeface="Inter" pitchFamily="34" charset="-122"/>
-                <a:cs typeface="Inter" pitchFamily="34" charset="-120"/>
-              </a:rPr>
-              <a:t>Hosted engine</a:t>
-            </a:r>
-            <a:endParaRPr lang="en-US" sz="1100" dirty="0"/>
-          </a:p>
-          <a:p>
-            <a:pPr marL="342900" indent="-342900">
-              <a:spcAft>
-                <a:spcPts val="400"/>
-              </a:spcAft>
-              <a:buSzPct val="100000"/>
-              <a:buChar char="→"/>
-            </a:pPr>
-            <a:r>
-              <a:rPr lang="en-US" sz="1100" dirty="0">
-                <a:solidFill>
-                  <a:srgbClr val="3A3A3A"/>
-                </a:solidFill>
-                <a:latin typeface="Inter" pitchFamily="34" charset="0"/>
-                <a:ea typeface="Inter" pitchFamily="34" charset="-122"/>
-                <a:cs typeface="Inter" pitchFamily="34" charset="-120"/>
-              </a:rPr>
-              <a:t>Audit logs + drift telemetry</a:t>
-            </a:r>
-            <a:endParaRPr lang="en-US" sz="1100" dirty="0"/>
-          </a:p>
-          <a:p>
-            <a:pPr marL="342900" indent="-342900">
-              <a:spcAft>
-                <a:spcPts val="400"/>
-              </a:spcAft>
-              <a:buSzPct val="100000"/>
-              <a:buChar char="→"/>
-            </a:pPr>
-            <a:r>
-              <a:rPr lang="en-US" sz="1100" dirty="0">
-                <a:solidFill>
-                  <a:srgbClr val="3A3A3A"/>
-                </a:solidFill>
-                <a:latin typeface="Inter" pitchFamily="34" charset="0"/>
-                <a:ea typeface="Inter" pitchFamily="34" charset="-122"/>
-                <a:cs typeface="Inter" pitchFamily="34" charset="-120"/>
-              </a:rPr>
-              <a:t>Unlimited generations</a:t>
-            </a:r>
-            <a:endParaRPr lang="en-US" sz="1100" dirty="0"/>
-          </a:p>
-        </p:txBody>
-      </p:sp>
-      <p:sp>
-        <p:nvSpPr>
-          <p:cNvPr id="17" name="Shape 15"/>
-          <p:cNvSpPr/>
-          <p:nvPr/>
-        </p:nvSpPr>
-        <p:spPr>
-          <a:xfrm>
-            <a:off x="8082077" y="3108960"/>
-            <a:ext cx="3515258" cy="2926080"/>
+            <a:off x="3402254" y="3108960"/>
+            <a:ext cx="2579294" cy="1463040"/>
           </a:xfrm>
           <a:prstGeom prst="rect">
             <a:avLst/>
@@ -7105,275 +6535,678 @@
       </p:sp>
       <p:sp>
         <p:nvSpPr>
-          <p:cNvPr id="18" name="Text 16"/>
-          <p:cNvSpPr/>
-          <p:nvPr/>
-        </p:nvSpPr>
-        <p:spPr>
-          <a:xfrm>
-            <a:off x="8402117" y="3383280"/>
-            <a:ext cx="2875178" cy="274320"/>
-          </a:xfrm>
-          <a:prstGeom prst="rect">
-            <a:avLst/>
-          </a:prstGeom>
-          <a:noFill/>
-          <a:ln/>
-        </p:spPr>
-        <p:txBody>
-          <a:bodyPr wrap="square" lIns="0" tIns="0" rIns="0" bIns="0" rtlCol="0" anchor="ctr"/>
-          <a:lstStyle/>
-          <a:p>
-            <a:pPr indent="0" marL="0">
-              <a:buNone/>
-            </a:pPr>
-            <a:r>
-              <a:rPr lang="en-US" sz="900" b="1" spc="100" kern="0" dirty="0">
+          <p:cNvPr id="12" name="Shape 10"/>
+          <p:cNvSpPr/>
+          <p:nvPr/>
+        </p:nvSpPr>
+        <p:spPr>
+          <a:xfrm>
+            <a:off x="3402254" y="3108960"/>
+            <a:ext cx="36576" cy="1463040"/>
+          </a:xfrm>
+          <a:prstGeom prst="rect">
+            <a:avLst/>
+          </a:prstGeom>
+          <a:solidFill>
+            <a:srgbClr val="5A5A5A"/>
+          </a:solidFill>
+          <a:ln/>
+        </p:spPr>
+      </p:sp>
+      <p:sp>
+        <p:nvSpPr>
+          <p:cNvPr id="13" name="Text 11"/>
+          <p:cNvSpPr/>
+          <p:nvPr/>
+        </p:nvSpPr>
+        <p:spPr>
+          <a:xfrm>
+            <a:off x="3630854" y="3291840"/>
+            <a:ext cx="457200" cy="457200"/>
+          </a:xfrm>
+          <a:prstGeom prst="rect">
+            <a:avLst/>
+          </a:prstGeom>
+          <a:noFill/>
+          <a:ln/>
+        </p:spPr>
+        <p:txBody>
+          <a:bodyPr wrap="square" lIns="0" tIns="0" rIns="0" bIns="0" rtlCol="0" anchor="ctr"/>
+          <a:lstStyle/>
+          <a:p>
+            <a:pPr indent="0" marL="0">
+              <a:buNone/>
+            </a:pPr>
+            <a:r>
+              <a:rPr lang="en-US" sz="2800" b="1" i="1" dirty="0">
                 <a:solidFill>
                   <a:srgbClr val="5A5A5A"/>
+                </a:solidFill>
+                <a:latin typeface="Fraunces" pitchFamily="34" charset="0"/>
+                <a:ea typeface="Fraunces" pitchFamily="34" charset="-122"/>
+                <a:cs typeface="Fraunces" pitchFamily="34" charset="-120"/>
+              </a:rPr>
+              <a:t>2</a:t>
+            </a:r>
+            <a:endParaRPr lang="en-US" sz="2800" dirty="0"/>
+          </a:p>
+        </p:txBody>
+      </p:sp>
+      <p:sp>
+        <p:nvSpPr>
+          <p:cNvPr id="14" name="Text 12"/>
+          <p:cNvSpPr/>
+          <p:nvPr/>
+        </p:nvSpPr>
+        <p:spPr>
+          <a:xfrm>
+            <a:off x="4179494" y="3355848"/>
+            <a:ext cx="1664894" cy="365760"/>
+          </a:xfrm>
+          <a:prstGeom prst="rect">
+            <a:avLst/>
+          </a:prstGeom>
+          <a:noFill/>
+          <a:ln/>
+        </p:spPr>
+        <p:txBody>
+          <a:bodyPr wrap="square" lIns="0" tIns="0" rIns="0" bIns="0" rtlCol="0" anchor="ctr"/>
+          <a:lstStyle/>
+          <a:p>
+            <a:pPr indent="0" marL="0">
+              <a:buNone/>
+            </a:pPr>
+            <a:r>
+              <a:rPr lang="en-US" sz="1400" b="1" spc="-30" kern="0" dirty="0">
+                <a:solidFill>
+                  <a:srgbClr val="0A0A0A"/>
                 </a:solidFill>
                 <a:latin typeface="JetBrains Mono" pitchFamily="34" charset="0"/>
                 <a:ea typeface="JetBrains Mono" pitchFamily="34" charset="-122"/>
                 <a:cs typeface="JetBrains Mono" pitchFamily="34" charset="-120"/>
               </a:rPr>
-              <a:t>ENTERPRISE</a:t>
-            </a:r>
-            <a:endParaRPr lang="en-US" sz="900" dirty="0"/>
-          </a:p>
-        </p:txBody>
-      </p:sp>
-      <p:sp>
-        <p:nvSpPr>
-          <p:cNvPr id="19" name="Text 17"/>
-          <p:cNvSpPr/>
-          <p:nvPr/>
-        </p:nvSpPr>
-        <p:spPr>
-          <a:xfrm>
-            <a:off x="8402117" y="3749040"/>
-            <a:ext cx="2875178" cy="640080"/>
-          </a:xfrm>
-          <a:prstGeom prst="rect">
-            <a:avLst/>
-          </a:prstGeom>
-          <a:noFill/>
-          <a:ln/>
-        </p:spPr>
-        <p:txBody>
-          <a:bodyPr wrap="square" lIns="0" tIns="0" rIns="0" bIns="0" rtlCol="0" anchor="ctr"/>
-          <a:lstStyle/>
-          <a:p>
-            <a:pPr indent="0" marL="0">
-              <a:buNone/>
-            </a:pPr>
-            <a:r>
-              <a:rPr lang="en-US" sz="3600" b="1" i="1" dirty="0">
-                <a:solidFill>
-                  <a:srgbClr val="0A0A0A"/>
+              <a:t>regenerate</a:t>
+            </a:r>
+            <a:endParaRPr lang="en-US" sz="1400" dirty="0"/>
+          </a:p>
+        </p:txBody>
+      </p:sp>
+      <p:sp>
+        <p:nvSpPr>
+          <p:cNvPr id="15" name="Text 13"/>
+          <p:cNvSpPr/>
+          <p:nvPr/>
+        </p:nvSpPr>
+        <p:spPr>
+          <a:xfrm>
+            <a:off x="3630854" y="3886200"/>
+            <a:ext cx="2122094" cy="548640"/>
+          </a:xfrm>
+          <a:prstGeom prst="rect">
+            <a:avLst/>
+          </a:prstGeom>
+          <a:noFill/>
+          <a:ln/>
+        </p:spPr>
+        <p:txBody>
+          <a:bodyPr wrap="square" lIns="0" tIns="0" rIns="0" bIns="0" rtlCol="0" anchor="ctr"/>
+          <a:lstStyle/>
+          <a:p>
+            <a:pPr indent="0" marL="0">
+              <a:buNone/>
+            </a:pPr>
+            <a:r>
+              <a:rPr lang="en-US" sz="1200" dirty="0">
+                <a:solidFill>
+                  <a:srgbClr val="3A3A3A"/>
+                </a:solidFill>
+                <a:latin typeface="Inter" pitchFamily="34" charset="0"/>
+                <a:ea typeface="Inter" pitchFamily="34" charset="-122"/>
+                <a:cs typeface="Inter" pitchFamily="34" charset="-120"/>
+              </a:rPr>
+              <a:t>Engine produces architecture, code, tests</a:t>
+            </a:r>
+            <a:endParaRPr lang="en-US" sz="1200" dirty="0"/>
+          </a:p>
+        </p:txBody>
+      </p:sp>
+      <p:sp>
+        <p:nvSpPr>
+          <p:cNvPr id="16" name="Shape 14"/>
+          <p:cNvSpPr/>
+          <p:nvPr/>
+        </p:nvSpPr>
+        <p:spPr>
+          <a:xfrm>
+            <a:off x="6210148" y="3108960"/>
+            <a:ext cx="2579294" cy="1463040"/>
+          </a:xfrm>
+          <a:prstGeom prst="rect">
+            <a:avLst/>
+          </a:prstGeom>
+          <a:solidFill>
+            <a:srgbClr val="FFFFFF"/>
+          </a:solidFill>
+          <a:ln w="9525">
+            <a:solidFill>
+              <a:srgbClr val="E6E4E0"/>
+            </a:solidFill>
+            <a:prstDash val="solid"/>
+          </a:ln>
+        </p:spPr>
+      </p:sp>
+      <p:sp>
+        <p:nvSpPr>
+          <p:cNvPr id="17" name="Shape 15"/>
+          <p:cNvSpPr/>
+          <p:nvPr/>
+        </p:nvSpPr>
+        <p:spPr>
+          <a:xfrm>
+            <a:off x="6210148" y="3108960"/>
+            <a:ext cx="36576" cy="1463040"/>
+          </a:xfrm>
+          <a:prstGeom prst="rect">
+            <a:avLst/>
+          </a:prstGeom>
+          <a:solidFill>
+            <a:srgbClr val="5A5A5A"/>
+          </a:solidFill>
+          <a:ln/>
+        </p:spPr>
+      </p:sp>
+      <p:sp>
+        <p:nvSpPr>
+          <p:cNvPr id="18" name="Text 16"/>
+          <p:cNvSpPr/>
+          <p:nvPr/>
+        </p:nvSpPr>
+        <p:spPr>
+          <a:xfrm>
+            <a:off x="6438748" y="3291840"/>
+            <a:ext cx="457200" cy="457200"/>
+          </a:xfrm>
+          <a:prstGeom prst="rect">
+            <a:avLst/>
+          </a:prstGeom>
+          <a:noFill/>
+          <a:ln/>
+        </p:spPr>
+        <p:txBody>
+          <a:bodyPr wrap="square" lIns="0" tIns="0" rIns="0" bIns="0" rtlCol="0" anchor="ctr"/>
+          <a:lstStyle/>
+          <a:p>
+            <a:pPr indent="0" marL="0">
+              <a:buNone/>
+            </a:pPr>
+            <a:r>
+              <a:rPr lang="en-US" sz="2800" b="1" i="1" dirty="0">
+                <a:solidFill>
+                  <a:srgbClr val="5A5A5A"/>
                 </a:solidFill>
                 <a:latin typeface="Fraunces" pitchFamily="34" charset="0"/>
                 <a:ea typeface="Fraunces" pitchFamily="34" charset="-122"/>
                 <a:cs typeface="Fraunces" pitchFamily="34" charset="-120"/>
               </a:rPr>
-              <a:t>$50K+</a:t>
-            </a:r>
-            <a:pPr indent="0" marL="0">
-              <a:buNone/>
-            </a:pPr>
-            <a:r>
-              <a:rPr lang="en-US" sz="1100" dirty="0">
+              <a:t>3</a:t>
+            </a:r>
+            <a:endParaRPr lang="en-US" sz="2800" dirty="0"/>
+          </a:p>
+        </p:txBody>
+      </p:sp>
+      <p:sp>
+        <p:nvSpPr>
+          <p:cNvPr id="19" name="Text 17"/>
+          <p:cNvSpPr/>
+          <p:nvPr/>
+        </p:nvSpPr>
+        <p:spPr>
+          <a:xfrm>
+            <a:off x="6987388" y="3355848"/>
+            <a:ext cx="1664894" cy="365760"/>
+          </a:xfrm>
+          <a:prstGeom prst="rect">
+            <a:avLst/>
+          </a:prstGeom>
+          <a:noFill/>
+          <a:ln/>
+        </p:spPr>
+        <p:txBody>
+          <a:bodyPr wrap="square" lIns="0" tIns="0" rIns="0" bIns="0" rtlCol="0" anchor="ctr"/>
+          <a:lstStyle/>
+          <a:p>
+            <a:pPr indent="0" marL="0">
+              <a:buNone/>
+            </a:pPr>
+            <a:r>
+              <a:rPr lang="en-US" sz="1400" b="1" spc="-30" kern="0" dirty="0">
+                <a:solidFill>
+                  <a:srgbClr val="0A0A0A"/>
+                </a:solidFill>
+                <a:latin typeface="JetBrains Mono" pitchFamily="34" charset="0"/>
+                <a:ea typeface="JetBrains Mono" pitchFamily="34" charset="-122"/>
+                <a:cs typeface="JetBrains Mono" pitchFamily="34" charset="-120"/>
+              </a:rPr>
+              <a:t>eval</a:t>
+            </a:r>
+            <a:endParaRPr lang="en-US" sz="1400" dirty="0"/>
+          </a:p>
+        </p:txBody>
+      </p:sp>
+      <p:sp>
+        <p:nvSpPr>
+          <p:cNvPr id="20" name="Text 18"/>
+          <p:cNvSpPr/>
+          <p:nvPr/>
+        </p:nvSpPr>
+        <p:spPr>
+          <a:xfrm>
+            <a:off x="6438748" y="3886200"/>
+            <a:ext cx="2122094" cy="548640"/>
+          </a:xfrm>
+          <a:prstGeom prst="rect">
+            <a:avLst/>
+          </a:prstGeom>
+          <a:noFill/>
+          <a:ln/>
+        </p:spPr>
+        <p:txBody>
+          <a:bodyPr wrap="square" lIns="0" tIns="0" rIns="0" bIns="0" rtlCol="0" anchor="ctr"/>
+          <a:lstStyle/>
+          <a:p>
+            <a:pPr indent="0" marL="0">
+              <a:buNone/>
+            </a:pPr>
+            <a:r>
+              <a:rPr lang="en-US" sz="1200" dirty="0">
+                <a:solidFill>
+                  <a:srgbClr val="3A3A3A"/>
+                </a:solidFill>
+                <a:latin typeface="Inter" pitchFamily="34" charset="0"/>
+                <a:ea typeface="Inter" pitchFamily="34" charset="-122"/>
+                <a:cs typeface="Inter" pitchFamily="34" charset="-120"/>
+              </a:rPr>
+              <a:t>Decidable + mechanical + heuristic checks</a:t>
+            </a:r>
+            <a:endParaRPr lang="en-US" sz="1200" dirty="0"/>
+          </a:p>
+        </p:txBody>
+      </p:sp>
+      <p:sp>
+        <p:nvSpPr>
+          <p:cNvPr id="21" name="Shape 19"/>
+          <p:cNvSpPr/>
+          <p:nvPr/>
+        </p:nvSpPr>
+        <p:spPr>
+          <a:xfrm>
+            <a:off x="9018041" y="3108960"/>
+            <a:ext cx="2579294" cy="1463040"/>
+          </a:xfrm>
+          <a:prstGeom prst="rect">
+            <a:avLst/>
+          </a:prstGeom>
+          <a:solidFill>
+            <a:srgbClr val="EFEEEC"/>
+          </a:solidFill>
+          <a:ln w="9525">
+            <a:solidFill>
+              <a:srgbClr val="E6E4E0"/>
+            </a:solidFill>
+            <a:prstDash val="solid"/>
+          </a:ln>
+        </p:spPr>
+      </p:sp>
+      <p:sp>
+        <p:nvSpPr>
+          <p:cNvPr id="22" name="Shape 20"/>
+          <p:cNvSpPr/>
+          <p:nvPr/>
+        </p:nvSpPr>
+        <p:spPr>
+          <a:xfrm>
+            <a:off x="9018041" y="3108960"/>
+            <a:ext cx="36576" cy="1463040"/>
+          </a:xfrm>
+          <a:prstGeom prst="rect">
+            <a:avLst/>
+          </a:prstGeom>
+          <a:solidFill>
+            <a:srgbClr val="D6D3CD"/>
+          </a:solidFill>
+          <a:ln/>
+        </p:spPr>
+      </p:sp>
+      <p:sp>
+        <p:nvSpPr>
+          <p:cNvPr id="23" name="Text 21"/>
+          <p:cNvSpPr/>
+          <p:nvPr/>
+        </p:nvSpPr>
+        <p:spPr>
+          <a:xfrm>
+            <a:off x="9246641" y="3291840"/>
+            <a:ext cx="457200" cy="457200"/>
+          </a:xfrm>
+          <a:prstGeom prst="rect">
+            <a:avLst/>
+          </a:prstGeom>
+          <a:noFill/>
+          <a:ln/>
+        </p:spPr>
+        <p:txBody>
+          <a:bodyPr wrap="square" lIns="0" tIns="0" rIns="0" bIns="0" rtlCol="0" anchor="ctr"/>
+          <a:lstStyle/>
+          <a:p>
+            <a:pPr indent="0" marL="0">
+              <a:buNone/>
+            </a:pPr>
+            <a:r>
+              <a:rPr lang="en-US" sz="2800" b="1" i="1" dirty="0">
                 <a:solidFill>
                   <a:srgbClr val="5A5A5A"/>
-                </a:solidFill>
-                <a:latin typeface="Inter" pitchFamily="34" charset="0"/>
-                <a:ea typeface="Inter" pitchFamily="34" charset="-122"/>
-                <a:cs typeface="Inter" pitchFamily="34" charset="-120"/>
-              </a:rPr>
-              <a:t>  / year</a:t>
-            </a:r>
-            <a:endParaRPr lang="en-US" sz="3600" dirty="0"/>
-          </a:p>
-        </p:txBody>
-      </p:sp>
-      <p:sp>
-        <p:nvSpPr>
-          <p:cNvPr id="20" name="Text 18"/>
-          <p:cNvSpPr/>
-          <p:nvPr/>
-        </p:nvSpPr>
-        <p:spPr>
-          <a:xfrm>
-            <a:off x="8402117" y="4526280"/>
-            <a:ext cx="2875178" cy="365760"/>
-          </a:xfrm>
-          <a:prstGeom prst="rect">
-            <a:avLst/>
-          </a:prstGeom>
-          <a:noFill/>
-          <a:ln/>
-        </p:spPr>
-        <p:txBody>
-          <a:bodyPr wrap="square" lIns="0" tIns="0" rIns="0" bIns="0" rtlCol="0" anchor="ctr"/>
-          <a:lstStyle/>
-          <a:p>
-            <a:pPr indent="0" marL="0">
-              <a:buNone/>
-            </a:pPr>
-            <a:r>
-              <a:rPr lang="en-US" sz="1300" b="1" dirty="0">
-                <a:solidFill>
-                  <a:srgbClr val="1A1A1A"/>
-                </a:solidFill>
-                <a:latin typeface="Inter" pitchFamily="34" charset="0"/>
-                <a:ea typeface="Inter" pitchFamily="34" charset="-122"/>
-                <a:cs typeface="Inter" pitchFamily="34" charset="-120"/>
-              </a:rPr>
-              <a:t>Mid-market &amp; enterprise (50+ eng)</a:t>
-            </a:r>
-            <a:endParaRPr lang="en-US" sz="1300" dirty="0"/>
-          </a:p>
-        </p:txBody>
-      </p:sp>
-      <p:sp>
-        <p:nvSpPr>
-          <p:cNvPr id="21" name="Text 19"/>
-          <p:cNvSpPr/>
-          <p:nvPr/>
-        </p:nvSpPr>
-        <p:spPr>
-          <a:xfrm>
-            <a:off x="8402117" y="4983480"/>
-            <a:ext cx="2875178" cy="914400"/>
-          </a:xfrm>
-          <a:prstGeom prst="rect">
-            <a:avLst/>
-          </a:prstGeom>
-          <a:noFill/>
-          <a:ln/>
-        </p:spPr>
-        <p:txBody>
-          <a:bodyPr wrap="square" lIns="0" tIns="0" rIns="0" bIns="0" rtlCol="0" anchor="ctr"/>
-          <a:lstStyle/>
-          <a:p>
-            <a:pPr marL="342900" indent="-342900">
-              <a:spcAft>
-                <a:spcPts val="400"/>
-              </a:spcAft>
-              <a:buSzPct val="100000"/>
-              <a:buChar char="→"/>
-            </a:pPr>
-            <a:r>
-              <a:rPr lang="en-US" sz="1100" dirty="0">
-                <a:solidFill>
-                  <a:srgbClr val="3A3A3A"/>
-                </a:solidFill>
-                <a:latin typeface="Inter" pitchFamily="34" charset="0"/>
-                <a:ea typeface="Inter" pitchFamily="34" charset="-122"/>
-                <a:cs typeface="Inter" pitchFamily="34" charset="-120"/>
-              </a:rPr>
-              <a:t>expert mode + compliance</a:t>
-            </a:r>
-            <a:endParaRPr lang="en-US" sz="1100" dirty="0"/>
-          </a:p>
-          <a:p>
-            <a:pPr marL="342900" indent="-342900">
-              <a:spcAft>
-                <a:spcPts val="400"/>
-              </a:spcAft>
-              <a:buSzPct val="100000"/>
-              <a:buChar char="→"/>
-            </a:pPr>
-            <a:r>
-              <a:rPr lang="en-US" sz="1100" dirty="0">
-                <a:solidFill>
-                  <a:srgbClr val="3A3A3A"/>
-                </a:solidFill>
-                <a:latin typeface="Inter" pitchFamily="34" charset="0"/>
-                <a:ea typeface="Inter" pitchFamily="34" charset="-122"/>
-                <a:cs typeface="Inter" pitchFamily="34" charset="-120"/>
-              </a:rPr>
-              <a:t>On-prem engine</a:t>
-            </a:r>
-            <a:endParaRPr lang="en-US" sz="1100" dirty="0"/>
-          </a:p>
-          <a:p>
-            <a:pPr marL="342900" indent="-342900">
-              <a:spcAft>
-                <a:spcPts val="400"/>
-              </a:spcAft>
-              <a:buSzPct val="100000"/>
-              <a:buChar char="→"/>
-            </a:pPr>
-            <a:r>
-              <a:rPr lang="en-US" sz="1100" dirty="0">
-                <a:solidFill>
-                  <a:srgbClr val="3A3A3A"/>
-                </a:solidFill>
-                <a:latin typeface="Inter" pitchFamily="34" charset="0"/>
-                <a:ea typeface="Inter" pitchFamily="34" charset="-122"/>
-                <a:cs typeface="Inter" pitchFamily="34" charset="-120"/>
-              </a:rPr>
-              <a:t>SOC2 / HIPAA bundles</a:t>
-            </a:r>
-            <a:endParaRPr lang="en-US" sz="1100" dirty="0"/>
-          </a:p>
-          <a:p>
-            <a:pPr marL="342900" indent="-342900">
-              <a:spcAft>
-                <a:spcPts val="400"/>
-              </a:spcAft>
-              <a:buSzPct val="100000"/>
-              <a:buChar char="→"/>
-            </a:pPr>
-            <a:r>
-              <a:rPr lang="en-US" sz="1100" dirty="0">
-                <a:solidFill>
-                  <a:srgbClr val="3A3A3A"/>
-                </a:solidFill>
-                <a:latin typeface="Inter" pitchFamily="34" charset="0"/>
-                <a:ea typeface="Inter" pitchFamily="34" charset="-122"/>
-                <a:cs typeface="Inter" pitchFamily="34" charset="-120"/>
-              </a:rPr>
-              <a:t>Founder advisor seat</a:t>
-            </a:r>
-            <a:endParaRPr lang="en-US" sz="1100" dirty="0"/>
-          </a:p>
-        </p:txBody>
-      </p:sp>
-      <p:sp>
-        <p:nvSpPr>
-          <p:cNvPr id="22" name="Text 20"/>
-          <p:cNvSpPr/>
-          <p:nvPr/>
-        </p:nvSpPr>
-        <p:spPr>
-          <a:xfrm>
-            <a:off x="594360" y="6217920"/>
-            <a:ext cx="11002975" cy="365760"/>
-          </a:xfrm>
-          <a:prstGeom prst="rect">
-            <a:avLst/>
-          </a:prstGeom>
-          <a:noFill/>
-          <a:ln/>
-        </p:spPr>
-        <p:txBody>
-          <a:bodyPr wrap="square" lIns="0" tIns="0" rIns="0" bIns="0" rtlCol="0" anchor="ctr"/>
-          <a:lstStyle/>
-          <a:p>
-            <a:pPr indent="0" marL="0">
-              <a:buNone/>
-            </a:pPr>
-            <a:r>
-              <a:rPr lang="en-US" sz="1200" i="1" dirty="0">
-                <a:solidFill>
-                  <a:srgbClr val="3A3A3A"/>
                 </a:solidFill>
                 <a:latin typeface="Fraunces" pitchFamily="34" charset="0"/>
                 <a:ea typeface="Fraunces" pitchFamily="34" charset="-122"/>
                 <a:cs typeface="Fraunces" pitchFamily="34" charset="-120"/>
               </a:rPr>
-              <a:t>GTM: land via individual devs (free Skill, Discord, GitHub). Expand to teams when drift becomes a P1.</a:t>
+              <a:t>4</a:t>
+            </a:r>
+            <a:endParaRPr lang="en-US" sz="2800" dirty="0"/>
+          </a:p>
+        </p:txBody>
+      </p:sp>
+      <p:sp>
+        <p:nvSpPr>
+          <p:cNvPr id="24" name="Text 22"/>
+          <p:cNvSpPr/>
+          <p:nvPr/>
+        </p:nvSpPr>
+        <p:spPr>
+          <a:xfrm>
+            <a:off x="9795281" y="3355848"/>
+            <a:ext cx="1664894" cy="365760"/>
+          </a:xfrm>
+          <a:prstGeom prst="rect">
+            <a:avLst/>
+          </a:prstGeom>
+          <a:noFill/>
+          <a:ln/>
+        </p:spPr>
+        <p:txBody>
+          <a:bodyPr wrap="square" lIns="0" tIns="0" rIns="0" bIns="0" rtlCol="0" anchor="ctr"/>
+          <a:lstStyle/>
+          <a:p>
+            <a:pPr indent="0" marL="0">
+              <a:buNone/>
+            </a:pPr>
+            <a:r>
+              <a:rPr lang="en-US" sz="1400" b="1" spc="-30" kern="0" dirty="0">
+                <a:solidFill>
+                  <a:srgbClr val="0A0A0A"/>
+                </a:solidFill>
+                <a:latin typeface="JetBrains Mono" pitchFamily="34" charset="0"/>
+                <a:ea typeface="JetBrains Mono" pitchFamily="34" charset="-122"/>
+                <a:cs typeface="JetBrains Mono" pitchFamily="34" charset="-120"/>
+              </a:rPr>
+              <a:t>ship</a:t>
+            </a:r>
+            <a:endParaRPr lang="en-US" sz="1400" dirty="0"/>
+          </a:p>
+        </p:txBody>
+      </p:sp>
+      <p:sp>
+        <p:nvSpPr>
+          <p:cNvPr id="25" name="Text 23"/>
+          <p:cNvSpPr/>
+          <p:nvPr/>
+        </p:nvSpPr>
+        <p:spPr>
+          <a:xfrm>
+            <a:off x="9246641" y="3886200"/>
+            <a:ext cx="2122094" cy="548640"/>
+          </a:xfrm>
+          <a:prstGeom prst="rect">
+            <a:avLst/>
+          </a:prstGeom>
+          <a:noFill/>
+          <a:ln/>
+        </p:spPr>
+        <p:txBody>
+          <a:bodyPr wrap="square" lIns="0" tIns="0" rIns="0" bIns="0" rtlCol="0" anchor="ctr"/>
+          <a:lstStyle/>
+          <a:p>
+            <a:pPr indent="0" marL="0">
+              <a:buNone/>
+            </a:pPr>
+            <a:r>
+              <a:rPr lang="en-US" sz="1200" dirty="0">
+                <a:solidFill>
+                  <a:srgbClr val="3A3A3A"/>
+                </a:solidFill>
+                <a:latin typeface="Inter" pitchFamily="34" charset="0"/>
+                <a:ea typeface="Inter" pitchFamily="34" charset="-122"/>
+                <a:cs typeface="Inter" pitchFamily="34" charset="-120"/>
+              </a:rPr>
+              <a:t>Code-sync trace closes the loop</a:t>
+            </a:r>
+            <a:endParaRPr lang="en-US" sz="1200" dirty="0"/>
+          </a:p>
+        </p:txBody>
+      </p:sp>
+      <p:sp>
+        <p:nvSpPr>
+          <p:cNvPr id="26" name="Text 24"/>
+          <p:cNvSpPr/>
+          <p:nvPr/>
+        </p:nvSpPr>
+        <p:spPr>
+          <a:xfrm>
+            <a:off x="594360" y="4937760"/>
+            <a:ext cx="11002975" cy="457200"/>
+          </a:xfrm>
+          <a:prstGeom prst="rect">
+            <a:avLst/>
+          </a:prstGeom>
+          <a:noFill/>
+          <a:ln/>
+        </p:spPr>
+        <p:txBody>
+          <a:bodyPr wrap="square" lIns="0" tIns="0" rIns="0" bIns="0" rtlCol="0" anchor="ctr"/>
+          <a:lstStyle/>
+          <a:p>
+            <a:pPr indent="0" marL="0">
+              <a:buNone/>
+            </a:pPr>
+            <a:r>
+              <a:rPr lang="en-US" sz="1000" b="1" spc="100" kern="0" dirty="0">
+                <a:solidFill>
+                  <a:srgbClr val="C43A50"/>
+                </a:solidFill>
+                <a:latin typeface="JetBrains Mono" pitchFamily="34" charset="0"/>
+                <a:ea typeface="JetBrains Mono" pitchFamily="34" charset="-122"/>
+                <a:cs typeface="JetBrains Mono" pitchFamily="34" charset="-120"/>
+              </a:rPr>
+              <a:t>FIVE MODES   </a:t>
+            </a:r>
+            <a:pPr indent="0" marL="0">
+              <a:buNone/>
+            </a:pPr>
+            <a:r>
+              <a:rPr lang="en-US" sz="1400" b="1" dirty="0">
+                <a:solidFill>
+                  <a:srgbClr val="0A0A0A"/>
+                </a:solidFill>
+                <a:latin typeface="JetBrains Mono" pitchFamily="34" charset="0"/>
+                <a:ea typeface="JetBrains Mono" pitchFamily="34" charset="-122"/>
+                <a:cs typeface="JetBrains Mono" pitchFamily="34" charset="-120"/>
+              </a:rPr>
+              <a:t>vibe</a:t>
+            </a:r>
+            <a:pPr indent="0" marL="0">
+              <a:buNone/>
+            </a:pPr>
+            <a:r>
+              <a:rPr lang="en-US" sz="1400" dirty="0">
+                <a:solidFill>
+                  <a:srgbClr val="5A5A5A"/>
+                </a:solidFill>
+                <a:latin typeface="Inter" pitchFamily="34" charset="0"/>
+                <a:ea typeface="Inter" pitchFamily="34" charset="-122"/>
+                <a:cs typeface="Inter" pitchFamily="34" charset="-120"/>
+              </a:rPr>
+              <a:t> (solo) · </a:t>
+            </a:r>
+            <a:pPr indent="0" marL="0">
+              <a:buNone/>
+            </a:pPr>
+            <a:r>
+              <a:rPr lang="en-US" sz="1400" b="1" dirty="0">
+                <a:solidFill>
+                  <a:srgbClr val="0A0A0A"/>
+                </a:solidFill>
+                <a:latin typeface="JetBrains Mono" pitchFamily="34" charset="0"/>
+                <a:ea typeface="JetBrains Mono" pitchFamily="34" charset="-122"/>
+                <a:cs typeface="JetBrains Mono" pitchFamily="34" charset="-120"/>
+              </a:rPr>
+              <a:t>pm</a:t>
+            </a:r>
+            <a:pPr indent="0" marL="0">
+              <a:buNone/>
+            </a:pPr>
+            <a:r>
+              <a:rPr lang="en-US" sz="1400" dirty="0">
+                <a:solidFill>
+                  <a:srgbClr val="5A5A5A"/>
+                </a:solidFill>
+                <a:latin typeface="Inter" pitchFamily="34" charset="0"/>
+                <a:ea typeface="Inter" pitchFamily="34" charset="-122"/>
+                <a:cs typeface="Inter" pitchFamily="34" charset="-120"/>
+              </a:rPr>
+              <a:t> (product) · </a:t>
+            </a:r>
+            <a:pPr indent="0" marL="0">
+              <a:buNone/>
+            </a:pPr>
+            <a:r>
+              <a:rPr lang="en-US" sz="1400" b="1" dirty="0">
+                <a:solidFill>
+                  <a:srgbClr val="0A0A0A"/>
+                </a:solidFill>
+                <a:latin typeface="JetBrains Mono" pitchFamily="34" charset="0"/>
+                <a:ea typeface="JetBrains Mono" pitchFamily="34" charset="-122"/>
+                <a:cs typeface="JetBrains Mono" pitchFamily="34" charset="-120"/>
+              </a:rPr>
+              <a:t>dev</a:t>
+            </a:r>
+            <a:pPr indent="0" marL="0">
+              <a:buNone/>
+            </a:pPr>
+            <a:r>
+              <a:rPr lang="en-US" sz="1400" dirty="0">
+                <a:solidFill>
+                  <a:srgbClr val="5A5A5A"/>
+                </a:solidFill>
+                <a:latin typeface="Inter" pitchFamily="34" charset="0"/>
+                <a:ea typeface="Inter" pitchFamily="34" charset="-122"/>
+                <a:cs typeface="Inter" pitchFamily="34" charset="-120"/>
+              </a:rPr>
+              <a:t> (tech) · </a:t>
+            </a:r>
+            <a:pPr indent="0" marL="0">
+              <a:buNone/>
+            </a:pPr>
+            <a:r>
+              <a:rPr lang="en-US" sz="1400" b="1" dirty="0">
+                <a:solidFill>
+                  <a:srgbClr val="0A0A0A"/>
+                </a:solidFill>
+                <a:latin typeface="JetBrains Mono" pitchFamily="34" charset="0"/>
+                <a:ea typeface="JetBrains Mono" pitchFamily="34" charset="-122"/>
+                <a:cs typeface="JetBrains Mono" pitchFamily="34" charset="-120"/>
+              </a:rPr>
+              <a:t>ux</a:t>
+            </a:r>
+            <a:pPr indent="0" marL="0">
+              <a:buNone/>
+            </a:pPr>
+            <a:r>
+              <a:rPr lang="en-US" sz="1400" dirty="0">
+                <a:solidFill>
+                  <a:srgbClr val="5A5A5A"/>
+                </a:solidFill>
+                <a:latin typeface="Inter" pitchFamily="34" charset="0"/>
+                <a:ea typeface="Inter" pitchFamily="34" charset="-122"/>
+                <a:cs typeface="Inter" pitchFamily="34" charset="-120"/>
+              </a:rPr>
+              <a:t> (design) · </a:t>
+            </a:r>
+            <a:pPr indent="0" marL="0">
+              <a:buNone/>
+            </a:pPr>
+            <a:r>
+              <a:rPr lang="en-US" sz="1400" b="1" dirty="0">
+                <a:solidFill>
+                  <a:srgbClr val="0A0A0A"/>
+                </a:solidFill>
+                <a:latin typeface="JetBrains Mono" pitchFamily="34" charset="0"/>
+                <a:ea typeface="JetBrains Mono" pitchFamily="34" charset="-122"/>
+                <a:cs typeface="JetBrains Mono" pitchFamily="34" charset="-120"/>
+              </a:rPr>
+              <a:t>expert</a:t>
+            </a:r>
+            <a:pPr indent="0" marL="0">
+              <a:buNone/>
+            </a:pPr>
+            <a:r>
+              <a:rPr lang="en-US" sz="1400" dirty="0">
+                <a:solidFill>
+                  <a:srgbClr val="5A5A5A"/>
+                </a:solidFill>
+                <a:latin typeface="Inter" pitchFamily="34" charset="0"/>
+                <a:ea typeface="Inter" pitchFamily="34" charset="-122"/>
+                <a:cs typeface="Inter" pitchFamily="34" charset="-120"/>
+              </a:rPr>
+              <a:t> (regulated)</a:t>
+            </a:r>
+            <a:endParaRPr lang="en-US" sz="1400" dirty="0"/>
+          </a:p>
+        </p:txBody>
+      </p:sp>
+      <p:sp>
+        <p:nvSpPr>
+          <p:cNvPr id="27" name="Text 25"/>
+          <p:cNvSpPr/>
+          <p:nvPr/>
+        </p:nvSpPr>
+        <p:spPr>
+          <a:xfrm>
+            <a:off x="594360" y="5440680"/>
+            <a:ext cx="11002975" cy="365760"/>
+          </a:xfrm>
+          <a:prstGeom prst="rect">
+            <a:avLst/>
+          </a:prstGeom>
+          <a:noFill/>
+          <a:ln/>
+        </p:spPr>
+        <p:txBody>
+          <a:bodyPr wrap="square" lIns="0" tIns="0" rIns="0" bIns="0" rtlCol="0" anchor="ctr"/>
+          <a:lstStyle/>
+          <a:p>
+            <a:pPr indent="0" marL="0">
+              <a:buNone/>
+            </a:pPr>
+            <a:r>
+              <a:rPr lang="en-US" sz="1200" dirty="0">
+                <a:solidFill>
+                  <a:srgbClr val="707070"/>
+                </a:solidFill>
+                <a:latin typeface="JetBrains Mono" pitchFamily="34" charset="0"/>
+                <a:ea typeface="JetBrains Mono" pitchFamily="34" charset="-122"/>
+                <a:cs typeface="JetBrains Mono" pitchFamily="34" charset="-120"/>
+              </a:rPr>
+              <a:t>Open source: methodology, Skill, templates.  Paid: hosted engine, audit, compliance.</a:t>
             </a:r>
             <a:endParaRPr lang="en-US" sz="1200" dirty="0"/>
           </a:p>
@@ -7483,7 +7316,7 @@
                 <a:ea typeface="JetBrains Mono" pitchFamily="34" charset="-122"/>
                 <a:cs typeface="JetBrains Mono" pitchFamily="34" charset="-120"/>
               </a:rPr>
-              <a:t>MARKET</a:t>
+              <a:t>BUSINESS MODEL</a:t>
             </a:r>
             <a:endParaRPr lang="en-US" sz="1000" dirty="0"/>
           </a:p>
@@ -7497,17 +7330,17 @@
         </p:nvSpPr>
         <p:spPr>
           <a:xfrm>
-            <a:off x="594360" y="868680"/>
-            <a:ext cx="11002975" cy="1783080"/>
-          </a:xfrm>
-          <a:prstGeom prst="rect">
-            <a:avLst/>
-          </a:prstGeom>
-          <a:noFill/>
-          <a:ln/>
-        </p:spPr>
-        <p:txBody>
-          <a:bodyPr wrap="square" lIns="0" tIns="0" rIns="0" bIns="0" rtlCol="0" anchor="t"/>
+            <a:off x="594360" y="914400"/>
+            <a:ext cx="11002975" cy="1005840"/>
+          </a:xfrm>
+          <a:prstGeom prst="rect">
+            <a:avLst/>
+          </a:prstGeom>
+          <a:noFill/>
+          <a:ln/>
+        </p:spPr>
+        <p:txBody>
+          <a:bodyPr wrap="square" lIns="0" tIns="0" rIns="0" bIns="0" rtlCol="0" anchor="ctr"/>
           <a:lstStyle/>
           <a:p>
             <a:pPr indent="0" marL="0">
@@ -7522,55 +7355,237 @@
                 <a:ea typeface="Inter" pitchFamily="34" charset="-122"/>
                 <a:cs typeface="Inter" pitchFamily="34" charset="-120"/>
               </a:rPr>
-              <a:t>$2.2B SAM.</a:t>
+              <a:t>Open core. Tiered SaaS.</a:t>
             </a:r>
             <a:endParaRPr lang="en-US" sz="5600" dirty="0"/>
           </a:p>
-          <a:p>
-            <a:pPr indent="0" marL="0">
-              <a:buNone/>
-            </a:pPr>
-            <a:r>
-              <a:rPr lang="en-US" sz="5600" b="1" i="1" spc="-200" kern="0" dirty="0">
-                <a:solidFill>
-                  <a:srgbClr val="E84057"/>
+        </p:txBody>
+      </p:sp>
+      <p:sp>
+        <p:nvSpPr>
+          <p:cNvPr id="5" name="Text 3"/>
+          <p:cNvSpPr/>
+          <p:nvPr/>
+        </p:nvSpPr>
+        <p:spPr>
+          <a:xfrm>
+            <a:off x="594360" y="2057400"/>
+            <a:ext cx="11002975" cy="640080"/>
+          </a:xfrm>
+          <a:prstGeom prst="rect">
+            <a:avLst/>
+          </a:prstGeom>
+          <a:noFill/>
+          <a:ln/>
+        </p:spPr>
+        <p:txBody>
+          <a:bodyPr wrap="square" lIns="0" tIns="0" rIns="0" bIns="0" rtlCol="0" anchor="ctr"/>
+          <a:lstStyle/>
+          <a:p>
+            <a:pPr indent="0" marL="0">
+              <a:buNone/>
+            </a:pPr>
+            <a:r>
+              <a:rPr lang="en-US" sz="1500" dirty="0">
+                <a:solidFill>
+                  <a:srgbClr val="3A3A3A"/>
+                </a:solidFill>
+                <a:latin typeface="Inter" pitchFamily="34" charset="0"/>
+                <a:ea typeface="Inter" pitchFamily="34" charset="-122"/>
+                <a:cs typeface="Inter" pitchFamily="34" charset="-120"/>
+              </a:rPr>
+              <a:t>MIT-licensed methodology + Skill pulls developers in (PLG, Cursor's pattern). Paid tiers capture engineering teams that need audit, telemetry, compliance.</a:t>
+            </a:r>
+            <a:endParaRPr lang="en-US" sz="1500" dirty="0"/>
+          </a:p>
+        </p:txBody>
+      </p:sp>
+      <p:sp>
+        <p:nvSpPr>
+          <p:cNvPr id="6" name="Shape 4"/>
+          <p:cNvSpPr/>
+          <p:nvPr/>
+        </p:nvSpPr>
+        <p:spPr>
+          <a:xfrm>
+            <a:off x="594360" y="3108960"/>
+            <a:ext cx="3515258" cy="2926080"/>
+          </a:xfrm>
+          <a:prstGeom prst="rect">
+            <a:avLst/>
+          </a:prstGeom>
+          <a:solidFill>
+            <a:srgbClr val="FFFFFF"/>
+          </a:solidFill>
+          <a:ln w="9525">
+            <a:solidFill>
+              <a:srgbClr val="E6E4E0"/>
+            </a:solidFill>
+            <a:prstDash val="solid"/>
+          </a:ln>
+        </p:spPr>
+      </p:sp>
+      <p:sp>
+        <p:nvSpPr>
+          <p:cNvPr id="7" name="Text 5"/>
+          <p:cNvSpPr/>
+          <p:nvPr/>
+        </p:nvSpPr>
+        <p:spPr>
+          <a:xfrm>
+            <a:off x="914400" y="3383280"/>
+            <a:ext cx="2875178" cy="274320"/>
+          </a:xfrm>
+          <a:prstGeom prst="rect">
+            <a:avLst/>
+          </a:prstGeom>
+          <a:noFill/>
+          <a:ln/>
+        </p:spPr>
+        <p:txBody>
+          <a:bodyPr wrap="square" lIns="0" tIns="0" rIns="0" bIns="0" rtlCol="0" anchor="ctr"/>
+          <a:lstStyle/>
+          <a:p>
+            <a:pPr indent="0" marL="0">
+              <a:buNone/>
+            </a:pPr>
+            <a:r>
+              <a:rPr lang="en-US" sz="900" b="1" spc="100" kern="0" dirty="0">
+                <a:solidFill>
+                  <a:srgbClr val="5A5A5A"/>
+                </a:solidFill>
+                <a:latin typeface="JetBrains Mono" pitchFamily="34" charset="0"/>
+                <a:ea typeface="JetBrains Mono" pitchFamily="34" charset="-122"/>
+                <a:cs typeface="JetBrains Mono" pitchFamily="34" charset="-120"/>
+              </a:rPr>
+              <a:t>FREE</a:t>
+            </a:r>
+            <a:endParaRPr lang="en-US" sz="900" dirty="0"/>
+          </a:p>
+        </p:txBody>
+      </p:sp>
+      <p:sp>
+        <p:nvSpPr>
+          <p:cNvPr id="8" name="Text 6"/>
+          <p:cNvSpPr/>
+          <p:nvPr/>
+        </p:nvSpPr>
+        <p:spPr>
+          <a:xfrm>
+            <a:off x="914400" y="3749040"/>
+            <a:ext cx="2875178" cy="640080"/>
+          </a:xfrm>
+          <a:prstGeom prst="rect">
+            <a:avLst/>
+          </a:prstGeom>
+          <a:noFill/>
+          <a:ln/>
+        </p:spPr>
+        <p:txBody>
+          <a:bodyPr wrap="square" lIns="0" tIns="0" rIns="0" bIns="0" rtlCol="0" anchor="ctr"/>
+          <a:lstStyle/>
+          <a:p>
+            <a:pPr indent="0" marL="0">
+              <a:buNone/>
+            </a:pPr>
+            <a:r>
+              <a:rPr lang="en-US" sz="3600" b="1" i="1" dirty="0">
+                <a:solidFill>
+                  <a:srgbClr val="0A0A0A"/>
                 </a:solidFill>
                 <a:latin typeface="Fraunces" pitchFamily="34" charset="0"/>
                 <a:ea typeface="Fraunces" pitchFamily="34" charset="-122"/>
                 <a:cs typeface="Fraunces" pitchFamily="34" charset="-120"/>
               </a:rPr>
-              <a:t>Cursor proves it.</a:t>
-            </a:r>
-            <a:endParaRPr lang="en-US" sz="5600" dirty="0"/>
-          </a:p>
-        </p:txBody>
-      </p:sp>
-      <p:sp>
-        <p:nvSpPr>
-          <p:cNvPr id="5" name="Text 3"/>
-          <p:cNvSpPr/>
-          <p:nvPr/>
-        </p:nvSpPr>
-        <p:spPr>
-          <a:xfrm>
-            <a:off x="594360" y="2788920"/>
-            <a:ext cx="11002975" cy="777240"/>
-          </a:xfrm>
-          <a:prstGeom prst="rect">
-            <a:avLst/>
-          </a:prstGeom>
-          <a:noFill/>
-          <a:ln/>
-        </p:spPr>
-        <p:txBody>
-          <a:bodyPr wrap="square" lIns="0" tIns="0" rIns="0" bIns="0" rtlCol="0" anchor="ctr"/>
-          <a:lstStyle/>
-          <a:p>
-            <a:pPr indent="0" marL="0">
-              <a:buNone/>
-            </a:pPr>
-            <a:r>
-              <a:rPr lang="en-US" sz="1500" dirty="0">
+              <a:t>$0</a:t>
+            </a:r>
+            <a:pPr indent="0" marL="0">
+              <a:buNone/>
+            </a:pPr>
+            <a:r>
+              <a:rPr lang="en-US" sz="1100" dirty="0">
+                <a:solidFill>
+                  <a:srgbClr val="5A5A5A"/>
+                </a:solidFill>
+                <a:latin typeface="Inter" pitchFamily="34" charset="0"/>
+                <a:ea typeface="Inter" pitchFamily="34" charset="-122"/>
+                <a:cs typeface="Inter" pitchFamily="34" charset="-120"/>
+              </a:rPr>
+              <a:t>  MIT-licensed</a:t>
+            </a:r>
+            <a:endParaRPr lang="en-US" sz="3600" dirty="0"/>
+          </a:p>
+        </p:txBody>
+      </p:sp>
+      <p:sp>
+        <p:nvSpPr>
+          <p:cNvPr id="9" name="Text 7"/>
+          <p:cNvSpPr/>
+          <p:nvPr/>
+        </p:nvSpPr>
+        <p:spPr>
+          <a:xfrm>
+            <a:off x="914400" y="4526280"/>
+            <a:ext cx="2875178" cy="365760"/>
+          </a:xfrm>
+          <a:prstGeom prst="rect">
+            <a:avLst/>
+          </a:prstGeom>
+          <a:noFill/>
+          <a:ln/>
+        </p:spPr>
+        <p:txBody>
+          <a:bodyPr wrap="square" lIns="0" tIns="0" rIns="0" bIns="0" rtlCol="0" anchor="ctr"/>
+          <a:lstStyle/>
+          <a:p>
+            <a:pPr indent="0" marL="0">
+              <a:buNone/>
+            </a:pPr>
+            <a:r>
+              <a:rPr lang="en-US" sz="1300" b="1" dirty="0">
+                <a:solidFill>
+                  <a:srgbClr val="1A1A1A"/>
+                </a:solidFill>
+                <a:latin typeface="Inter" pitchFamily="34" charset="0"/>
+                <a:ea typeface="Inter" pitchFamily="34" charset="-122"/>
+                <a:cs typeface="Inter" pitchFamily="34" charset="-120"/>
+              </a:rPr>
+              <a:t>Solo devs, OSS, hobbyists</a:t>
+            </a:r>
+            <a:endParaRPr lang="en-US" sz="1300" dirty="0"/>
+          </a:p>
+        </p:txBody>
+      </p:sp>
+      <p:sp>
+        <p:nvSpPr>
+          <p:cNvPr id="10" name="Text 8"/>
+          <p:cNvSpPr/>
+          <p:nvPr/>
+        </p:nvSpPr>
+        <p:spPr>
+          <a:xfrm>
+            <a:off x="914400" y="4983480"/>
+            <a:ext cx="2875178" cy="914400"/>
+          </a:xfrm>
+          <a:prstGeom prst="rect">
+            <a:avLst/>
+          </a:prstGeom>
+          <a:noFill/>
+          <a:ln/>
+        </p:spPr>
+        <p:txBody>
+          <a:bodyPr wrap="square" lIns="0" tIns="0" rIns="0" bIns="0" rtlCol="0" anchor="ctr"/>
+          <a:lstStyle/>
+          <a:p>
+            <a:pPr marL="342900" indent="-342900">
+              <a:spcAft>
+                <a:spcPts val="400"/>
+              </a:spcAft>
+              <a:buSzPct val="100000"/>
+              <a:buChar char="→"/>
+            </a:pPr>
+            <a:r>
+              <a:rPr lang="en-US" sz="1100" dirty="0">
                 <a:solidFill>
                   <a:srgbClr val="3A3A3A"/>
                 </a:solidFill>
@@ -7578,457 +7593,93 @@
                 <a:ea typeface="Inter" pitchFamily="34" charset="-122"/>
                 <a:cs typeface="Inter" pitchFamily="34" charset="-120"/>
               </a:rPr>
-              <a:t>Cursor at $9B revenue/valuation proves AI-dev-infra is a real market. We sell the layer above it — to a different buyer, at a different ACV (per-team, not per-seat).</a:t>
-            </a:r>
-            <a:endParaRPr lang="en-US" sz="1500" dirty="0"/>
-          </a:p>
-        </p:txBody>
-      </p:sp>
-      <p:sp>
-        <p:nvSpPr>
-          <p:cNvPr id="6" name="Text 4"/>
-          <p:cNvSpPr/>
-          <p:nvPr/>
-        </p:nvSpPr>
-        <p:spPr>
-          <a:xfrm>
-            <a:off x="594360" y="3703320"/>
-            <a:ext cx="5943600" cy="365760"/>
-          </a:xfrm>
-          <a:prstGeom prst="rect">
-            <a:avLst/>
-          </a:prstGeom>
-          <a:noFill/>
-          <a:ln/>
-        </p:spPr>
-        <p:txBody>
-          <a:bodyPr wrap="square" lIns="0" tIns="0" rIns="0" bIns="0" rtlCol="0" anchor="ctr"/>
-          <a:lstStyle/>
-          <a:p>
-            <a:pPr indent="0" marL="0">
-              <a:buNone/>
-            </a:pPr>
-            <a:r>
-              <a:rPr lang="en-US" sz="1400" dirty="0">
-                <a:solidFill>
-                  <a:srgbClr val="1A1A1A"/>
-                </a:solidFill>
-                <a:latin typeface="Inter" pitchFamily="34" charset="0"/>
-                <a:ea typeface="Inter" pitchFamily="34" charset="-122"/>
-                <a:cs typeface="Inter" pitchFamily="34" charset="-120"/>
-              </a:rPr>
-              <a:t>Developers worldwide</a:t>
-            </a:r>
-            <a:endParaRPr lang="en-US" sz="1400" dirty="0"/>
-          </a:p>
-        </p:txBody>
-      </p:sp>
-      <p:sp>
-        <p:nvSpPr>
-          <p:cNvPr id="7" name="Text 5"/>
-          <p:cNvSpPr/>
-          <p:nvPr/>
-        </p:nvSpPr>
-        <p:spPr>
-          <a:xfrm>
-            <a:off x="594360" y="3995928"/>
-            <a:ext cx="5943600" cy="182880"/>
-          </a:xfrm>
-          <a:prstGeom prst="rect">
-            <a:avLst/>
-          </a:prstGeom>
-          <a:noFill/>
-          <a:ln/>
-        </p:spPr>
-        <p:txBody>
-          <a:bodyPr wrap="square" lIns="0" tIns="0" rIns="0" bIns="0" rtlCol="0" anchor="ctr"/>
-          <a:lstStyle/>
-          <a:p>
-            <a:pPr indent="0" marL="0">
-              <a:buNone/>
-            </a:pPr>
-            <a:r>
-              <a:rPr lang="en-US" sz="900" dirty="0">
-                <a:solidFill>
-                  <a:srgbClr val="707070"/>
-                </a:solidFill>
-                <a:latin typeface="JetBrains Mono" pitchFamily="34" charset="0"/>
-                <a:ea typeface="JetBrains Mono" pitchFamily="34" charset="-122"/>
-                <a:cs typeface="JetBrains Mono" pitchFamily="34" charset="-120"/>
-              </a:rPr>
-              <a:t>Stack Overflow Dev Survey 2025</a:t>
-            </a:r>
-            <a:endParaRPr lang="en-US" sz="900" dirty="0"/>
-          </a:p>
-        </p:txBody>
-      </p:sp>
-      <p:sp>
-        <p:nvSpPr>
-          <p:cNvPr id="8" name="Text 6"/>
-          <p:cNvSpPr/>
-          <p:nvPr/>
-        </p:nvSpPr>
-        <p:spPr>
-          <a:xfrm>
-            <a:off x="6217920" y="3703320"/>
-            <a:ext cx="1371600" cy="365760"/>
-          </a:xfrm>
-          <a:prstGeom prst="rect">
-            <a:avLst/>
-          </a:prstGeom>
-          <a:noFill/>
-          <a:ln/>
-        </p:spPr>
-        <p:txBody>
-          <a:bodyPr wrap="square" lIns="0" tIns="0" rIns="0" bIns="0" rtlCol="0" anchor="ctr"/>
-          <a:lstStyle/>
-          <a:p>
-            <a:pPr algn="r" indent="0" marL="0">
-              <a:buNone/>
-            </a:pPr>
-            <a:r>
-              <a:rPr lang="en-US" sz="2000" b="1" dirty="0">
-                <a:solidFill>
-                  <a:srgbClr val="0A0A0A"/>
-                </a:solidFill>
-                <a:latin typeface="JetBrains Mono" pitchFamily="34" charset="0"/>
-                <a:ea typeface="JetBrains Mono" pitchFamily="34" charset="-122"/>
-                <a:cs typeface="JetBrains Mono" pitchFamily="34" charset="-120"/>
-              </a:rPr>
-              <a:t>30M</a:t>
-            </a:r>
-            <a:endParaRPr lang="en-US" sz="2000" dirty="0"/>
-          </a:p>
-        </p:txBody>
-      </p:sp>
-      <p:sp>
-        <p:nvSpPr>
-          <p:cNvPr id="9" name="Text 7"/>
-          <p:cNvSpPr/>
-          <p:nvPr/>
-        </p:nvSpPr>
-        <p:spPr>
-          <a:xfrm>
-            <a:off x="594360" y="4206240"/>
-            <a:ext cx="5943600" cy="365760"/>
-          </a:xfrm>
-          <a:prstGeom prst="rect">
-            <a:avLst/>
-          </a:prstGeom>
-          <a:noFill/>
-          <a:ln/>
-        </p:spPr>
-        <p:txBody>
-          <a:bodyPr wrap="square" lIns="0" tIns="0" rIns="0" bIns="0" rtlCol="0" anchor="ctr"/>
-          <a:lstStyle/>
-          <a:p>
-            <a:pPr indent="0" marL="0">
-              <a:buNone/>
-            </a:pPr>
-            <a:r>
-              <a:rPr lang="en-US" sz="1400" dirty="0">
-                <a:solidFill>
-                  <a:srgbClr val="1A1A1A"/>
-                </a:solidFill>
-                <a:latin typeface="Inter" pitchFamily="34" charset="0"/>
-                <a:ea typeface="Inter" pitchFamily="34" charset="-122"/>
-                <a:cs typeface="Inter" pitchFamily="34" charset="-120"/>
-              </a:rPr>
-              <a:t>Using AI coding tools (~33%)</a:t>
-            </a:r>
-            <a:endParaRPr lang="en-US" sz="1400" dirty="0"/>
-          </a:p>
-        </p:txBody>
-      </p:sp>
-      <p:sp>
-        <p:nvSpPr>
-          <p:cNvPr id="10" name="Text 8"/>
-          <p:cNvSpPr/>
-          <p:nvPr/>
-        </p:nvSpPr>
-        <p:spPr>
-          <a:xfrm>
-            <a:off x="594360" y="4498848"/>
-            <a:ext cx="5943600" cy="182880"/>
-          </a:xfrm>
-          <a:prstGeom prst="rect">
-            <a:avLst/>
-          </a:prstGeom>
-          <a:noFill/>
-          <a:ln/>
-        </p:spPr>
-        <p:txBody>
-          <a:bodyPr wrap="square" lIns="0" tIns="0" rIns="0" bIns="0" rtlCol="0" anchor="ctr"/>
-          <a:lstStyle/>
-          <a:p>
-            <a:pPr indent="0" marL="0">
-              <a:buNone/>
-            </a:pPr>
-            <a:r>
-              <a:rPr lang="en-US" sz="900" dirty="0">
-                <a:solidFill>
-                  <a:srgbClr val="707070"/>
-                </a:solidFill>
-                <a:latin typeface="JetBrains Mono" pitchFamily="34" charset="0"/>
-                <a:ea typeface="JetBrains Mono" pitchFamily="34" charset="-122"/>
-                <a:cs typeface="JetBrains Mono" pitchFamily="34" charset="-120"/>
-              </a:rPr>
-              <a:t>JetBrains 2025; GitHub Octoverse</a:t>
-            </a:r>
-            <a:endParaRPr lang="en-US" sz="900" dirty="0"/>
-          </a:p>
-        </p:txBody>
-      </p:sp>
-      <p:sp>
-        <p:nvSpPr>
-          <p:cNvPr id="11" name="Text 9"/>
-          <p:cNvSpPr/>
-          <p:nvPr/>
-        </p:nvSpPr>
-        <p:spPr>
-          <a:xfrm>
-            <a:off x="6217920" y="4206240"/>
-            <a:ext cx="1371600" cy="365760"/>
-          </a:xfrm>
-          <a:prstGeom prst="rect">
-            <a:avLst/>
-          </a:prstGeom>
-          <a:noFill/>
-          <a:ln/>
-        </p:spPr>
-        <p:txBody>
-          <a:bodyPr wrap="square" lIns="0" tIns="0" rIns="0" bIns="0" rtlCol="0" anchor="ctr"/>
-          <a:lstStyle/>
-          <a:p>
-            <a:pPr algn="r" indent="0" marL="0">
-              <a:buNone/>
-            </a:pPr>
-            <a:r>
-              <a:rPr lang="en-US" sz="2000" b="1" dirty="0">
-                <a:solidFill>
-                  <a:srgbClr val="0A0A0A"/>
-                </a:solidFill>
-                <a:latin typeface="JetBrains Mono" pitchFamily="34" charset="0"/>
-                <a:ea typeface="JetBrains Mono" pitchFamily="34" charset="-122"/>
-                <a:cs typeface="JetBrains Mono" pitchFamily="34" charset="-120"/>
-              </a:rPr>
-              <a:t>10M</a:t>
-            </a:r>
-            <a:endParaRPr lang="en-US" sz="2000" dirty="0"/>
-          </a:p>
-        </p:txBody>
-      </p:sp>
-      <p:sp>
-        <p:nvSpPr>
-          <p:cNvPr id="12" name="Text 10"/>
-          <p:cNvSpPr/>
-          <p:nvPr/>
-        </p:nvSpPr>
-        <p:spPr>
-          <a:xfrm>
-            <a:off x="594360" y="4709160"/>
-            <a:ext cx="5943600" cy="365760"/>
-          </a:xfrm>
-          <a:prstGeom prst="rect">
-            <a:avLst/>
-          </a:prstGeom>
-          <a:noFill/>
-          <a:ln/>
-        </p:spPr>
-        <p:txBody>
-          <a:bodyPr wrap="square" lIns="0" tIns="0" rIns="0" bIns="0" rtlCol="0" anchor="ctr"/>
-          <a:lstStyle/>
-          <a:p>
-            <a:pPr indent="0" marL="0">
-              <a:buNone/>
-            </a:pPr>
-            <a:r>
-              <a:rPr lang="en-US" sz="1400" dirty="0">
-                <a:solidFill>
-                  <a:srgbClr val="1A1A1A"/>
-                </a:solidFill>
-                <a:latin typeface="Inter" pitchFamily="34" charset="0"/>
-                <a:ea typeface="Inter" pitchFamily="34" charset="-122"/>
-                <a:cs typeface="Inter" pitchFamily="34" charset="-120"/>
-              </a:rPr>
-              <a:t>Multi-cycle agentic generation (~30%)</a:t>
-            </a:r>
-            <a:endParaRPr lang="en-US" sz="1400" dirty="0"/>
-          </a:p>
-        </p:txBody>
-      </p:sp>
-      <p:sp>
-        <p:nvSpPr>
-          <p:cNvPr id="13" name="Text 11"/>
-          <p:cNvSpPr/>
-          <p:nvPr/>
-        </p:nvSpPr>
-        <p:spPr>
-          <a:xfrm>
-            <a:off x="594360" y="5001768"/>
-            <a:ext cx="5943600" cy="182880"/>
-          </a:xfrm>
-          <a:prstGeom prst="rect">
-            <a:avLst/>
-          </a:prstGeom>
-          <a:noFill/>
-          <a:ln/>
-        </p:spPr>
-        <p:txBody>
-          <a:bodyPr wrap="square" lIns="0" tIns="0" rIns="0" bIns="0" rtlCol="0" anchor="ctr"/>
-          <a:lstStyle/>
-          <a:p>
-            <a:pPr indent="0" marL="0">
-              <a:buNone/>
-            </a:pPr>
-            <a:r>
-              <a:rPr lang="en-US" sz="900" dirty="0">
-                <a:solidFill>
-                  <a:srgbClr val="707070"/>
-                </a:solidFill>
-                <a:latin typeface="JetBrains Mono" pitchFamily="34" charset="0"/>
-                <a:ea typeface="JetBrains Mono" pitchFamily="34" charset="-122"/>
-                <a:cs typeface="JetBrains Mono" pitchFamily="34" charset="-120"/>
-              </a:rPr>
-              <a:t>the cohort that hits drift</a:t>
-            </a:r>
-            <a:endParaRPr lang="en-US" sz="900" dirty="0"/>
-          </a:p>
-        </p:txBody>
-      </p:sp>
-      <p:sp>
-        <p:nvSpPr>
-          <p:cNvPr id="14" name="Text 12"/>
-          <p:cNvSpPr/>
-          <p:nvPr/>
-        </p:nvSpPr>
-        <p:spPr>
-          <a:xfrm>
-            <a:off x="6217920" y="4709160"/>
-            <a:ext cx="1371600" cy="365760"/>
-          </a:xfrm>
-          <a:prstGeom prst="rect">
-            <a:avLst/>
-          </a:prstGeom>
-          <a:noFill/>
-          <a:ln/>
-        </p:spPr>
-        <p:txBody>
-          <a:bodyPr wrap="square" lIns="0" tIns="0" rIns="0" bIns="0" rtlCol="0" anchor="ctr"/>
-          <a:lstStyle/>
-          <a:p>
-            <a:pPr algn="r" indent="0" marL="0">
-              <a:buNone/>
-            </a:pPr>
-            <a:r>
-              <a:rPr lang="en-US" sz="2000" b="1" dirty="0">
-                <a:solidFill>
-                  <a:srgbClr val="0A0A0A"/>
-                </a:solidFill>
-                <a:latin typeface="JetBrains Mono" pitchFamily="34" charset="0"/>
-                <a:ea typeface="JetBrains Mono" pitchFamily="34" charset="-122"/>
-                <a:cs typeface="JetBrains Mono" pitchFamily="34" charset="-120"/>
-              </a:rPr>
-              <a:t>3M</a:t>
-            </a:r>
-            <a:endParaRPr lang="en-US" sz="2000" dirty="0"/>
-          </a:p>
-        </p:txBody>
-      </p:sp>
-      <p:sp>
-        <p:nvSpPr>
-          <p:cNvPr id="15" name="Text 13"/>
-          <p:cNvSpPr/>
-          <p:nvPr/>
-        </p:nvSpPr>
-        <p:spPr>
-          <a:xfrm>
-            <a:off x="594360" y="5212080"/>
-            <a:ext cx="5943600" cy="365760"/>
-          </a:xfrm>
-          <a:prstGeom prst="rect">
-            <a:avLst/>
-          </a:prstGeom>
-          <a:noFill/>
-          <a:ln/>
-        </p:spPr>
-        <p:txBody>
-          <a:bodyPr wrap="square" lIns="0" tIns="0" rIns="0" bIns="0" rtlCol="0" anchor="ctr"/>
-          <a:lstStyle/>
-          <a:p>
-            <a:pPr indent="0" marL="0">
-              <a:buNone/>
-            </a:pPr>
-            <a:r>
-              <a:rPr lang="en-US" sz="1400" dirty="0">
-                <a:solidFill>
-                  <a:srgbClr val="1A1A1A"/>
-                </a:solidFill>
-                <a:latin typeface="Inter" pitchFamily="34" charset="0"/>
-                <a:ea typeface="Inter" pitchFamily="34" charset="-122"/>
-                <a:cs typeface="Inter" pitchFamily="34" charset="-120"/>
-              </a:rPr>
-              <a:t>× $720 / yr (mid-tier B2B SaaS)</a:t>
-            </a:r>
-            <a:endParaRPr lang="en-US" sz="1400" dirty="0"/>
-          </a:p>
-        </p:txBody>
-      </p:sp>
-      <p:sp>
-        <p:nvSpPr>
-          <p:cNvPr id="16" name="Text 14"/>
-          <p:cNvSpPr/>
-          <p:nvPr/>
-        </p:nvSpPr>
-        <p:spPr>
-          <a:xfrm>
-            <a:off x="6217920" y="5212080"/>
-            <a:ext cx="1371600" cy="365760"/>
-          </a:xfrm>
-          <a:prstGeom prst="rect">
-            <a:avLst/>
-          </a:prstGeom>
-          <a:noFill/>
-          <a:ln/>
-        </p:spPr>
-        <p:txBody>
-          <a:bodyPr wrap="square" lIns="0" tIns="0" rIns="0" bIns="0" rtlCol="0" anchor="ctr"/>
-          <a:lstStyle/>
-          <a:p>
-            <a:pPr algn="r" indent="0" marL="0">
-              <a:buNone/>
-            </a:pPr>
-            <a:r>
-              <a:rPr lang="en-US" sz="2000" b="1" dirty="0">
-                <a:solidFill>
-                  <a:srgbClr val="0A0A0A"/>
-                </a:solidFill>
-                <a:latin typeface="JetBrains Mono" pitchFamily="34" charset="0"/>
-                <a:ea typeface="JetBrains Mono" pitchFamily="34" charset="-122"/>
-                <a:cs typeface="JetBrains Mono" pitchFamily="34" charset="-120"/>
-              </a:rPr>
-              <a:t>$720</a:t>
-            </a:r>
-            <a:endParaRPr lang="en-US" sz="2000" dirty="0"/>
-          </a:p>
-        </p:txBody>
-      </p:sp>
-      <p:sp>
-        <p:nvSpPr>
-          <p:cNvPr id="17" name="Shape 15"/>
-          <p:cNvSpPr/>
-          <p:nvPr/>
-        </p:nvSpPr>
-        <p:spPr>
-          <a:xfrm>
-            <a:off x="594360" y="5852160"/>
-            <a:ext cx="6995160" cy="0"/>
-          </a:xfrm>
-          <a:prstGeom prst="line">
-            <a:avLst/>
-          </a:prstGeom>
-          <a:noFill/>
-          <a:ln w="25400">
+              <a:t>vibe + pm modes</a:t>
+            </a:r>
+            <a:endParaRPr lang="en-US" sz="1100" dirty="0"/>
+          </a:p>
+          <a:p>
+            <a:pPr marL="342900" indent="-342900">
+              <a:spcAft>
+                <a:spcPts val="400"/>
+              </a:spcAft>
+              <a:buSzPct val="100000"/>
+              <a:buChar char="→"/>
+            </a:pPr>
+            <a:r>
+              <a:rPr lang="en-US" sz="1100" dirty="0">
+                <a:solidFill>
+                  <a:srgbClr val="3A3A3A"/>
+                </a:solidFill>
+                <a:latin typeface="Inter" pitchFamily="34" charset="0"/>
+                <a:ea typeface="Inter" pitchFamily="34" charset="-122"/>
+                <a:cs typeface="Inter" pitchFamily="34" charset="-120"/>
+              </a:rPr>
+              <a:t>Methodology + Skill</a:t>
+            </a:r>
+            <a:endParaRPr lang="en-US" sz="1100" dirty="0"/>
+          </a:p>
+          <a:p>
+            <a:pPr marL="342900" indent="-342900">
+              <a:spcAft>
+                <a:spcPts val="400"/>
+              </a:spcAft>
+              <a:buSzPct val="100000"/>
+              <a:buChar char="→"/>
+            </a:pPr>
+            <a:r>
+              <a:rPr lang="en-US" sz="1100" dirty="0">
+                <a:solidFill>
+                  <a:srgbClr val="3A3A3A"/>
+                </a:solidFill>
+                <a:latin typeface="Inter" pitchFamily="34" charset="0"/>
+                <a:ea typeface="Inter" pitchFamily="34" charset="-122"/>
+                <a:cs typeface="Inter" pitchFamily="34" charset="-120"/>
+              </a:rPr>
+              <a:t>Self-hosted engine</a:t>
+            </a:r>
+            <a:endParaRPr lang="en-US" sz="1100" dirty="0"/>
+          </a:p>
+          <a:p>
+            <a:pPr marL="342900" indent="-342900">
+              <a:spcAft>
+                <a:spcPts val="400"/>
+              </a:spcAft>
+              <a:buSzPct val="100000"/>
+              <a:buChar char="→"/>
+            </a:pPr>
+            <a:r>
+              <a:rPr lang="en-US" sz="1100" dirty="0">
+                <a:solidFill>
+                  <a:srgbClr val="3A3A3A"/>
+                </a:solidFill>
+                <a:latin typeface="Inter" pitchFamily="34" charset="0"/>
+                <a:ea typeface="Inter" pitchFamily="34" charset="-122"/>
+                <a:cs typeface="Inter" pitchFamily="34" charset="-120"/>
+              </a:rPr>
+              <a:t>100 generations / mo</a:t>
+            </a:r>
+            <a:endParaRPr lang="en-US" sz="1100" dirty="0"/>
+          </a:p>
+        </p:txBody>
+      </p:sp>
+      <p:sp>
+        <p:nvSpPr>
+          <p:cNvPr id="11" name="Shape 9"/>
+          <p:cNvSpPr/>
+          <p:nvPr/>
+        </p:nvSpPr>
+        <p:spPr>
+          <a:xfrm>
+            <a:off x="4338218" y="3108960"/>
+            <a:ext cx="3515258" cy="2926080"/>
+          </a:xfrm>
+          <a:prstGeom prst="rect">
+            <a:avLst/>
+          </a:prstGeom>
+          <a:solidFill>
+            <a:srgbClr val="FBE6EA"/>
+          </a:solidFill>
+          <a:ln w="12700">
             <a:solidFill>
               <a:srgbClr val="E84057"/>
             </a:solidFill>
@@ -8038,118 +7689,414 @@
       </p:sp>
       <p:sp>
         <p:nvSpPr>
-          <p:cNvPr id="18" name="Text 16"/>
-          <p:cNvSpPr/>
-          <p:nvPr/>
-        </p:nvSpPr>
-        <p:spPr>
-          <a:xfrm>
-            <a:off x="594360" y="5943600"/>
-            <a:ext cx="5943600" cy="457200"/>
-          </a:xfrm>
-          <a:prstGeom prst="rect">
-            <a:avLst/>
-          </a:prstGeom>
-          <a:noFill/>
-          <a:ln/>
-        </p:spPr>
-        <p:txBody>
-          <a:bodyPr wrap="square" lIns="0" tIns="0" rIns="0" bIns="0" rtlCol="0" anchor="ctr"/>
-          <a:lstStyle/>
-          <a:p>
-            <a:pPr indent="0" marL="0">
-              <a:buNone/>
-            </a:pPr>
-            <a:r>
-              <a:rPr lang="en-US" sz="1600" b="1" dirty="0">
-                <a:solidFill>
-                  <a:srgbClr val="0A0A0A"/>
-                </a:solidFill>
-                <a:latin typeface="Inter" pitchFamily="34" charset="0"/>
-                <a:ea typeface="Inter" pitchFamily="34" charset="-122"/>
-                <a:cs typeface="Inter" pitchFamily="34" charset="-120"/>
-              </a:rPr>
-              <a:t>SAM at saturation</a:t>
-            </a:r>
-            <a:endParaRPr lang="en-US" sz="1600" dirty="0"/>
-          </a:p>
-        </p:txBody>
-      </p:sp>
-      <p:sp>
-        <p:nvSpPr>
-          <p:cNvPr id="19" name="Text 17"/>
-          <p:cNvSpPr/>
-          <p:nvPr/>
-        </p:nvSpPr>
-        <p:spPr>
-          <a:xfrm>
-            <a:off x="6217920" y="5897880"/>
-            <a:ext cx="1371600" cy="548640"/>
-          </a:xfrm>
-          <a:prstGeom prst="rect">
-            <a:avLst/>
-          </a:prstGeom>
-          <a:noFill/>
-          <a:ln/>
-        </p:spPr>
-        <p:txBody>
-          <a:bodyPr wrap="square" lIns="0" tIns="0" rIns="0" bIns="0" rtlCol="0" anchor="ctr"/>
-          <a:lstStyle/>
-          <a:p>
-            <a:pPr algn="r" indent="0" marL="0">
-              <a:buNone/>
-            </a:pPr>
-            <a:r>
-              <a:rPr lang="en-US" sz="2800" b="1" i="1" spc="-100" kern="0" dirty="0">
-                <a:solidFill>
-                  <a:srgbClr val="E84057"/>
+          <p:cNvPr id="12" name="Shape 10"/>
+          <p:cNvSpPr/>
+          <p:nvPr/>
+        </p:nvSpPr>
+        <p:spPr>
+          <a:xfrm>
+            <a:off x="4338218" y="3108960"/>
+            <a:ext cx="54864" cy="2926080"/>
+          </a:xfrm>
+          <a:prstGeom prst="rect">
+            <a:avLst/>
+          </a:prstGeom>
+          <a:solidFill>
+            <a:srgbClr val="E84057"/>
+          </a:solidFill>
+          <a:ln/>
+        </p:spPr>
+      </p:sp>
+      <p:sp>
+        <p:nvSpPr>
+          <p:cNvPr id="13" name="Text 11"/>
+          <p:cNvSpPr/>
+          <p:nvPr/>
+        </p:nvSpPr>
+        <p:spPr>
+          <a:xfrm>
+            <a:off x="4658258" y="3383280"/>
+            <a:ext cx="2875178" cy="274320"/>
+          </a:xfrm>
+          <a:prstGeom prst="rect">
+            <a:avLst/>
+          </a:prstGeom>
+          <a:noFill/>
+          <a:ln/>
+        </p:spPr>
+        <p:txBody>
+          <a:bodyPr wrap="square" lIns="0" tIns="0" rIns="0" bIns="0" rtlCol="0" anchor="ctr"/>
+          <a:lstStyle/>
+          <a:p>
+            <a:pPr indent="0" marL="0">
+              <a:buNone/>
+            </a:pPr>
+            <a:r>
+              <a:rPr lang="en-US" sz="900" b="1" spc="100" kern="0" dirty="0">
+                <a:solidFill>
+                  <a:srgbClr val="C43A50"/>
+                </a:solidFill>
+                <a:latin typeface="JetBrains Mono" pitchFamily="34" charset="0"/>
+                <a:ea typeface="JetBrains Mono" pitchFamily="34" charset="-122"/>
+                <a:cs typeface="JetBrains Mono" pitchFamily="34" charset="-120"/>
+              </a:rPr>
+              <a:t>TEAM · RECOMMENDED</a:t>
+            </a:r>
+            <a:endParaRPr lang="en-US" sz="900" dirty="0"/>
+          </a:p>
+        </p:txBody>
+      </p:sp>
+      <p:sp>
+        <p:nvSpPr>
+          <p:cNvPr id="14" name="Text 12"/>
+          <p:cNvSpPr/>
+          <p:nvPr/>
+        </p:nvSpPr>
+        <p:spPr>
+          <a:xfrm>
+            <a:off x="4658258" y="3749040"/>
+            <a:ext cx="2875178" cy="640080"/>
+          </a:xfrm>
+          <a:prstGeom prst="rect">
+            <a:avLst/>
+          </a:prstGeom>
+          <a:noFill/>
+          <a:ln/>
+        </p:spPr>
+        <p:txBody>
+          <a:bodyPr wrap="square" lIns="0" tIns="0" rIns="0" bIns="0" rtlCol="0" anchor="ctr"/>
+          <a:lstStyle/>
+          <a:p>
+            <a:pPr indent="0" marL="0">
+              <a:buNone/>
+            </a:pPr>
+            <a:r>
+              <a:rPr lang="en-US" sz="3600" b="1" i="1" dirty="0">
+                <a:solidFill>
+                  <a:srgbClr val="C43A50"/>
                 </a:solidFill>
                 <a:latin typeface="Fraunces" pitchFamily="34" charset="0"/>
                 <a:ea typeface="Fraunces" pitchFamily="34" charset="-122"/>
                 <a:cs typeface="Fraunces" pitchFamily="34" charset="-120"/>
               </a:rPr>
-              <a:t>$2.2B</a:t>
-            </a:r>
-            <a:endParaRPr lang="en-US" sz="2800" dirty="0"/>
-          </a:p>
-        </p:txBody>
-      </p:sp>
-      <p:sp>
-        <p:nvSpPr>
-          <p:cNvPr id="20" name="Text 18"/>
-          <p:cNvSpPr/>
-          <p:nvPr/>
-        </p:nvSpPr>
-        <p:spPr>
-          <a:xfrm>
-            <a:off x="8229600" y="3703320"/>
-            <a:ext cx="3367735" cy="1188720"/>
-          </a:xfrm>
-          <a:prstGeom prst="rect">
-            <a:avLst/>
-          </a:prstGeom>
-          <a:noFill/>
-          <a:ln/>
-        </p:spPr>
-        <p:txBody>
-          <a:bodyPr wrap="square" lIns="0" tIns="0" rIns="0" bIns="0" rtlCol="0" anchor="ctr"/>
-          <a:lstStyle/>
-          <a:p>
-            <a:pPr algn="l" indent="0" marL="0">
-              <a:buNone/>
-            </a:pPr>
-            <a:r>
-              <a:rPr lang="en-US" sz="8800" b="1" i="1" spc="-300" kern="0" dirty="0">
-                <a:solidFill>
-                  <a:srgbClr val="E84057"/>
+              <a:t>$30</a:t>
+            </a:r>
+            <a:pPr indent="0" marL="0">
+              <a:buNone/>
+            </a:pPr>
+            <a:r>
+              <a:rPr lang="en-US" sz="1100" dirty="0">
+                <a:solidFill>
+                  <a:srgbClr val="5A5A5A"/>
+                </a:solidFill>
+                <a:latin typeface="Inter" pitchFamily="34" charset="0"/>
+                <a:ea typeface="Inter" pitchFamily="34" charset="-122"/>
+                <a:cs typeface="Inter" pitchFamily="34" charset="-120"/>
+              </a:rPr>
+              <a:t>  / seat / month</a:t>
+            </a:r>
+            <a:endParaRPr lang="en-US" sz="3600" dirty="0"/>
+          </a:p>
+        </p:txBody>
+      </p:sp>
+      <p:sp>
+        <p:nvSpPr>
+          <p:cNvPr id="15" name="Text 13"/>
+          <p:cNvSpPr/>
+          <p:nvPr/>
+        </p:nvSpPr>
+        <p:spPr>
+          <a:xfrm>
+            <a:off x="4658258" y="4526280"/>
+            <a:ext cx="2875178" cy="365760"/>
+          </a:xfrm>
+          <a:prstGeom prst="rect">
+            <a:avLst/>
+          </a:prstGeom>
+          <a:noFill/>
+          <a:ln/>
+        </p:spPr>
+        <p:txBody>
+          <a:bodyPr wrap="square" lIns="0" tIns="0" rIns="0" bIns="0" rtlCol="0" anchor="ctr"/>
+          <a:lstStyle/>
+          <a:p>
+            <a:pPr indent="0" marL="0">
+              <a:buNone/>
+            </a:pPr>
+            <a:r>
+              <a:rPr lang="en-US" sz="1300" b="1" dirty="0">
+                <a:solidFill>
+                  <a:srgbClr val="1A1A1A"/>
+                </a:solidFill>
+                <a:latin typeface="Inter" pitchFamily="34" charset="0"/>
+                <a:ea typeface="Inter" pitchFamily="34" charset="-122"/>
+                <a:cs typeface="Inter" pitchFamily="34" charset="-120"/>
+              </a:rPr>
+              <a:t>Engineering teams of 5–50</a:t>
+            </a:r>
+            <a:endParaRPr lang="en-US" sz="1300" dirty="0"/>
+          </a:p>
+        </p:txBody>
+      </p:sp>
+      <p:sp>
+        <p:nvSpPr>
+          <p:cNvPr id="16" name="Text 14"/>
+          <p:cNvSpPr/>
+          <p:nvPr/>
+        </p:nvSpPr>
+        <p:spPr>
+          <a:xfrm>
+            <a:off x="4658258" y="4983480"/>
+            <a:ext cx="2875178" cy="914400"/>
+          </a:xfrm>
+          <a:prstGeom prst="rect">
+            <a:avLst/>
+          </a:prstGeom>
+          <a:noFill/>
+          <a:ln/>
+        </p:spPr>
+        <p:txBody>
+          <a:bodyPr wrap="square" lIns="0" tIns="0" rIns="0" bIns="0" rtlCol="0" anchor="ctr"/>
+          <a:lstStyle/>
+          <a:p>
+            <a:pPr marL="342900" indent="-342900">
+              <a:spcAft>
+                <a:spcPts val="400"/>
+              </a:spcAft>
+              <a:buSzPct val="100000"/>
+              <a:buChar char="→"/>
+            </a:pPr>
+            <a:r>
+              <a:rPr lang="en-US" sz="1100" dirty="0">
+                <a:solidFill>
+                  <a:srgbClr val="3A3A3A"/>
+                </a:solidFill>
+                <a:latin typeface="Inter" pitchFamily="34" charset="0"/>
+                <a:ea typeface="Inter" pitchFamily="34" charset="-122"/>
+                <a:cs typeface="Inter" pitchFamily="34" charset="-120"/>
+              </a:rPr>
+              <a:t>Full pm / dev / ux modes</a:t>
+            </a:r>
+            <a:endParaRPr lang="en-US" sz="1100" dirty="0"/>
+          </a:p>
+          <a:p>
+            <a:pPr marL="342900" indent="-342900">
+              <a:spcAft>
+                <a:spcPts val="400"/>
+              </a:spcAft>
+              <a:buSzPct val="100000"/>
+              <a:buChar char="→"/>
+            </a:pPr>
+            <a:r>
+              <a:rPr lang="en-US" sz="1100" dirty="0">
+                <a:solidFill>
+                  <a:srgbClr val="3A3A3A"/>
+                </a:solidFill>
+                <a:latin typeface="Inter" pitchFamily="34" charset="0"/>
+                <a:ea typeface="Inter" pitchFamily="34" charset="-122"/>
+                <a:cs typeface="Inter" pitchFamily="34" charset="-120"/>
+              </a:rPr>
+              <a:t>Hosted engine</a:t>
+            </a:r>
+            <a:endParaRPr lang="en-US" sz="1100" dirty="0"/>
+          </a:p>
+          <a:p>
+            <a:pPr marL="342900" indent="-342900">
+              <a:spcAft>
+                <a:spcPts val="400"/>
+              </a:spcAft>
+              <a:buSzPct val="100000"/>
+              <a:buChar char="→"/>
+            </a:pPr>
+            <a:r>
+              <a:rPr lang="en-US" sz="1100" dirty="0">
+                <a:solidFill>
+                  <a:srgbClr val="3A3A3A"/>
+                </a:solidFill>
+                <a:latin typeface="Inter" pitchFamily="34" charset="0"/>
+                <a:ea typeface="Inter" pitchFamily="34" charset="-122"/>
+                <a:cs typeface="Inter" pitchFamily="34" charset="-120"/>
+              </a:rPr>
+              <a:t>Audit logs + drift telemetry</a:t>
+            </a:r>
+            <a:endParaRPr lang="en-US" sz="1100" dirty="0"/>
+          </a:p>
+          <a:p>
+            <a:pPr marL="342900" indent="-342900">
+              <a:spcAft>
+                <a:spcPts val="400"/>
+              </a:spcAft>
+              <a:buSzPct val="100000"/>
+              <a:buChar char="→"/>
+            </a:pPr>
+            <a:r>
+              <a:rPr lang="en-US" sz="1100" dirty="0">
+                <a:solidFill>
+                  <a:srgbClr val="3A3A3A"/>
+                </a:solidFill>
+                <a:latin typeface="Inter" pitchFamily="34" charset="0"/>
+                <a:ea typeface="Inter" pitchFamily="34" charset="-122"/>
+                <a:cs typeface="Inter" pitchFamily="34" charset="-120"/>
+              </a:rPr>
+              <a:t>Unlimited generations</a:t>
+            </a:r>
+            <a:endParaRPr lang="en-US" sz="1100" dirty="0"/>
+          </a:p>
+        </p:txBody>
+      </p:sp>
+      <p:sp>
+        <p:nvSpPr>
+          <p:cNvPr id="17" name="Shape 15"/>
+          <p:cNvSpPr/>
+          <p:nvPr/>
+        </p:nvSpPr>
+        <p:spPr>
+          <a:xfrm>
+            <a:off x="8082077" y="3108960"/>
+            <a:ext cx="3515258" cy="2926080"/>
+          </a:xfrm>
+          <a:prstGeom prst="rect">
+            <a:avLst/>
+          </a:prstGeom>
+          <a:solidFill>
+            <a:srgbClr val="FFFFFF"/>
+          </a:solidFill>
+          <a:ln w="9525">
+            <a:solidFill>
+              <a:srgbClr val="E6E4E0"/>
+            </a:solidFill>
+            <a:prstDash val="solid"/>
+          </a:ln>
+        </p:spPr>
+      </p:sp>
+      <p:sp>
+        <p:nvSpPr>
+          <p:cNvPr id="18" name="Text 16"/>
+          <p:cNvSpPr/>
+          <p:nvPr/>
+        </p:nvSpPr>
+        <p:spPr>
+          <a:xfrm>
+            <a:off x="8402117" y="3383280"/>
+            <a:ext cx="2875178" cy="274320"/>
+          </a:xfrm>
+          <a:prstGeom prst="rect">
+            <a:avLst/>
+          </a:prstGeom>
+          <a:noFill/>
+          <a:ln/>
+        </p:spPr>
+        <p:txBody>
+          <a:bodyPr wrap="square" lIns="0" tIns="0" rIns="0" bIns="0" rtlCol="0" anchor="ctr"/>
+          <a:lstStyle/>
+          <a:p>
+            <a:pPr indent="0" marL="0">
+              <a:buNone/>
+            </a:pPr>
+            <a:r>
+              <a:rPr lang="en-US" sz="900" b="1" spc="100" kern="0" dirty="0">
+                <a:solidFill>
+                  <a:srgbClr val="5A5A5A"/>
+                </a:solidFill>
+                <a:latin typeface="JetBrains Mono" pitchFamily="34" charset="0"/>
+                <a:ea typeface="JetBrains Mono" pitchFamily="34" charset="-122"/>
+                <a:cs typeface="JetBrains Mono" pitchFamily="34" charset="-120"/>
+              </a:rPr>
+              <a:t>ENTERPRISE</a:t>
+            </a:r>
+            <a:endParaRPr lang="en-US" sz="900" dirty="0"/>
+          </a:p>
+        </p:txBody>
+      </p:sp>
+      <p:sp>
+        <p:nvSpPr>
+          <p:cNvPr id="19" name="Text 17"/>
+          <p:cNvSpPr/>
+          <p:nvPr/>
+        </p:nvSpPr>
+        <p:spPr>
+          <a:xfrm>
+            <a:off x="8402117" y="3749040"/>
+            <a:ext cx="2875178" cy="640080"/>
+          </a:xfrm>
+          <a:prstGeom prst="rect">
+            <a:avLst/>
+          </a:prstGeom>
+          <a:noFill/>
+          <a:ln/>
+        </p:spPr>
+        <p:txBody>
+          <a:bodyPr wrap="square" lIns="0" tIns="0" rIns="0" bIns="0" rtlCol="0" anchor="ctr"/>
+          <a:lstStyle/>
+          <a:p>
+            <a:pPr indent="0" marL="0">
+              <a:buNone/>
+            </a:pPr>
+            <a:r>
+              <a:rPr lang="en-US" sz="3600" b="1" i="1" dirty="0">
+                <a:solidFill>
+                  <a:srgbClr val="0A0A0A"/>
                 </a:solidFill>
                 <a:latin typeface="Fraunces" pitchFamily="34" charset="0"/>
                 <a:ea typeface="Fraunces" pitchFamily="34" charset="-122"/>
                 <a:cs typeface="Fraunces" pitchFamily="34" charset="-120"/>
               </a:rPr>
-              <a:t>$2.2B</a:t>
-            </a:r>
-            <a:endParaRPr lang="en-US" sz="8800" dirty="0"/>
+              <a:t>$50K+</a:t>
+            </a:r>
+            <a:pPr indent="0" marL="0">
+              <a:buNone/>
+            </a:pPr>
+            <a:r>
+              <a:rPr lang="en-US" sz="1100" dirty="0">
+                <a:solidFill>
+                  <a:srgbClr val="5A5A5A"/>
+                </a:solidFill>
+                <a:latin typeface="Inter" pitchFamily="34" charset="0"/>
+                <a:ea typeface="Inter" pitchFamily="34" charset="-122"/>
+                <a:cs typeface="Inter" pitchFamily="34" charset="-120"/>
+              </a:rPr>
+              <a:t>  / year</a:t>
+            </a:r>
+            <a:endParaRPr lang="en-US" sz="3600" dirty="0"/>
+          </a:p>
+        </p:txBody>
+      </p:sp>
+      <p:sp>
+        <p:nvSpPr>
+          <p:cNvPr id="20" name="Text 18"/>
+          <p:cNvSpPr/>
+          <p:nvPr/>
+        </p:nvSpPr>
+        <p:spPr>
+          <a:xfrm>
+            <a:off x="8402117" y="4526280"/>
+            <a:ext cx="2875178" cy="365760"/>
+          </a:xfrm>
+          <a:prstGeom prst="rect">
+            <a:avLst/>
+          </a:prstGeom>
+          <a:noFill/>
+          <a:ln/>
+        </p:spPr>
+        <p:txBody>
+          <a:bodyPr wrap="square" lIns="0" tIns="0" rIns="0" bIns="0" rtlCol="0" anchor="ctr"/>
+          <a:lstStyle/>
+          <a:p>
+            <a:pPr indent="0" marL="0">
+              <a:buNone/>
+            </a:pPr>
+            <a:r>
+              <a:rPr lang="en-US" sz="1300" b="1" dirty="0">
+                <a:solidFill>
+                  <a:srgbClr val="1A1A1A"/>
+                </a:solidFill>
+                <a:latin typeface="Inter" pitchFamily="34" charset="0"/>
+                <a:ea typeface="Inter" pitchFamily="34" charset="-122"/>
+                <a:cs typeface="Inter" pitchFamily="34" charset="-120"/>
+              </a:rPr>
+              <a:t>Mid-market &amp; enterprise (50+ eng)</a:t>
+            </a:r>
+            <a:endParaRPr lang="en-US" sz="1300" dirty="0"/>
           </a:p>
         </p:txBody>
       </p:sp>
@@ -8161,34 +8108,101 @@
         </p:nvSpPr>
         <p:spPr>
           <a:xfrm>
-            <a:off x="8229600" y="4937760"/>
-            <a:ext cx="3367735" cy="320040"/>
-          </a:xfrm>
-          <a:prstGeom prst="rect">
-            <a:avLst/>
-          </a:prstGeom>
-          <a:noFill/>
-          <a:ln/>
-        </p:spPr>
-        <p:txBody>
-          <a:bodyPr wrap="square" lIns="0" tIns="0" rIns="0" bIns="0" rtlCol="0" anchor="ctr"/>
-          <a:lstStyle/>
-          <a:p>
-            <a:pPr indent="0" marL="0">
-              <a:buNone/>
-            </a:pPr>
-            <a:r>
-              <a:rPr lang="en-US" sz="1200" dirty="0">
-                <a:solidFill>
-                  <a:srgbClr val="707070"/>
-                </a:solidFill>
-                <a:latin typeface="JetBrains Mono" pitchFamily="34" charset="0"/>
-                <a:ea typeface="JetBrains Mono" pitchFamily="34" charset="-122"/>
-                <a:cs typeface="JetBrains Mono" pitchFamily="34" charset="-120"/>
-              </a:rPr>
-              <a:t>at saturation, B2B SaaS only</a:t>
-            </a:r>
-            <a:endParaRPr lang="en-US" sz="1200" dirty="0"/>
+            <a:off x="8402117" y="4983480"/>
+            <a:ext cx="2875178" cy="914400"/>
+          </a:xfrm>
+          <a:prstGeom prst="rect">
+            <a:avLst/>
+          </a:prstGeom>
+          <a:noFill/>
+          <a:ln/>
+        </p:spPr>
+        <p:txBody>
+          <a:bodyPr wrap="square" lIns="0" tIns="0" rIns="0" bIns="0" rtlCol="0" anchor="ctr"/>
+          <a:lstStyle/>
+          <a:p>
+            <a:pPr marL="342900" indent="-342900">
+              <a:spcAft>
+                <a:spcPts val="400"/>
+              </a:spcAft>
+              <a:buSzPct val="100000"/>
+              <a:buChar char="→"/>
+            </a:pPr>
+            <a:r>
+              <a:rPr lang="en-US" sz="1100" dirty="0">
+                <a:solidFill>
+                  <a:srgbClr val="3A3A3A"/>
+                </a:solidFill>
+                <a:latin typeface="Inter" pitchFamily="34" charset="0"/>
+                <a:ea typeface="Inter" pitchFamily="34" charset="-122"/>
+                <a:cs typeface="Inter" pitchFamily="34" charset="-120"/>
+              </a:rPr>
+              <a:t>expert mode + compliance</a:t>
+            </a:r>
+            <a:endParaRPr lang="en-US" sz="1100" dirty="0"/>
+          </a:p>
+          <a:p>
+            <a:pPr marL="342900" indent="-342900">
+              <a:spcAft>
+                <a:spcPts val="400"/>
+              </a:spcAft>
+              <a:buSzPct val="100000"/>
+              <a:buChar char="→"/>
+            </a:pPr>
+            <a:r>
+              <a:rPr lang="en-US" sz="1100" dirty="0">
+                <a:solidFill>
+                  <a:srgbClr val="3A3A3A"/>
+                </a:solidFill>
+                <a:latin typeface="Inter" pitchFamily="34" charset="0"/>
+                <a:ea typeface="Inter" pitchFamily="34" charset="-122"/>
+                <a:cs typeface="Inter" pitchFamily="34" charset="-120"/>
+              </a:rPr>
+              <a:t>On-prem engine</a:t>
+            </a:r>
+            <a:endParaRPr lang="en-US" sz="1100" dirty="0"/>
+          </a:p>
+          <a:p>
+            <a:pPr marL="342900" indent="-342900">
+              <a:spcAft>
+                <a:spcPts val="400"/>
+              </a:spcAft>
+              <a:buSzPct val="100000"/>
+              <a:buChar char="→"/>
+            </a:pPr>
+            <a:r>
+              <a:rPr lang="en-US" sz="1100" dirty="0">
+                <a:solidFill>
+                  <a:srgbClr val="3A3A3A"/>
+                </a:solidFill>
+                <a:latin typeface="Inter" pitchFamily="34" charset="0"/>
+                <a:ea typeface="Inter" pitchFamily="34" charset="-122"/>
+                <a:cs typeface="Inter" pitchFamily="34" charset="-120"/>
+              </a:rPr>
+              <a:t>SOC2 / HIPAA bundles</a:t>
+            </a:r>
+            <a:endParaRPr lang="en-US" sz="1100" dirty="0"/>
+          </a:p>
+          <a:p>
+            <a:pPr marL="342900" indent="-342900">
+              <a:spcAft>
+                <a:spcPts val="400"/>
+              </a:spcAft>
+              <a:buSzPct val="100000"/>
+              <a:buChar char="→"/>
+            </a:pPr>
+            <a:r>
+              <a:rPr lang="en-US" sz="1100" dirty="0">
+                <a:solidFill>
+                  <a:srgbClr val="3A3A3A"/>
+                </a:solidFill>
+                <a:latin typeface="Inter" pitchFamily="34" charset="0"/>
+                <a:ea typeface="Inter" pitchFamily="34" charset="-122"/>
+                <a:cs typeface="Inter" pitchFamily="34" charset="-120"/>
+              </a:rPr>
+              <a:t>Founder advisor seat</a:t>
+            </a:r>
+            <a:endParaRPr lang="en-US" sz="1100" dirty="0"/>
           </a:p>
         </p:txBody>
       </p:sp>
@@ -8200,46 +8214,32 @@
         </p:nvSpPr>
         <p:spPr>
           <a:xfrm>
-            <a:off x="8229600" y="5394960"/>
-            <a:ext cx="3367735" cy="1188720"/>
-          </a:xfrm>
-          <a:prstGeom prst="rect">
-            <a:avLst/>
-          </a:prstGeom>
-          <a:noFill/>
-          <a:ln/>
-        </p:spPr>
-        <p:txBody>
-          <a:bodyPr wrap="square" lIns="0" tIns="0" rIns="0" bIns="0" rtlCol="0" anchor="ctr"/>
-          <a:lstStyle/>
-          <a:p>
-            <a:pPr indent="0" marL="0">
-              <a:buNone/>
-            </a:pPr>
-            <a:r>
-              <a:rPr lang="en-US" sz="1200" b="1" dirty="0">
-                <a:solidFill>
-                  <a:srgbClr val="0A0A0A"/>
-                </a:solidFill>
-                <a:latin typeface="Inter" pitchFamily="34" charset="0"/>
-                <a:ea typeface="Inter" pitchFamily="34" charset="-122"/>
-                <a:cs typeface="Inter" pitchFamily="34" charset="-120"/>
-              </a:rPr>
-              <a:t>+ $5B adjacent: </a:t>
-            </a:r>
-            <a:pPr indent="0" marL="0">
-              <a:buNone/>
-            </a:pPr>
-            <a:r>
-              <a:rPr lang="en-US" sz="1200" dirty="0">
+            <a:off x="594360" y="6217920"/>
+            <a:ext cx="11002975" cy="365760"/>
+          </a:xfrm>
+          <a:prstGeom prst="rect">
+            <a:avLst/>
+          </a:prstGeom>
+          <a:noFill/>
+          <a:ln/>
+        </p:spPr>
+        <p:txBody>
+          <a:bodyPr wrap="square" lIns="0" tIns="0" rIns="0" bIns="0" rtlCol="0" anchor="ctr"/>
+          <a:lstStyle/>
+          <a:p>
+            <a:pPr indent="0" marL="0">
+              <a:buNone/>
+            </a:pPr>
+            <a:r>
+              <a:rPr lang="en-US" sz="1200" i="1" dirty="0">
                 <a:solidFill>
                   <a:srgbClr val="3A3A3A"/>
                 </a:solidFill>
-                <a:latin typeface="Inter" pitchFamily="34" charset="0"/>
-                <a:ea typeface="Inter" pitchFamily="34" charset="-122"/>
-                <a:cs typeface="Inter" pitchFamily="34" charset="-120"/>
-              </a:rPr>
-              <a:t>methodology consulting, contract pattern marketplaces, audit + compliance bundles, training.</a:t>
+                <a:latin typeface="Fraunces" pitchFamily="34" charset="0"/>
+                <a:ea typeface="Fraunces" pitchFamily="34" charset="-122"/>
+                <a:cs typeface="Fraunces" pitchFamily="34" charset="-120"/>
+              </a:rPr>
+              <a:t>GTM: land via individual devs (free Skill, Discord, GitHub). Expand to teams when drift becomes a P1.</a:t>
             </a:r>
             <a:endParaRPr lang="en-US" sz="1200" dirty="0"/>
           </a:p>
